--- a/slides/token-optimizer-reworked-deck.pptx
+++ b/slides/token-optimizer-reworked-deck.pptx
@@ -10883,7 +10883,7 @@
                   <a:srgbClr val="101827"/>
                 </a:solidFill>
               </a:rPr>
-              <a:t>Ponytail: hạn chế xây vượt phạm vi</a:t>
+              <a:t>Giới hạn phạm vi code và abstraction được phép tạo</a:t>
             </a:r>
           </a:p>
         </p:txBody>
@@ -11017,7 +11017,7 @@
                   <a:srgbClr val="101827"/>
                 </a:solidFill>
               </a:rPr>
-              <a:t>Caveman (skill): rút gọn phần diễn giải</a:t>
+              <a:t>Yêu cầu phần diễn giải ngắn, đi thẳng vào kết quả</a:t>
             </a:r>
           </a:p>
         </p:txBody>
@@ -11525,7 +11525,7 @@
                   <a:srgbClr val="C43C4E"/>
                 </a:solidFill>
               </a:rPr>
-              <a:t>Giới hạn phần agent xây dựng</a:t>
+              <a:t>Ưu tiên tái sử dụng; chỉ xây phần tối thiểu cần thiết.</a:t>
             </a:r>
           </a:p>
         </p:txBody>
@@ -11660,7 +11660,7 @@
                   <a:srgbClr val="D97706"/>
                 </a:solidFill>
               </a:rPr>
-              <a:t>Giảm prose trong đầu ra</a:t>
+              <a:t>Rút ngắn văn xuôi; không nén code, diff hay kết quả tool.</a:t>
             </a:r>
           </a:p>
         </p:txBody>
@@ -11711,7 +11711,7 @@
                   <a:srgbClr val="6246B5"/>
                 </a:solidFill>
               </a:rPr>
-              <a:t>Ponytail và Caveman cùng tác động tại node lần gọi model, nhưng giải quyết hai vấn đề khác nhau.</a:t>
+              <a:t>Ponytail kiểm soát phần được xây; Caveman kiểm soát độ dài phần được nói.</a:t>
             </a:r>
           </a:p>
         </p:txBody>
@@ -12904,7 +12904,7 @@
                   <a:srgbClr val="101827"/>
                 </a:solidFill>
               </a:rPr>
-              <a:t>CodeGraph: xem quan hệ symbol, caller và impact</a:t>
+              <a:t>Dùng chỉ mục code để xác định symbol, caller và impact</a:t>
             </a:r>
           </a:p>
         </p:txBody>
@@ -13681,7 +13681,7 @@
                   <a:srgbClr val="16845B"/>
                 </a:solidFill>
               </a:rPr>
-              <a:t>chỉ ra quan hệ cần xem, rồi đọc đúng file</a:t>
+              <a:t>Lập graph code local để hỏi symbol, caller và impact.</a:t>
             </a:r>
           </a:p>
         </p:txBody>
@@ -13732,7 +13732,7 @@
                   <a:srgbClr val="6246B5"/>
                 </a:solidFill>
               </a:rPr>
-              <a:t>CodeGraph phù hợp khi vấn đề là định vị và hiểu quan hệ trong repo lớn.</a:t>
+              <a:t>CodeGraph giảm các vòng search/read khi agent cần hiểu quan hệ trong repo lớn.</a:t>
             </a:r>
           </a:p>
         </p:txBody>
@@ -14925,7 +14925,7 @@
                   <a:srgbClr val="101827"/>
                 </a:solidFill>
               </a:rPr>
-              <a:t>RTK: rút gọn build, test và linter output</a:t>
+              <a:t>Lọc và rút gọn build, test hoặc linter output</a:t>
             </a:r>
           </a:p>
         </p:txBody>
@@ -15681,7 +15681,7 @@
                   <a:srgbClr val="64748B"/>
                 </a:solidFill>
               </a:rPr>
-              <a:t>RTK / LIMIT</a:t>
+              <a:t>RTK</a:t>
             </a:r>
           </a:p>
           <a:p xmlns:a="http://schemas.openxmlformats.org/drawingml/2006/main">
@@ -15702,7 +15702,7 @@
                   <a:srgbClr val="64748B"/>
                 </a:solidFill>
               </a:rPr>
-              <a:t>tóm tắt lỗi</a:t>
+              <a:t>lọc output</a:t>
             </a:r>
           </a:p>
         </p:txBody>
@@ -16023,7 +16023,7 @@
                   <a:srgbClr val="6246B5"/>
                 </a:solidFill>
               </a:rPr>
-              <a:t>RTK nằm trên cạnh tool trả kết quả: giảm payload trước khi nó đi vào context.</a:t>
+              <a:t>RTK lọc, gom nhóm, cắt và khử trùng lặp shell output trước khi nó đi vào context.</a:t>
             </a:r>
           </a:p>
         </p:txBody>
@@ -31942,7 +31942,7 @@
                   <a:srgbClr val="334155"/>
                 </a:solidFill>
               </a:rPr>
-              <a:t>System / developer instructions</a:t>
+              <a:t>Context được gửi vào mỗi lần gọi model</a:t>
             </a:r>
           </a:p>
         </p:txBody>
@@ -32025,7 +32025,7 @@
                   <a:srgbClr val="334155"/>
                 </a:solidFill>
               </a:rPr>
-              <a:t>Rules, tool schemas, history</a:t>
+              <a:t>Kết quả tool từ vòng trước trở thành input</a:t>
             </a:r>
           </a:p>
         </p:txBody>
@@ -32108,7 +32108,7 @@
                   <a:srgbClr val="334155"/>
                 </a:solidFill>
               </a:rPr>
-              <a:t>User message, files, retrieval</a:t>
+              <a:t>Cache chỉ giảm đơn giá cho phần được sử dụng lại</a:t>
             </a:r>
           </a:p>
         </p:txBody>
@@ -32191,7 +32191,7 @@
                   <a:srgbClr val="334155"/>
                 </a:solidFill>
               </a:rPr>
-              <a:t>Tool results được append</a:t>
+              <a:t>Input lặp lại vẫn chiếm context window</a:t>
             </a:r>
           </a:p>
         </p:txBody>
@@ -32388,7 +32388,7 @@
                   <a:srgbClr val="334155"/>
                 </a:solidFill>
               </a:rPr>
-              <a:t>Reasoning / thinking nếu được tính</a:t>
+              <a:t>Reasoning, tool call và final response</a:t>
             </a:r>
           </a:p>
         </p:txBody>
@@ -32471,7 +32471,7 @@
                   <a:srgbClr val="334155"/>
                 </a:solidFill>
               </a:rPr>
-              <a:t>Tool call do model sinh ra</a:t>
+              <a:t>Output thường có đơn giá cao hơn input</a:t>
             </a:r>
           </a:p>
         </p:txBody>
@@ -32554,7 +32554,7 @@
                   <a:srgbClr val="334155"/>
                 </a:solidFill>
               </a:rPr>
-              <a:t>Final response</a:t>
+              <a:t>Trả lời ngắn chưa chắc làm cả task rẻ hơn</a:t>
             </a:r>
           </a:p>
         </p:txBody>

--- a/slides/token-optimizer-reworked-deck.pptx
+++ b/slides/token-optimizer-reworked-deck.pptx
@@ -127,6 +127,11 @@
       </a:defRPr>
     </a:lvl9pPr>
   </p:defaultTextStyle>
+  <p:extLst>
+    <p:ext uri="{EFAFB233-063F-42B5-8137-9DF3F51BA10A}">
+      <p15:sldGuideLst xmlns:p15="http://schemas.microsoft.com/office/powerpoint/2012/main"/>
+    </p:ext>
+  </p:extLst>
 </p:presentation>
 </file>
 
@@ -329,6 +334,13 @@
           </p:nvPr>
         </p:nvSpPr>
         <p:spPr/>
+        <p:txBody>
+          <a:bodyPr/>
+          <a:lstStyle/>
+          <a:p>
+            <a:endParaRPr lang="en-US"/>
+          </a:p>
+        </p:txBody>
       </p:sp>
       <p:sp>
         <p:nvSpPr>
@@ -406,6 +418,13 @@
           </p:nvPr>
         </p:nvSpPr>
         <p:spPr/>
+        <p:txBody>
+          <a:bodyPr/>
+          <a:lstStyle/>
+          <a:p>
+            <a:endParaRPr lang="en-US"/>
+          </a:p>
+        </p:txBody>
       </p:sp>
       <p:sp>
         <p:nvSpPr>
@@ -589,6 +608,13 @@
           </p:nvPr>
         </p:nvSpPr>
         <p:spPr/>
+        <p:txBody>
+          <a:bodyPr/>
+          <a:lstStyle/>
+          <a:p>
+            <a:endParaRPr lang="en-US"/>
+          </a:p>
+        </p:txBody>
       </p:sp>
       <p:sp>
         <p:nvSpPr>
@@ -689,6 +715,13 @@
           </p:nvPr>
         </p:nvSpPr>
         <p:spPr/>
+        <p:txBody>
+          <a:bodyPr/>
+          <a:lstStyle/>
+          <a:p>
+            <a:endParaRPr lang="en-US"/>
+          </a:p>
+        </p:txBody>
       </p:sp>
       <p:sp>
         <p:nvSpPr>
@@ -766,6 +799,13 @@
           </p:nvPr>
         </p:nvSpPr>
         <p:spPr/>
+        <p:txBody>
+          <a:bodyPr/>
+          <a:lstStyle/>
+          <a:p>
+            <a:endParaRPr lang="en-US"/>
+          </a:p>
+        </p:txBody>
       </p:sp>
       <p:sp>
         <p:nvSpPr>
@@ -843,6 +883,13 @@
           </p:nvPr>
         </p:nvSpPr>
         <p:spPr/>
+        <p:txBody>
+          <a:bodyPr/>
+          <a:lstStyle/>
+          <a:p>
+            <a:endParaRPr lang="en-US"/>
+          </a:p>
+        </p:txBody>
       </p:sp>
       <p:sp>
         <p:nvSpPr>
@@ -920,6 +967,13 @@
           </p:nvPr>
         </p:nvSpPr>
         <p:spPr/>
+        <p:txBody>
+          <a:bodyPr/>
+          <a:lstStyle/>
+          <a:p>
+            <a:endParaRPr lang="en-US"/>
+          </a:p>
+        </p:txBody>
       </p:sp>
       <p:sp>
         <p:nvSpPr>
@@ -997,6 +1051,13 @@
           </p:nvPr>
         </p:nvSpPr>
         <p:spPr/>
+        <p:txBody>
+          <a:bodyPr/>
+          <a:lstStyle/>
+          <a:p>
+            <a:endParaRPr lang="en-US"/>
+          </a:p>
+        </p:txBody>
       </p:sp>
       <p:sp>
         <p:nvSpPr>
@@ -1074,6 +1135,13 @@
           </p:nvPr>
         </p:nvSpPr>
         <p:spPr/>
+        <p:txBody>
+          <a:bodyPr/>
+          <a:lstStyle/>
+          <a:p>
+            <a:endParaRPr lang="en-US"/>
+          </a:p>
+        </p:txBody>
       </p:sp>
       <p:sp>
         <p:nvSpPr>
@@ -1151,6 +1219,13 @@
           </p:nvPr>
         </p:nvSpPr>
         <p:spPr/>
+        <p:txBody>
+          <a:bodyPr/>
+          <a:lstStyle/>
+          <a:p>
+            <a:endParaRPr lang="en-US"/>
+          </a:p>
+        </p:txBody>
       </p:sp>
       <p:sp>
         <p:nvSpPr>
@@ -1228,6 +1303,13 @@
           </p:nvPr>
         </p:nvSpPr>
         <p:spPr/>
+        <p:txBody>
+          <a:bodyPr/>
+          <a:lstStyle/>
+          <a:p>
+            <a:endParaRPr lang="en-US"/>
+          </a:p>
+        </p:txBody>
       </p:sp>
       <p:sp>
         <p:nvSpPr>
@@ -1323,6 +1405,13 @@
           </p:nvPr>
         </p:nvSpPr>
         <p:spPr/>
+        <p:txBody>
+          <a:bodyPr/>
+          <a:lstStyle/>
+          <a:p>
+            <a:endParaRPr lang="en-US"/>
+          </a:p>
+        </p:txBody>
       </p:sp>
       <p:sp>
         <p:nvSpPr>
@@ -1400,6 +1489,13 @@
           </p:nvPr>
         </p:nvSpPr>
         <p:spPr/>
+        <p:txBody>
+          <a:bodyPr/>
+          <a:lstStyle/>
+          <a:p>
+            <a:endParaRPr lang="en-US"/>
+          </a:p>
+        </p:txBody>
       </p:sp>
       <p:sp>
         <p:nvSpPr>
@@ -1489,6 +1585,13 @@
           </p:nvPr>
         </p:nvSpPr>
         <p:spPr/>
+        <p:txBody>
+          <a:bodyPr/>
+          <a:lstStyle/>
+          <a:p>
+            <a:endParaRPr lang="en-US"/>
+          </a:p>
+        </p:txBody>
       </p:sp>
       <p:sp>
         <p:nvSpPr>
@@ -1606,6 +1709,13 @@
           </p:nvPr>
         </p:nvSpPr>
         <p:spPr/>
+        <p:txBody>
+          <a:bodyPr/>
+          <a:lstStyle/>
+          <a:p>
+            <a:endParaRPr lang="en-US"/>
+          </a:p>
+        </p:txBody>
       </p:sp>
       <p:sp>
         <p:nvSpPr>
@@ -1683,6 +1793,13 @@
           </p:nvPr>
         </p:nvSpPr>
         <p:spPr/>
+        <p:txBody>
+          <a:bodyPr/>
+          <a:lstStyle/>
+          <a:p>
+            <a:endParaRPr lang="en-US"/>
+          </a:p>
+        </p:txBody>
       </p:sp>
       <p:sp>
         <p:nvSpPr>
@@ -1778,6 +1895,13 @@
           </p:nvPr>
         </p:nvSpPr>
         <p:spPr/>
+        <p:txBody>
+          <a:bodyPr/>
+          <a:lstStyle/>
+          <a:p>
+            <a:endParaRPr lang="en-US"/>
+          </a:p>
+        </p:txBody>
       </p:sp>
       <p:sp>
         <p:nvSpPr>
@@ -1883,6 +2007,13 @@
           </p:nvPr>
         </p:nvSpPr>
         <p:spPr/>
+        <p:txBody>
+          <a:bodyPr/>
+          <a:lstStyle/>
+          <a:p>
+            <a:endParaRPr lang="en-US"/>
+          </a:p>
+        </p:txBody>
       </p:sp>
       <p:sp>
         <p:nvSpPr>
@@ -1960,6 +2091,13 @@
           </p:nvPr>
         </p:nvSpPr>
         <p:spPr/>
+        <p:txBody>
+          <a:bodyPr/>
+          <a:lstStyle/>
+          <a:p>
+            <a:endParaRPr lang="en-US"/>
+          </a:p>
+        </p:txBody>
       </p:sp>
       <p:sp>
         <p:nvSpPr>
@@ -1977,39 +2115,238 @@
           <a:lstStyle/>
           <a:p>
             <a:r>
-              <a:t>Model chỉ nhận payload và sinh kết quả. Harness đứng ở hai phía: chuẩn bị payload trước khi gọi model, rồi xử lý response hoặc tool intent sau khi model trả về. Vì vậy, trong ngữ cảnh coding agent: Agent = Harness + Model.</a:t>
-            </a:r>
-          </a:p>
-          <a:p>
-            <a:endParaRPr/>
-          </a:p>
-          <a:p>
-            <a:r>
+              <a:rPr dirty="0"/>
+              <a:t>Model </a:t>
+            </a:r>
+            <a:r>
+              <a:rPr dirty="0" err="1"/>
+              <a:t>chỉ</a:t>
+            </a:r>
+            <a:r>
+              <a:rPr dirty="0"/>
+              <a:t> nhận payload và </a:t>
+            </a:r>
+            <a:r>
+              <a:rPr dirty="0" err="1"/>
+              <a:t>sinh</a:t>
+            </a:r>
+            <a:r>
+              <a:rPr dirty="0"/>
+              <a:t> </a:t>
+            </a:r>
+            <a:r>
+              <a:rPr dirty="0" err="1"/>
+              <a:t>kết</a:t>
+            </a:r>
+            <a:r>
+              <a:rPr dirty="0"/>
+              <a:t> </a:t>
+            </a:r>
+            <a:r>
+              <a:rPr dirty="0" err="1"/>
+              <a:t>quả</a:t>
+            </a:r>
+            <a:r>
+              <a:rPr dirty="0"/>
+              <a:t>. Harness </a:t>
+            </a:r>
+            <a:r>
+              <a:rPr dirty="0" err="1"/>
+              <a:t>đứng</a:t>
+            </a:r>
+            <a:r>
+              <a:rPr dirty="0"/>
+              <a:t> ở </a:t>
+            </a:r>
+            <a:r>
+              <a:rPr dirty="0" err="1"/>
+              <a:t>hai</a:t>
+            </a:r>
+            <a:r>
+              <a:rPr dirty="0"/>
+              <a:t> </a:t>
+            </a:r>
+            <a:r>
+              <a:rPr dirty="0" err="1"/>
+              <a:t>phía</a:t>
+            </a:r>
+            <a:r>
+              <a:rPr dirty="0"/>
+              <a:t>: </a:t>
+            </a:r>
+            <a:r>
+              <a:rPr dirty="0" err="1"/>
+              <a:t>chuẩn</a:t>
+            </a:r>
+            <a:r>
+              <a:rPr dirty="0"/>
+              <a:t> </a:t>
+            </a:r>
+            <a:r>
+              <a:rPr dirty="0" err="1"/>
+              <a:t>bị</a:t>
+            </a:r>
+            <a:r>
+              <a:rPr dirty="0"/>
+              <a:t> payload </a:t>
+            </a:r>
+            <a:r>
+              <a:rPr dirty="0" err="1"/>
+              <a:t>trước</a:t>
+            </a:r>
+            <a:r>
+              <a:rPr dirty="0"/>
+              <a:t> </a:t>
+            </a:r>
+            <a:r>
+              <a:rPr dirty="0" err="1"/>
+              <a:t>khi</a:t>
+            </a:r>
+            <a:r>
+              <a:rPr dirty="0"/>
+              <a:t> </a:t>
+            </a:r>
+            <a:r>
+              <a:rPr dirty="0" err="1"/>
+              <a:t>gọi</a:t>
+            </a:r>
+            <a:r>
+              <a:rPr dirty="0"/>
+              <a:t> model, </a:t>
+            </a:r>
+            <a:r>
+              <a:rPr dirty="0" err="1"/>
+              <a:t>rồi</a:t>
+            </a:r>
+            <a:r>
+              <a:rPr dirty="0"/>
+              <a:t> </a:t>
+            </a:r>
+            <a:r>
+              <a:rPr dirty="0" err="1"/>
+              <a:t>xử</a:t>
+            </a:r>
+            <a:r>
+              <a:rPr dirty="0"/>
+              <a:t> lý response </a:t>
+            </a:r>
+            <a:r>
+              <a:rPr dirty="0" err="1"/>
+              <a:t>hoặc</a:t>
+            </a:r>
+            <a:r>
+              <a:rPr dirty="0"/>
+              <a:t> tool intent </a:t>
+            </a:r>
+            <a:r>
+              <a:rPr dirty="0" err="1"/>
+              <a:t>sau</a:t>
+            </a:r>
+            <a:r>
+              <a:rPr dirty="0"/>
+              <a:t> </a:t>
+            </a:r>
+            <a:r>
+              <a:rPr dirty="0" err="1"/>
+              <a:t>khi</a:t>
+            </a:r>
+            <a:r>
+              <a:rPr dirty="0"/>
+              <a:t> model </a:t>
+            </a:r>
+            <a:r>
+              <a:rPr dirty="0" err="1"/>
+              <a:t>trả</a:t>
+            </a:r>
+            <a:r>
+              <a:rPr dirty="0"/>
+              <a:t> </a:t>
+            </a:r>
+            <a:r>
+              <a:rPr dirty="0" err="1"/>
+              <a:t>về</a:t>
+            </a:r>
+            <a:r>
+              <a:rPr dirty="0"/>
+              <a:t>. </a:t>
+            </a:r>
+            <a:r>
+              <a:rPr dirty="0" err="1"/>
+              <a:t>Vì</a:t>
+            </a:r>
+            <a:r>
+              <a:rPr dirty="0"/>
+              <a:t> </a:t>
+            </a:r>
+            <a:r>
+              <a:rPr dirty="0" err="1"/>
+              <a:t>vậy</a:t>
+            </a:r>
+            <a:r>
+              <a:rPr dirty="0"/>
+              <a:t>, </a:t>
+            </a:r>
+            <a:r>
+              <a:rPr dirty="0" err="1"/>
+              <a:t>trong</a:t>
+            </a:r>
+            <a:r>
+              <a:rPr dirty="0"/>
+              <a:t> </a:t>
+            </a:r>
+            <a:r>
+              <a:rPr dirty="0" err="1"/>
+              <a:t>ngữ</a:t>
+            </a:r>
+            <a:r>
+              <a:rPr dirty="0"/>
+              <a:t> </a:t>
+            </a:r>
+            <a:r>
+              <a:rPr dirty="0" err="1"/>
+              <a:t>cảnh</a:t>
+            </a:r>
+            <a:r>
+              <a:rPr dirty="0"/>
+              <a:t> coding agent: Agent = Harness + Model.</a:t>
+            </a:r>
+          </a:p>
+          <a:p>
+            <a:endParaRPr dirty="0"/>
+          </a:p>
+          <a:p>
+            <a:r>
+              <a:rPr dirty="0"/>
               <a:t>[Sources]</a:t>
             </a:r>
           </a:p>
           <a:p>
             <a:r>
+              <a:rPr dirty="0"/>
               <a:t>- https://support.claude.com/en/articles/14555877-claude-code-communications-kit</a:t>
             </a:r>
           </a:p>
           <a:p>
             <a:r>
+              <a:rPr dirty="0"/>
               <a:t>- https://openai.com/codex/</a:t>
             </a:r>
           </a:p>
           <a:p>
             <a:r>
+              <a:rPr dirty="0"/>
               <a:t>- https://developers.google.com/gemini-code-assist/docs/gemini-cli</a:t>
             </a:r>
           </a:p>
           <a:p>
             <a:r>
+              <a:rPr dirty="0"/>
               <a:t>- https://www.jetbrains.com/junie/</a:t>
             </a:r>
           </a:p>
           <a:p>
             <a:r>
+              <a:rPr dirty="0"/>
               <a:t>[/Sources]</a:t>
             </a:r>
           </a:p>
@@ -2070,6 +2407,13 @@
           </p:nvPr>
         </p:nvSpPr>
         <p:spPr/>
+        <p:txBody>
+          <a:bodyPr/>
+          <a:lstStyle/>
+          <a:p>
+            <a:endParaRPr lang="en-US"/>
+          </a:p>
+        </p:txBody>
       </p:sp>
       <p:sp>
         <p:nvSpPr>
@@ -2165,6 +2509,13 @@
           </p:nvPr>
         </p:nvSpPr>
         <p:spPr/>
+        <p:txBody>
+          <a:bodyPr/>
+          <a:lstStyle/>
+          <a:p>
+            <a:endParaRPr lang="en-US"/>
+          </a:p>
+        </p:txBody>
       </p:sp>
       <p:sp>
         <p:nvSpPr>
@@ -2600,6 +2951,13 @@
             </a:solidFill>
           </a:ln>
         </p:spPr>
+        <p:txBody>
+          <a:bodyPr/>
+          <a:lstStyle/>
+          <a:p>
+            <a:endParaRPr lang="en-US"/>
+          </a:p>
+        </p:txBody>
       </p:sp>
       <p:sp>
         <p:nvSpPr>
@@ -2629,6 +2987,13 @@
             </a:solidFill>
           </a:ln>
         </p:spPr>
+        <p:txBody>
+          <a:bodyPr/>
+          <a:lstStyle/>
+          <a:p>
+            <a:endParaRPr lang="en-US"/>
+          </a:p>
+        </p:txBody>
       </p:sp>
       <p:sp>
         <p:nvSpPr>
@@ -2658,6 +3023,13 @@
             </a:solidFill>
           </a:ln>
         </p:spPr>
+        <p:txBody>
+          <a:bodyPr/>
+          <a:lstStyle/>
+          <a:p>
+            <a:endParaRPr lang="en-US"/>
+          </a:p>
+        </p:txBody>
       </p:sp>
       <p:sp>
         <p:nvSpPr>
@@ -2687,6 +3059,13 @@
             </a:solidFill>
           </a:ln>
         </p:spPr>
+        <p:txBody>
+          <a:bodyPr/>
+          <a:lstStyle/>
+          <a:p>
+            <a:endParaRPr lang="en-US"/>
+          </a:p>
+        </p:txBody>
       </p:sp>
       <p:sp>
         <p:nvSpPr>
@@ -2716,6 +3095,13 @@
             </a:solidFill>
           </a:ln>
         </p:spPr>
+        <p:txBody>
+          <a:bodyPr/>
+          <a:lstStyle/>
+          <a:p>
+            <a:endParaRPr lang="en-US"/>
+          </a:p>
+        </p:txBody>
       </p:sp>
       <p:sp>
         <p:nvSpPr>
@@ -2745,6 +3131,13 @@
             </a:solidFill>
           </a:ln>
         </p:spPr>
+        <p:txBody>
+          <a:bodyPr/>
+          <a:lstStyle/>
+          <a:p>
+            <a:endParaRPr lang="en-US"/>
+          </a:p>
+        </p:txBody>
       </p:sp>
       <p:sp>
         <p:nvSpPr>
@@ -2774,6 +3167,13 @@
             </a:solidFill>
           </a:ln>
         </p:spPr>
+        <p:txBody>
+          <a:bodyPr/>
+          <a:lstStyle/>
+          <a:p>
+            <a:endParaRPr lang="en-US"/>
+          </a:p>
+        </p:txBody>
       </p:sp>
       <p:sp>
         <p:nvSpPr>
@@ -2803,6 +3203,13 @@
             </a:solidFill>
           </a:ln>
         </p:spPr>
+        <p:txBody>
+          <a:bodyPr/>
+          <a:lstStyle/>
+          <a:p>
+            <a:endParaRPr lang="en-US"/>
+          </a:p>
+        </p:txBody>
       </p:sp>
       <p:sp>
         <p:nvSpPr>
@@ -2832,6 +3239,13 @@
             </a:solidFill>
           </a:ln>
         </p:spPr>
+        <p:txBody>
+          <a:bodyPr/>
+          <a:lstStyle/>
+          <a:p>
+            <a:endParaRPr lang="en-US"/>
+          </a:p>
+        </p:txBody>
       </p:sp>
       <p:sp>
         <p:nvSpPr>
@@ -2861,6 +3275,13 @@
             </a:solidFill>
           </a:ln>
         </p:spPr>
+        <p:txBody>
+          <a:bodyPr/>
+          <a:lstStyle/>
+          <a:p>
+            <a:endParaRPr lang="en-US"/>
+          </a:p>
+        </p:txBody>
       </p:sp>
       <p:sp>
         <p:nvSpPr>
@@ -2890,6 +3311,13 @@
             </a:solidFill>
           </a:ln>
         </p:spPr>
+        <p:txBody>
+          <a:bodyPr/>
+          <a:lstStyle/>
+          <a:p>
+            <a:endParaRPr lang="en-US"/>
+          </a:p>
+        </p:txBody>
       </p:sp>
       <p:sp>
         <p:nvSpPr>
@@ -2919,6 +3347,13 @@
             </a:solidFill>
           </a:ln>
         </p:spPr>
+        <p:txBody>
+          <a:bodyPr/>
+          <a:lstStyle/>
+          <a:p>
+            <a:endParaRPr lang="en-US"/>
+          </a:p>
+        </p:txBody>
       </p:sp>
       <p:sp>
         <p:nvSpPr>
@@ -2948,6 +3383,13 @@
             </a:solidFill>
           </a:ln>
         </p:spPr>
+        <p:txBody>
+          <a:bodyPr/>
+          <a:lstStyle/>
+          <a:p>
+            <a:endParaRPr lang="en-US"/>
+          </a:p>
+        </p:txBody>
       </p:sp>
       <p:sp>
         <p:nvSpPr>
@@ -2977,6 +3419,13 @@
             </a:solidFill>
           </a:ln>
         </p:spPr>
+        <p:txBody>
+          <a:bodyPr/>
+          <a:lstStyle/>
+          <a:p>
+            <a:endParaRPr lang="en-US"/>
+          </a:p>
+        </p:txBody>
       </p:sp>
       <p:sp>
         <p:nvSpPr>
@@ -3006,6 +3455,13 @@
             </a:solidFill>
           </a:ln>
         </p:spPr>
+        <p:txBody>
+          <a:bodyPr/>
+          <a:lstStyle/>
+          <a:p>
+            <a:endParaRPr lang="en-US"/>
+          </a:p>
+        </p:txBody>
       </p:sp>
       <p:sp>
         <p:nvSpPr>
@@ -3035,6 +3491,13 @@
             </a:solidFill>
           </a:ln>
         </p:spPr>
+        <p:txBody>
+          <a:bodyPr/>
+          <a:lstStyle/>
+          <a:p>
+            <a:endParaRPr lang="en-US"/>
+          </a:p>
+        </p:txBody>
       </p:sp>
       <p:sp>
         <p:nvSpPr>
@@ -3064,6 +3527,13 @@
             </a:solidFill>
           </a:ln>
         </p:spPr>
+        <p:txBody>
+          <a:bodyPr/>
+          <a:lstStyle/>
+          <a:p>
+            <a:endParaRPr lang="en-US"/>
+          </a:p>
+        </p:txBody>
       </p:sp>
       <p:sp>
         <p:nvSpPr>
@@ -3093,6 +3563,13 @@
             </a:solidFill>
           </a:ln>
         </p:spPr>
+        <p:txBody>
+          <a:bodyPr/>
+          <a:lstStyle/>
+          <a:p>
+            <a:endParaRPr lang="en-US"/>
+          </a:p>
+        </p:txBody>
       </p:sp>
       <p:sp>
         <p:nvSpPr>
@@ -3122,6 +3599,13 @@
             </a:solidFill>
           </a:ln>
         </p:spPr>
+        <p:txBody>
+          <a:bodyPr/>
+          <a:lstStyle/>
+          <a:p>
+            <a:endParaRPr lang="en-US"/>
+          </a:p>
+        </p:txBody>
       </p:sp>
       <p:sp>
         <p:nvSpPr>
@@ -3151,6 +3635,13 @@
             </a:solidFill>
           </a:ln>
         </p:spPr>
+        <p:txBody>
+          <a:bodyPr/>
+          <a:lstStyle/>
+          <a:p>
+            <a:endParaRPr lang="en-US"/>
+          </a:p>
+        </p:txBody>
       </p:sp>
       <p:sp>
         <p:nvSpPr>
@@ -3180,6 +3671,13 @@
             </a:solidFill>
           </a:ln>
         </p:spPr>
+        <p:txBody>
+          <a:bodyPr/>
+          <a:lstStyle/>
+          <a:p>
+            <a:endParaRPr lang="en-US"/>
+          </a:p>
+        </p:txBody>
       </p:sp>
       <p:sp>
         <p:nvSpPr>
@@ -3209,6 +3707,13 @@
             </a:solidFill>
           </a:ln>
         </p:spPr>
+        <p:txBody>
+          <a:bodyPr/>
+          <a:lstStyle/>
+          <a:p>
+            <a:endParaRPr lang="en-US"/>
+          </a:p>
+        </p:txBody>
       </p:sp>
       <p:sp>
         <p:nvSpPr>
@@ -3238,6 +3743,13 @@
             </a:solidFill>
           </a:ln>
         </p:spPr>
+        <p:txBody>
+          <a:bodyPr/>
+          <a:lstStyle/>
+          <a:p>
+            <a:endParaRPr lang="en-US"/>
+          </a:p>
+        </p:txBody>
       </p:sp>
       <p:sp>
         <p:nvSpPr>
@@ -3267,6 +3779,13 @@
             </a:solidFill>
           </a:ln>
         </p:spPr>
+        <p:txBody>
+          <a:bodyPr/>
+          <a:lstStyle/>
+          <a:p>
+            <a:endParaRPr lang="en-US"/>
+          </a:p>
+        </p:txBody>
       </p:sp>
       <p:sp>
         <p:nvSpPr>
@@ -3296,6 +3815,13 @@
             </a:solidFill>
           </a:ln>
         </p:spPr>
+        <p:txBody>
+          <a:bodyPr/>
+          <a:lstStyle/>
+          <a:p>
+            <a:endParaRPr lang="en-US"/>
+          </a:p>
+        </p:txBody>
       </p:sp>
       <p:sp>
         <p:nvSpPr>
@@ -3325,6 +3851,13 @@
             </a:solidFill>
           </a:ln>
         </p:spPr>
+        <p:txBody>
+          <a:bodyPr/>
+          <a:lstStyle/>
+          <a:p>
+            <a:endParaRPr lang="en-US"/>
+          </a:p>
+        </p:txBody>
       </p:sp>
       <p:sp>
         <p:nvSpPr>
@@ -3354,6 +3887,13 @@
             </a:solidFill>
           </a:ln>
         </p:spPr>
+        <p:txBody>
+          <a:bodyPr/>
+          <a:lstStyle/>
+          <a:p>
+            <a:endParaRPr lang="en-US"/>
+          </a:p>
+        </p:txBody>
       </p:sp>
       <p:sp>
         <p:nvSpPr>
@@ -3383,6 +3923,13 @@
             </a:solidFill>
           </a:ln>
         </p:spPr>
+        <p:txBody>
+          <a:bodyPr/>
+          <a:lstStyle/>
+          <a:p>
+            <a:endParaRPr lang="en-US"/>
+          </a:p>
+        </p:txBody>
       </p:sp>
       <p:sp>
         <p:nvSpPr>
@@ -3412,6 +3959,13 @@
             </a:solidFill>
           </a:ln>
         </p:spPr>
+        <p:txBody>
+          <a:bodyPr/>
+          <a:lstStyle/>
+          <a:p>
+            <a:endParaRPr lang="en-US"/>
+          </a:p>
+        </p:txBody>
       </p:sp>
       <p:sp>
         <p:nvSpPr>
@@ -3441,6 +3995,13 @@
             </a:solidFill>
           </a:ln>
         </p:spPr>
+        <p:txBody>
+          <a:bodyPr/>
+          <a:lstStyle/>
+          <a:p>
+            <a:endParaRPr lang="en-US"/>
+          </a:p>
+        </p:txBody>
       </p:sp>
       <p:sp>
         <p:nvSpPr>
@@ -3470,6 +4031,13 @@
             </a:solidFill>
           </a:ln>
         </p:spPr>
+        <p:txBody>
+          <a:bodyPr/>
+          <a:lstStyle/>
+          <a:p>
+            <a:endParaRPr lang="en-US"/>
+          </a:p>
+        </p:txBody>
       </p:sp>
       <p:sp>
         <p:nvSpPr>
@@ -3499,6 +4067,13 @@
             </a:solidFill>
           </a:ln>
         </p:spPr>
+        <p:txBody>
+          <a:bodyPr/>
+          <a:lstStyle/>
+          <a:p>
+            <a:endParaRPr lang="en-US"/>
+          </a:p>
+        </p:txBody>
       </p:sp>
       <p:sp>
         <p:nvSpPr>
@@ -3528,6 +4103,13 @@
             </a:solidFill>
           </a:ln>
         </p:spPr>
+        <p:txBody>
+          <a:bodyPr/>
+          <a:lstStyle/>
+          <a:p>
+            <a:endParaRPr lang="en-US"/>
+          </a:p>
+        </p:txBody>
       </p:sp>
       <p:sp>
         <p:nvSpPr>
@@ -3557,6 +4139,13 @@
             </a:solidFill>
           </a:ln>
         </p:spPr>
+        <p:txBody>
+          <a:bodyPr/>
+          <a:lstStyle/>
+          <a:p>
+            <a:endParaRPr lang="en-US"/>
+          </a:p>
+        </p:txBody>
       </p:sp>
       <p:sp>
         <p:nvSpPr>
@@ -3586,6 +4175,13 @@
             </a:solidFill>
           </a:ln>
         </p:spPr>
+        <p:txBody>
+          <a:bodyPr/>
+          <a:lstStyle/>
+          <a:p>
+            <a:endParaRPr lang="en-US"/>
+          </a:p>
+        </p:txBody>
       </p:sp>
       <p:sp>
         <p:nvSpPr>
@@ -3615,6 +4211,13 @@
             </a:solidFill>
           </a:ln>
         </p:spPr>
+        <p:txBody>
+          <a:bodyPr/>
+          <a:lstStyle/>
+          <a:p>
+            <a:endParaRPr lang="en-US"/>
+          </a:p>
+        </p:txBody>
       </p:sp>
       <p:sp>
         <p:nvSpPr>
@@ -3644,6 +4247,13 @@
             </a:solidFill>
           </a:ln>
         </p:spPr>
+        <p:txBody>
+          <a:bodyPr/>
+          <a:lstStyle/>
+          <a:p>
+            <a:endParaRPr lang="en-US"/>
+          </a:p>
+        </p:txBody>
       </p:sp>
       <p:sp>
         <p:nvSpPr>
@@ -3673,6 +4283,13 @@
             </a:solidFill>
           </a:ln>
         </p:spPr>
+        <p:txBody>
+          <a:bodyPr/>
+          <a:lstStyle/>
+          <a:p>
+            <a:endParaRPr lang="en-US"/>
+          </a:p>
+        </p:txBody>
       </p:sp>
       <p:sp>
         <p:nvSpPr>
@@ -3702,6 +4319,13 @@
             </a:solidFill>
           </a:ln>
         </p:spPr>
+        <p:txBody>
+          <a:bodyPr/>
+          <a:lstStyle/>
+          <a:p>
+            <a:endParaRPr lang="en-US"/>
+          </a:p>
+        </p:txBody>
       </p:sp>
       <p:sp>
         <p:nvSpPr>
@@ -3731,6 +4355,13 @@
             </a:solidFill>
           </a:ln>
         </p:spPr>
+        <p:txBody>
+          <a:bodyPr/>
+          <a:lstStyle/>
+          <a:p>
+            <a:endParaRPr lang="en-US"/>
+          </a:p>
+        </p:txBody>
       </p:sp>
       <p:sp>
         <p:nvSpPr>
@@ -3765,6 +4396,13 @@
             </a:solidFill>
           </a:ln>
         </p:spPr>
+        <p:txBody>
+          <a:bodyPr/>
+          <a:lstStyle/>
+          <a:p>
+            <a:endParaRPr lang="en-US"/>
+          </a:p>
+        </p:txBody>
       </p:sp>
       <p:sp>
         <p:nvSpPr>
@@ -3858,12 +4496,36 @@
               </a:defRPr>
             </a:pPr>
             <a:r>
-              <a:rPr sz="3900" b="1">
-                <a:solidFill>
-                  <a:srgbClr val="101827"/>
-                </a:solidFill>
-              </a:rPr>
-              <a:t>Tiết kiệm token</a:t>
+              <a:rPr sz="3900" b="1" dirty="0" err="1">
+                <a:solidFill>
+                  <a:srgbClr val="101827"/>
+                </a:solidFill>
+              </a:rPr>
+              <a:t>Tiết</a:t>
+            </a:r>
+            <a:r>
+              <a:rPr sz="3900" b="1" dirty="0">
+                <a:solidFill>
+                  <a:srgbClr val="101827"/>
+                </a:solidFill>
+              </a:rPr>
+              <a:t> </a:t>
+            </a:r>
+            <a:r>
+              <a:rPr sz="3900" b="1" dirty="0" err="1">
+                <a:solidFill>
+                  <a:srgbClr val="101827"/>
+                </a:solidFill>
+              </a:rPr>
+              <a:t>kiệm</a:t>
+            </a:r>
+            <a:r>
+              <a:rPr sz="3900" b="1" dirty="0">
+                <a:solidFill>
+                  <a:srgbClr val="101827"/>
+                </a:solidFill>
+              </a:rPr>
+              <a:t> token</a:t>
             </a:r>
           </a:p>
           <a:p>
@@ -3879,12 +4541,20 @@
               </a:defRPr>
             </a:pPr>
             <a:r>
-              <a:rPr sz="3900" b="1">
-                <a:solidFill>
-                  <a:srgbClr val="101827"/>
-                </a:solidFill>
-              </a:rPr>
-              <a:t>cho AI coding agent</a:t>
+              <a:rPr sz="3900" b="1" dirty="0" err="1">
+                <a:solidFill>
+                  <a:srgbClr val="101827"/>
+                </a:solidFill>
+              </a:rPr>
+              <a:t>cho</a:t>
+            </a:r>
+            <a:r>
+              <a:rPr sz="3900" b="1" dirty="0">
+                <a:solidFill>
+                  <a:srgbClr val="101827"/>
+                </a:solidFill>
+              </a:rPr>
+              <a:t> AI coding agent</a:t>
             </a:r>
           </a:p>
         </p:txBody>
@@ -4192,6 +4862,13 @@
             </a:solidFill>
           </a:ln>
         </p:spPr>
+        <p:txBody>
+          <a:bodyPr/>
+          <a:lstStyle/>
+          <a:p>
+            <a:endParaRPr lang="en-US"/>
+          </a:p>
+        </p:txBody>
       </p:sp>
       <p:sp>
         <p:nvSpPr>
@@ -4277,6 +4954,13 @@
             </a:solidFill>
           </a:ln>
         </p:spPr>
+        <p:txBody>
+          <a:bodyPr/>
+          <a:lstStyle/>
+          <a:p>
+            <a:endParaRPr lang="en-US"/>
+          </a:p>
+        </p:txBody>
       </p:sp>
       <p:sp>
         <p:nvSpPr>
@@ -4362,6 +5046,13 @@
             </a:solidFill>
           </a:ln>
         </p:spPr>
+        <p:txBody>
+          <a:bodyPr/>
+          <a:lstStyle/>
+          <a:p>
+            <a:endParaRPr lang="en-US"/>
+          </a:p>
+        </p:txBody>
       </p:sp>
       <p:sp>
         <p:nvSpPr>
@@ -4442,6 +5133,13 @@
             </a:solidFill>
           </a:ln>
         </p:spPr>
+        <p:txBody>
+          <a:bodyPr/>
+          <a:lstStyle/>
+          <a:p>
+            <a:endParaRPr lang="en-US"/>
+          </a:p>
+        </p:txBody>
       </p:sp>
       <p:sp>
         <p:nvSpPr>
@@ -4471,6 +5169,13 @@
             </a:solidFill>
           </a:ln>
         </p:spPr>
+        <p:txBody>
+          <a:bodyPr/>
+          <a:lstStyle/>
+          <a:p>
+            <a:endParaRPr lang="en-US"/>
+          </a:p>
+        </p:txBody>
       </p:sp>
       <p:sp>
         <p:nvSpPr>
@@ -4500,6 +5205,13 @@
             </a:solidFill>
           </a:ln>
         </p:spPr>
+        <p:txBody>
+          <a:bodyPr/>
+          <a:lstStyle/>
+          <a:p>
+            <a:endParaRPr lang="en-US"/>
+          </a:p>
+        </p:txBody>
       </p:sp>
     </p:spTree>
     <p:extLst>
@@ -4669,6 +5381,13 @@
             </a:solidFill>
           </a:ln>
         </p:spPr>
+        <p:txBody>
+          <a:bodyPr/>
+          <a:lstStyle/>
+          <a:p>
+            <a:endParaRPr lang="en-US"/>
+          </a:p>
+        </p:txBody>
       </p:sp>
       <p:sp>
         <p:nvSpPr>
@@ -4711,13 +5430,18 @@
               </a:defRPr>
             </a:pPr>
             <a:r>
-              <a:rPr sz="1050" b="1">
+              <a:rPr lang="en-US" sz="1050" b="1" dirty="0">
                 <a:solidFill>
                   <a:srgbClr val="64748B"/>
                 </a:solidFill>
               </a:rPr>
-              <a:t>09</a:t>
-            </a:r>
+              <a:t>10</a:t>
+            </a:r>
+            <a:endParaRPr sz="1050" b="1" dirty="0">
+              <a:solidFill>
+                <a:srgbClr val="64748B"/>
+              </a:solidFill>
+            </a:endParaRPr>
           </a:p>
         </p:txBody>
       </p:sp>
@@ -4803,6 +5527,13 @@
             </a:solidFill>
           </a:ln>
         </p:spPr>
+        <p:txBody>
+          <a:bodyPr/>
+          <a:lstStyle/>
+          <a:p>
+            <a:endParaRPr lang="en-US"/>
+          </a:p>
+        </p:txBody>
       </p:sp>
       <p:sp>
         <p:nvSpPr>
@@ -4886,6 +5617,13 @@
             </a:solidFill>
           </a:ln>
         </p:spPr>
+        <p:txBody>
+          <a:bodyPr/>
+          <a:lstStyle/>
+          <a:p>
+            <a:endParaRPr lang="en-US"/>
+          </a:p>
+        </p:txBody>
       </p:sp>
       <p:sp>
         <p:nvSpPr>
@@ -5059,6 +5797,13 @@
             </a:solidFill>
           </a:ln>
         </p:spPr>
+        <p:txBody>
+          <a:bodyPr/>
+          <a:lstStyle/>
+          <a:p>
+            <a:endParaRPr lang="en-US"/>
+          </a:p>
+        </p:txBody>
       </p:sp>
       <p:sp>
         <p:nvSpPr>
@@ -5142,6 +5887,13 @@
             </a:solidFill>
           </a:ln>
         </p:spPr>
+        <p:txBody>
+          <a:bodyPr/>
+          <a:lstStyle/>
+          <a:p>
+            <a:endParaRPr lang="en-US"/>
+          </a:p>
+        </p:txBody>
       </p:sp>
       <p:sp>
         <p:nvSpPr>
@@ -5227,6 +5979,13 @@
             </a:solidFill>
           </a:ln>
         </p:spPr>
+        <p:txBody>
+          <a:bodyPr/>
+          <a:lstStyle/>
+          <a:p>
+            <a:endParaRPr lang="en-US"/>
+          </a:p>
+        </p:txBody>
       </p:sp>
       <p:sp>
         <p:nvSpPr>
@@ -5474,6 +6233,13 @@
             </a:solidFill>
           </a:ln>
         </p:spPr>
+        <p:txBody>
+          <a:bodyPr/>
+          <a:lstStyle/>
+          <a:p>
+            <a:endParaRPr lang="en-US"/>
+          </a:p>
+        </p:txBody>
       </p:sp>
       <p:sp>
         <p:nvSpPr>
@@ -5560,6 +6326,13 @@
             </a:solidFill>
           </a:ln>
         </p:spPr>
+        <p:txBody>
+          <a:bodyPr/>
+          <a:lstStyle/>
+          <a:p>
+            <a:endParaRPr lang="en-US"/>
+          </a:p>
+        </p:txBody>
       </p:sp>
       <p:sp>
         <p:nvSpPr>
@@ -5646,6 +6419,13 @@
             </a:solidFill>
           </a:ln>
         </p:spPr>
+        <p:txBody>
+          <a:bodyPr/>
+          <a:lstStyle/>
+          <a:p>
+            <a:endParaRPr lang="en-US"/>
+          </a:p>
+        </p:txBody>
       </p:sp>
       <p:sp>
         <p:nvSpPr>
@@ -5729,6 +6509,13 @@
             </a:solidFill>
           </a:ln>
         </p:spPr>
+        <p:txBody>
+          <a:bodyPr/>
+          <a:lstStyle/>
+          <a:p>
+            <a:endParaRPr lang="en-US"/>
+          </a:p>
+        </p:txBody>
       </p:sp>
       <p:sp>
         <p:nvSpPr>
@@ -5830,6 +6617,13 @@
             <a:schemeClr val="dk1"/>
           </a:fontRef>
         </p:style>
+        <p:txBody>
+          <a:bodyPr/>
+          <a:lstStyle/>
+          <a:p>
+            <a:endParaRPr lang="en-US"/>
+          </a:p>
+        </p:txBody>
       </p:sp>
       <p:sp>
         <p:nvSpPr>
@@ -5915,6 +6709,13 @@
             </a:solidFill>
           </a:ln>
         </p:spPr>
+        <p:txBody>
+          <a:bodyPr/>
+          <a:lstStyle/>
+          <a:p>
+            <a:endParaRPr lang="en-US"/>
+          </a:p>
+        </p:txBody>
       </p:sp>
       <p:sp>
         <p:nvSpPr>
@@ -6102,6 +6903,13 @@
             </a:solidFill>
           </a:ln>
         </p:spPr>
+        <p:txBody>
+          <a:bodyPr/>
+          <a:lstStyle/>
+          <a:p>
+            <a:endParaRPr lang="en-US"/>
+          </a:p>
+        </p:txBody>
       </p:sp>
       <p:sp>
         <p:nvSpPr>
@@ -6289,6 +7097,13 @@
             </a:solidFill>
           </a:ln>
         </p:spPr>
+        <p:txBody>
+          <a:bodyPr/>
+          <a:lstStyle/>
+          <a:p>
+            <a:endParaRPr lang="en-US"/>
+          </a:p>
+        </p:txBody>
       </p:sp>
       <p:sp>
         <p:nvSpPr>
@@ -6522,6 +7337,13 @@
             </a:solidFill>
           </a:ln>
         </p:spPr>
+        <p:txBody>
+          <a:bodyPr/>
+          <a:lstStyle/>
+          <a:p>
+            <a:endParaRPr lang="en-US"/>
+          </a:p>
+        </p:txBody>
       </p:sp>
       <p:sp>
         <p:nvSpPr>
@@ -6615,13 +7437,34 @@
               </a:defRPr>
             </a:pPr>
             <a:r>
-              <a:rPr sz="900" b="0">
+              <a:rPr lang="en-US" sz="900" b="0" dirty="0">
                 <a:solidFill>
                   <a:srgbClr val="64748B"/>
                 </a:solidFill>
               </a:rPr>
-              <a:t>9 / 20</a:t>
-            </a:r>
+              <a:t>10</a:t>
+            </a:r>
+            <a:r>
+              <a:rPr sz="900" b="0" dirty="0">
+                <a:solidFill>
+                  <a:srgbClr val="64748B"/>
+                </a:solidFill>
+              </a:rPr>
+              <a:t> / 2</a:t>
+            </a:r>
+            <a:r>
+              <a:rPr lang="en-US" sz="900" b="0" dirty="0">
+                <a:solidFill>
+                  <a:srgbClr val="64748B"/>
+                </a:solidFill>
+              </a:rPr>
+              <a:t>1</a:t>
+            </a:r>
+            <a:endParaRPr sz="900" b="0" dirty="0">
+              <a:solidFill>
+                <a:srgbClr val="64748B"/>
+              </a:solidFill>
+            </a:endParaRPr>
           </a:p>
         </p:txBody>
       </p:sp>
@@ -6816,6 +7659,13 @@
             </a:solidFill>
           </a:ln>
         </p:spPr>
+        <p:txBody>
+          <a:bodyPr/>
+          <a:lstStyle/>
+          <a:p>
+            <a:endParaRPr lang="en-US"/>
+          </a:p>
+        </p:txBody>
       </p:sp>
       <p:sp>
         <p:nvSpPr>
@@ -6902,6 +7752,13 @@
             </a:solidFill>
           </a:ln>
         </p:spPr>
+        <p:txBody>
+          <a:bodyPr/>
+          <a:lstStyle/>
+          <a:p>
+            <a:endParaRPr lang="en-US"/>
+          </a:p>
+        </p:txBody>
       </p:sp>
       <p:sp>
         <p:nvSpPr>
@@ -6988,6 +7845,13 @@
             </a:solidFill>
           </a:ln>
         </p:spPr>
+        <p:txBody>
+          <a:bodyPr/>
+          <a:lstStyle/>
+          <a:p>
+            <a:endParaRPr lang="en-US"/>
+          </a:p>
+        </p:txBody>
       </p:sp>
       <p:sp>
         <p:nvSpPr>
@@ -7071,6 +7935,13 @@
             </a:solidFill>
           </a:ln>
         </p:spPr>
+        <p:txBody>
+          <a:bodyPr/>
+          <a:lstStyle/>
+          <a:p>
+            <a:endParaRPr lang="en-US"/>
+          </a:p>
+        </p:txBody>
       </p:sp>
       <p:sp>
         <p:nvSpPr>
@@ -7583,6 +8454,13 @@
             </a:solidFill>
           </a:ln>
         </p:spPr>
+        <p:txBody>
+          <a:bodyPr/>
+          <a:lstStyle/>
+          <a:p>
+            <a:endParaRPr lang="en-US"/>
+          </a:p>
+        </p:txBody>
       </p:sp>
       <p:sp>
         <p:nvSpPr>
@@ -7625,13 +8503,18 @@
               </a:defRPr>
             </a:pPr>
             <a:r>
-              <a:rPr sz="1050" b="1">
+              <a:rPr lang="en-US" sz="1050" b="1" dirty="0">
                 <a:solidFill>
                   <a:srgbClr val="64748B"/>
                 </a:solidFill>
               </a:rPr>
-              <a:t>10</a:t>
-            </a:r>
+              <a:t>11</a:t>
+            </a:r>
+            <a:endParaRPr sz="1050" b="1" dirty="0">
+              <a:solidFill>
+                <a:srgbClr val="64748B"/>
+              </a:solidFill>
+            </a:endParaRPr>
           </a:p>
         </p:txBody>
       </p:sp>
@@ -7666,6 +8549,13 @@
             </a:solidFill>
           </a:ln>
         </p:spPr>
+        <p:txBody>
+          <a:bodyPr/>
+          <a:lstStyle/>
+          <a:p>
+            <a:endParaRPr lang="en-US"/>
+          </a:p>
+        </p:txBody>
       </p:sp>
       <p:sp>
         <p:nvSpPr>
@@ -8224,22 +9114,13 @@
               </a:defRPr>
             </a:pPr>
             <a:r>
-              <a:rPr lang="en-US" sz="1400" b="1" dirty="0" err="1">
+              <a:rPr lang="en-US" sz="1400" b="1" dirty="0">
                 <a:solidFill>
                   <a:srgbClr val="101827"/>
                 </a:solidFill>
                 <a:hlinkClick r:id="rId6" action="ppaction://hlinksldjump"/>
               </a:rPr>
-              <a:t>Trả</a:t>
-            </a:r>
-            <a:r>
-              <a:rPr lang="en-US" sz="1400" b="1" dirty="0">
-                <a:solidFill>
-                  <a:srgbClr val="101827"/>
-                </a:solidFill>
-                <a:hlinkClick r:id="rId6" action="ppaction://hlinksldjump"/>
-              </a:rPr>
-              <a:t> </a:t>
+              <a:t>Trả </a:t>
             </a:r>
             <a:r>
               <a:rPr lang="en-US" sz="1400" b="1" dirty="0" err="1">
@@ -8408,7 +9289,6 @@
                 <a:solidFill>
                   <a:srgbClr val="101827"/>
                 </a:solidFill>
-                <a:hlinkClick r:id="rId7" action="ppaction://hlinksldjump"/>
               </a:rPr>
               <a:t>Harness </a:t>
             </a:r>
@@ -8417,7 +9297,6 @@
                 <a:solidFill>
                   <a:srgbClr val="101827"/>
                 </a:solidFill>
-                <a:hlinkClick r:id="rId7" action="ppaction://hlinksldjump"/>
               </a:rPr>
               <a:t>điều</a:t>
             </a:r>
@@ -8426,7 +9305,6 @@
                 <a:solidFill>
                   <a:srgbClr val="101827"/>
                 </a:solidFill>
-                <a:hlinkClick r:id="rId7" action="ppaction://hlinksldjump"/>
               </a:rPr>
               <a:t> </a:t>
             </a:r>
@@ -8435,7 +9313,6 @@
                 <a:solidFill>
                   <a:srgbClr val="101827"/>
                 </a:solidFill>
-                <a:hlinkClick r:id="rId7" action="ppaction://hlinksldjump"/>
               </a:rPr>
               <a:t>phối</a:t>
             </a:r>
@@ -8444,7 +9321,6 @@
                 <a:solidFill>
                   <a:srgbClr val="101827"/>
                 </a:solidFill>
-                <a:hlinkClick r:id="rId7" action="ppaction://hlinksldjump"/>
               </a:rPr>
               <a:t> tool</a:t>
             </a:r>
@@ -8536,6 +9412,13 @@
             </a:solidFill>
           </a:ln>
         </p:spPr>
+        <p:txBody>
+          <a:bodyPr/>
+          <a:lstStyle/>
+          <a:p>
+            <a:endParaRPr lang="en-US"/>
+          </a:p>
+        </p:txBody>
       </p:sp>
       <p:sp>
         <p:nvSpPr>
@@ -8629,13 +9512,18 @@
               </a:defRPr>
             </a:pPr>
             <a:r>
-              <a:rPr sz="900" b="0">
+              <a:rPr lang="en-US" sz="900" b="0" dirty="0">
                 <a:solidFill>
                   <a:srgbClr val="64748B"/>
                 </a:solidFill>
               </a:rPr>
-              <a:t>10 / 20</a:t>
-            </a:r>
+              <a:t>11 / 21</a:t>
+            </a:r>
+            <a:endParaRPr sz="900" b="0" dirty="0">
+              <a:solidFill>
+                <a:srgbClr val="64748B"/>
+              </a:solidFill>
+            </a:endParaRPr>
           </a:p>
         </p:txBody>
       </p:sp>
@@ -8960,6 +9848,7 @@
       <p:sp>
         <p:nvSpPr>
           <p:cNvPr id="124" name="TextBox 123">
+            <a:hlinkClick r:id="rId8" action="ppaction://hlinksldjump"/>
             <a:extLst>
               <a:ext uri="{FF2B5EF4-FFF2-40B4-BE49-F238E27FC236}">
                 <a16:creationId xmlns:a16="http://schemas.microsoft.com/office/drawing/2014/main" id="{A100FF14-A5A4-9541-54DF-D25996DC5B5E}"/>
@@ -8991,23 +9880,27 @@
               <a:t>3.1. </a:t>
             </a:r>
             <a:r>
-              <a:rPr lang="en-US" sz="1200" b="1" dirty="0" err="1"/>
-              <a:t>Trả</a:t>
-            </a:r>
-            <a:r>
-              <a:rPr lang="en-US" sz="1200" b="1" dirty="0"/>
+              <a:rPr lang="en-US" sz="1200" b="1" dirty="0">
+                <a:hlinkClick r:id="rId8" action="ppaction://hlinksldjump"/>
+              </a:rPr>
+              <a:t>Trả </a:t>
+            </a:r>
+            <a:r>
+              <a:rPr lang="en-US" sz="1200" b="1" dirty="0" err="1">
+                <a:hlinkClick r:id="rId8" action="ppaction://hlinksldjump"/>
+              </a:rPr>
+              <a:t>kết</a:t>
+            </a:r>
+            <a:r>
+              <a:rPr lang="en-US" sz="1200" b="1" dirty="0">
+                <a:hlinkClick r:id="rId8" action="ppaction://hlinksldjump"/>
+              </a:rPr>
               <a:t> </a:t>
             </a:r>
             <a:r>
-              <a:rPr lang="en-US" sz="1200" b="1" dirty="0" err="1"/>
-              <a:t>kết</a:t>
-            </a:r>
-            <a:r>
-              <a:rPr lang="en-US" sz="1200" b="1" dirty="0"/>
-              <a:t> </a:t>
-            </a:r>
-            <a:r>
-              <a:rPr lang="en-US" sz="1200" b="1" dirty="0" err="1"/>
+              <a:rPr lang="en-US" sz="1200" b="1" dirty="0" err="1">
+                <a:hlinkClick r:id="rId8" action="ppaction://hlinksldjump"/>
+              </a:rPr>
               <a:t>quả</a:t>
             </a:r>
             <a:endParaRPr lang="en-US" sz="1200" b="1" dirty="0"/>
@@ -9089,32 +9982,51 @@
             <a:pPr algn="ctr"/>
             <a:r>
               <a:rPr lang="en-US" sz="1200" b="1" dirty="0"/>
-              <a:t>3.3. Thêm </a:t>
-            </a:r>
-            <a:r>
-              <a:rPr lang="en-US" sz="1200" b="1" dirty="0" err="1"/>
+              <a:t>4.2. </a:t>
+            </a:r>
+            <a:r>
+              <a:rPr lang="en-US" sz="1200" b="1" dirty="0">
+                <a:hlinkClick r:id="rId7" action="ppaction://hlinksldjump"/>
+              </a:rPr>
+              <a:t>Thêm </a:t>
+            </a:r>
+            <a:r>
+              <a:rPr lang="en-US" sz="1200" b="1" dirty="0" err="1">
+                <a:hlinkClick r:id="rId7" action="ppaction://hlinksldjump"/>
+              </a:rPr>
               <a:t>kết</a:t>
             </a:r>
             <a:r>
-              <a:rPr lang="en-US" sz="1200" b="1" dirty="0"/>
+              <a:rPr lang="en-US" sz="1200" b="1" dirty="0">
+                <a:hlinkClick r:id="rId7" action="ppaction://hlinksldjump"/>
+              </a:rPr>
               <a:t> </a:t>
             </a:r>
             <a:r>
-              <a:rPr lang="en-US" sz="1200" b="1" dirty="0" err="1"/>
+              <a:rPr lang="en-US" sz="1200" b="1" dirty="0" err="1">
+                <a:hlinkClick r:id="rId7" action="ppaction://hlinksldjump"/>
+              </a:rPr>
               <a:t>quả</a:t>
             </a:r>
             <a:r>
-              <a:rPr lang="en-US" sz="1200" b="1" dirty="0"/>
+              <a:rPr lang="en-US" sz="1200" b="1" dirty="0">
+                <a:hlinkClick r:id="rId7" action="ppaction://hlinksldjump"/>
+              </a:rPr>
               <a:t> tool </a:t>
             </a:r>
             <a:r>
-              <a:rPr lang="en-US" sz="1200" b="1" dirty="0" err="1"/>
+              <a:rPr lang="en-US" sz="1200" b="1" dirty="0" err="1">
+                <a:hlinkClick r:id="rId7" action="ppaction://hlinksldjump"/>
+              </a:rPr>
               <a:t>vào</a:t>
             </a:r>
             <a:r>
-              <a:rPr lang="en-US" sz="1200" b="1" dirty="0"/>
+              <a:rPr lang="en-US" sz="1200" b="1" dirty="0">
+                <a:hlinkClick r:id="rId7" action="ppaction://hlinksldjump"/>
+              </a:rPr>
               <a:t> context</a:t>
             </a:r>
+            <a:endParaRPr lang="en-US" sz="1200" b="1" dirty="0"/>
           </a:p>
         </p:txBody>
       </p:sp>
@@ -9149,7 +10061,7 @@
             <a:pPr algn="ctr"/>
             <a:r>
               <a:rPr lang="en-US" sz="1200" b="1" dirty="0"/>
-              <a:t>3.2. </a:t>
+              <a:t>4.1. </a:t>
             </a:r>
             <a:r>
               <a:rPr lang="en-US" sz="1200" b="1" dirty="0" err="1"/>
@@ -9431,6 +10343,13 @@
             </a:solidFill>
           </a:ln>
         </p:spPr>
+        <p:txBody>
+          <a:bodyPr/>
+          <a:lstStyle/>
+          <a:p>
+            <a:endParaRPr lang="en-US"/>
+          </a:p>
+        </p:txBody>
       </p:sp>
       <p:sp>
         <p:nvSpPr>
@@ -9473,13 +10392,26 @@
               </a:defRPr>
             </a:pPr>
             <a:r>
-              <a:rPr sz="1050" b="1">
+              <a:rPr sz="1050" b="1" dirty="0">
                 <a:solidFill>
                   <a:srgbClr val="64748B"/>
                 </a:solidFill>
               </a:rPr>
-              <a:t>11</a:t>
-            </a:r>
+              <a:t>1</a:t>
+            </a:r>
+            <a:r>
+              <a:rPr lang="en-US" sz="1050" b="1" dirty="0">
+                <a:solidFill>
+                  <a:srgbClr val="64748B"/>
+                </a:solidFill>
+              </a:rPr>
+              <a:t>2</a:t>
+            </a:r>
+            <a:endParaRPr sz="1050" b="1" dirty="0">
+              <a:solidFill>
+                <a:srgbClr val="64748B"/>
+              </a:solidFill>
+            </a:endParaRPr>
           </a:p>
         </p:txBody>
       </p:sp>
@@ -9516,6 +10448,13 @@
             </a:solidFill>
           </a:ln>
         </p:spPr>
+        <p:txBody>
+          <a:bodyPr/>
+          <a:lstStyle/>
+          <a:p>
+            <a:endParaRPr lang="en-US"/>
+          </a:p>
+        </p:txBody>
       </p:sp>
       <p:sp>
         <p:nvSpPr>
@@ -9650,6 +10589,13 @@
             </a:solidFill>
           </a:ln>
         </p:spPr>
+        <p:txBody>
+          <a:bodyPr/>
+          <a:lstStyle/>
+          <a:p>
+            <a:endParaRPr lang="en-US"/>
+          </a:p>
+        </p:txBody>
       </p:sp>
       <p:sp>
         <p:nvSpPr>
@@ -9818,6 +10764,13 @@
             </a:solidFill>
           </a:ln>
         </p:spPr>
+        <p:txBody>
+          <a:bodyPr/>
+          <a:lstStyle/>
+          <a:p>
+            <a:endParaRPr lang="en-US"/>
+          </a:p>
+        </p:txBody>
       </p:sp>
       <p:sp>
         <p:nvSpPr>
@@ -9901,6 +10854,13 @@
             </a:solidFill>
           </a:ln>
         </p:spPr>
+        <p:txBody>
+          <a:bodyPr/>
+          <a:lstStyle/>
+          <a:p>
+            <a:endParaRPr lang="en-US"/>
+          </a:p>
+        </p:txBody>
       </p:sp>
       <p:sp>
         <p:nvSpPr>
@@ -10037,22 +10997,6 @@
                 </a:solidFill>
               </a:rPr>
               <a:t>buộc</a:t>
-            </a:r>
-            <a:r>
-              <a:rPr lang="en-US" sz="1350" dirty="0">
-                <a:solidFill>
-                  <a:srgbClr val="334155"/>
-                </a:solidFill>
-              </a:rPr>
-              <a:t> </a:t>
-            </a:r>
-            <a:r>
-              <a:rPr lang="en-US" sz="1350" dirty="0" err="1">
-                <a:solidFill>
-                  <a:srgbClr val="334155"/>
-                </a:solidFill>
-              </a:rPr>
-              <a:t>không</a:t>
             </a:r>
             <a:r>
               <a:rPr lang="en-US" sz="1350" dirty="0">
@@ -10125,6 +11069,13 @@
             </a:solidFill>
           </a:ln>
         </p:spPr>
+        <p:txBody>
+          <a:bodyPr/>
+          <a:lstStyle/>
+          <a:p>
+            <a:endParaRPr lang="en-US"/>
+          </a:p>
+        </p:txBody>
       </p:sp>
       <p:sp>
         <p:nvSpPr>
@@ -10280,6 +11231,13 @@
             </a:solidFill>
           </a:ln>
         </p:spPr>
+        <p:txBody>
+          <a:bodyPr/>
+          <a:lstStyle/>
+          <a:p>
+            <a:endParaRPr lang="en-US"/>
+          </a:p>
+        </p:txBody>
       </p:sp>
       <p:sp>
         <p:nvSpPr>
@@ -10533,6 +11491,13 @@
             </a:solidFill>
           </a:ln>
         </p:spPr>
+        <p:txBody>
+          <a:bodyPr/>
+          <a:lstStyle/>
+          <a:p>
+            <a:endParaRPr lang="en-US"/>
+          </a:p>
+        </p:txBody>
       </p:sp>
       <p:sp>
         <p:nvSpPr>
@@ -10616,6 +11581,13 @@
             </a:solidFill>
           </a:ln>
         </p:spPr>
+        <p:txBody>
+          <a:bodyPr/>
+          <a:lstStyle/>
+          <a:p>
+            <a:endParaRPr lang="en-US"/>
+          </a:p>
+        </p:txBody>
       </p:sp>
       <p:sp>
         <p:nvSpPr>
@@ -10750,6 +11722,13 @@
             </a:solidFill>
           </a:ln>
         </p:spPr>
+        <p:txBody>
+          <a:bodyPr/>
+          <a:lstStyle/>
+          <a:p>
+            <a:endParaRPr lang="en-US"/>
+          </a:p>
+        </p:txBody>
       </p:sp>
       <p:sp>
         <p:nvSpPr>
@@ -10884,6 +11863,13 @@
             </a:solidFill>
           </a:ln>
         </p:spPr>
+        <p:txBody>
+          <a:bodyPr/>
+          <a:lstStyle/>
+          <a:p>
+            <a:endParaRPr lang="en-US"/>
+          </a:p>
+        </p:txBody>
       </p:sp>
       <p:sp>
         <p:nvSpPr>
@@ -11103,6 +12089,13 @@
             </a:solidFill>
           </a:ln>
         </p:spPr>
+        <p:txBody>
+          <a:bodyPr/>
+          <a:lstStyle/>
+          <a:p>
+            <a:endParaRPr lang="en-US"/>
+          </a:p>
+        </p:txBody>
       </p:sp>
       <p:sp>
         <p:nvSpPr>
@@ -11273,6 +12266,13 @@
             </a:solidFill>
           </a:ln>
         </p:spPr>
+        <p:txBody>
+          <a:bodyPr/>
+          <a:lstStyle/>
+          <a:p>
+            <a:endParaRPr lang="en-US"/>
+          </a:p>
+        </p:txBody>
       </p:sp>
       <p:sp>
         <p:nvSpPr>
@@ -11561,6 +12561,13 @@
             </a:solidFill>
           </a:ln>
         </p:spPr>
+        <p:txBody>
+          <a:bodyPr/>
+          <a:lstStyle/>
+          <a:p>
+            <a:endParaRPr lang="en-US"/>
+          </a:p>
+        </p:txBody>
       </p:sp>
       <p:sp>
         <p:nvSpPr>
@@ -11745,6 +12752,13 @@
             </a:solidFill>
           </a:ln>
         </p:spPr>
+        <p:txBody>
+          <a:bodyPr/>
+          <a:lstStyle/>
+          <a:p>
+            <a:endParaRPr lang="en-US"/>
+          </a:p>
+        </p:txBody>
       </p:sp>
       <p:sp>
         <p:nvSpPr>
@@ -12145,6 +13159,13 @@
             </a:solidFill>
           </a:ln>
         </p:spPr>
+        <p:txBody>
+          <a:bodyPr/>
+          <a:lstStyle/>
+          <a:p>
+            <a:endParaRPr lang="en-US"/>
+          </a:p>
+        </p:txBody>
       </p:sp>
       <p:sp>
         <p:nvSpPr>
@@ -12187,14 +13208,47 @@
               </a:defRPr>
             </a:pPr>
             <a:r>
-              <a:rPr sz="1200" b="1">
+              <a:rPr sz="1200" b="1" dirty="0">
                 <a:solidFill>
                   <a:srgbClr val="6246B5"/>
                 </a:solidFill>
                 <a:hlinkClick r:id="rId3" action="ppaction://hlinksldjump"/>
               </a:rPr>
-              <a:t>← Quay lại vòng đời</a:t>
-            </a:r>
+              <a:t>← Quay lại </a:t>
+            </a:r>
+            <a:r>
+              <a:rPr sz="1200" b="1" dirty="0" err="1">
+                <a:solidFill>
+                  <a:srgbClr val="6246B5"/>
+                </a:solidFill>
+                <a:hlinkClick r:id="rId3" action="ppaction://hlinksldjump"/>
+              </a:rPr>
+              <a:t>vòng</a:t>
+            </a:r>
+            <a:r>
+              <a:rPr sz="1200" b="1" dirty="0">
+                <a:solidFill>
+                  <a:srgbClr val="6246B5"/>
+                </a:solidFill>
+                <a:hlinkClick r:id="rId3" action="ppaction://hlinksldjump"/>
+              </a:rPr>
+              <a:t> </a:t>
+            </a:r>
+            <a:r>
+              <a:rPr sz="1200" b="1" dirty="0" err="1">
+                <a:solidFill>
+                  <a:srgbClr val="6246B5"/>
+                </a:solidFill>
+                <a:hlinkClick r:id="rId3" action="ppaction://hlinksldjump"/>
+              </a:rPr>
+              <a:t>đời</a:t>
+            </a:r>
+            <a:endParaRPr sz="1200" b="1" dirty="0">
+              <a:solidFill>
+                <a:srgbClr val="6246B5"/>
+              </a:solidFill>
+              <a:hlinkClick r:id="rId3" action="ppaction://hlinksldjump"/>
+            </a:endParaRPr>
           </a:p>
         </p:txBody>
       </p:sp>
@@ -12226,6 +13280,13 @@
             </a:solidFill>
           </a:ln>
         </p:spPr>
+        <p:txBody>
+          <a:bodyPr/>
+          <a:lstStyle/>
+          <a:p>
+            <a:endParaRPr lang="en-US"/>
+          </a:p>
+        </p:txBody>
       </p:sp>
       <p:sp>
         <p:nvSpPr>
@@ -12319,12 +13380,36 @@
               </a:defRPr>
             </a:pPr>
             <a:r>
-              <a:rPr sz="900" b="0">
+              <a:rPr sz="900" b="0" dirty="0">
                 <a:solidFill>
                   <a:srgbClr val="64748B"/>
                 </a:solidFill>
               </a:rPr>
-              <a:t>11 / 20</a:t>
+              <a:t>1</a:t>
+            </a:r>
+            <a:r>
+              <a:rPr lang="en-US" sz="900" b="0" dirty="0">
+                <a:solidFill>
+                  <a:srgbClr val="64748B"/>
+                </a:solidFill>
+              </a:rPr>
+              <a:t>2</a:t>
+            </a:r>
+            <a:r>
+              <a:rPr sz="900" b="0" dirty="0">
+                <a:solidFill>
+                  <a:srgbClr val="64748B"/>
+                </a:solidFill>
+              </a:rPr>
+              <a:t> / 2</a:t>
+            </a:r>
+            <a:r>
+              <a:rPr lang="en-US" sz="900" b="0" dirty="0">
+                <a:solidFill>
+                  <a:srgbClr val="64748B"/>
+                </a:solidFill>
+              </a:rPr>
+              <a:t>1</a:t>
             </a:r>
           </a:p>
         </p:txBody>
@@ -12497,6 +13582,13 @@
             </a:solidFill>
           </a:ln>
         </p:spPr>
+        <p:txBody>
+          <a:bodyPr/>
+          <a:lstStyle/>
+          <a:p>
+            <a:endParaRPr lang="en-US"/>
+          </a:p>
+        </p:txBody>
       </p:sp>
       <p:sp>
         <p:nvSpPr>
@@ -12539,13 +13631,26 @@
               </a:defRPr>
             </a:pPr>
             <a:r>
-              <a:rPr sz="1050" b="1">
+              <a:rPr sz="1050" b="1" dirty="0">
                 <a:solidFill>
                   <a:srgbClr val="64748B"/>
                 </a:solidFill>
               </a:rPr>
-              <a:t>12</a:t>
-            </a:r>
+              <a:t>1</a:t>
+            </a:r>
+            <a:r>
+              <a:rPr lang="en-US" sz="1050" b="1" dirty="0">
+                <a:solidFill>
+                  <a:srgbClr val="64748B"/>
+                </a:solidFill>
+              </a:rPr>
+              <a:t>3</a:t>
+            </a:r>
+            <a:endParaRPr sz="1050" b="1" dirty="0">
+              <a:solidFill>
+                <a:srgbClr val="64748B"/>
+              </a:solidFill>
+            </a:endParaRPr>
           </a:p>
         </p:txBody>
       </p:sp>
@@ -12582,6 +13687,13 @@
             </a:solidFill>
           </a:ln>
         </p:spPr>
+        <p:txBody>
+          <a:bodyPr/>
+          <a:lstStyle/>
+          <a:p>
+            <a:endParaRPr lang="en-US"/>
+          </a:p>
+        </p:txBody>
       </p:sp>
       <p:sp>
         <p:nvSpPr>
@@ -12716,6 +13828,13 @@
             </a:solidFill>
           </a:ln>
         </p:spPr>
+        <p:txBody>
+          <a:bodyPr/>
+          <a:lstStyle/>
+          <a:p>
+            <a:endParaRPr lang="en-US"/>
+          </a:p>
+        </p:txBody>
       </p:sp>
       <p:sp>
         <p:nvSpPr>
@@ -12860,6 +13979,13 @@
             </a:solidFill>
           </a:ln>
         </p:spPr>
+        <p:txBody>
+          <a:bodyPr/>
+          <a:lstStyle/>
+          <a:p>
+            <a:endParaRPr lang="en-US"/>
+          </a:p>
+        </p:txBody>
       </p:sp>
       <p:sp>
         <p:nvSpPr>
@@ -13001,6 +14127,13 @@
             </a:solidFill>
           </a:ln>
         </p:spPr>
+        <p:txBody>
+          <a:bodyPr/>
+          <a:lstStyle/>
+          <a:p>
+            <a:endParaRPr lang="en-US"/>
+          </a:p>
+        </p:txBody>
       </p:sp>
       <p:sp>
         <p:nvSpPr>
@@ -13084,6 +14217,13 @@
             </a:solidFill>
           </a:ln>
         </p:spPr>
+        <p:txBody>
+          <a:bodyPr/>
+          <a:lstStyle/>
+          <a:p>
+            <a:endParaRPr lang="en-US"/>
+          </a:p>
+        </p:txBody>
       </p:sp>
       <p:sp>
         <p:nvSpPr>
@@ -13287,6 +14427,13 @@
             </a:solidFill>
           </a:ln>
         </p:spPr>
+        <p:txBody>
+          <a:bodyPr/>
+          <a:lstStyle/>
+          <a:p>
+            <a:endParaRPr lang="en-US"/>
+          </a:p>
+        </p:txBody>
       </p:sp>
       <p:sp>
         <p:nvSpPr>
@@ -13561,6 +14708,13 @@
             </a:solidFill>
           </a:ln>
         </p:spPr>
+        <p:txBody>
+          <a:bodyPr/>
+          <a:lstStyle/>
+          <a:p>
+            <a:endParaRPr lang="en-US"/>
+          </a:p>
+        </p:txBody>
       </p:sp>
       <p:sp>
         <p:nvSpPr>
@@ -13774,6 +14928,13 @@
             </a:solidFill>
           </a:ln>
         </p:spPr>
+        <p:txBody>
+          <a:bodyPr/>
+          <a:lstStyle/>
+          <a:p>
+            <a:endParaRPr lang="en-US"/>
+          </a:p>
+        </p:txBody>
       </p:sp>
       <p:sp>
         <p:nvSpPr>
@@ -13888,6 +15049,13 @@
             </a:solidFill>
           </a:ln>
         </p:spPr>
+        <p:txBody>
+          <a:bodyPr/>
+          <a:lstStyle/>
+          <a:p>
+            <a:endParaRPr lang="en-US"/>
+          </a:p>
+        </p:txBody>
       </p:sp>
       <p:sp>
         <p:nvSpPr>
@@ -13981,13 +15149,42 @@
               </a:defRPr>
             </a:pPr>
             <a:r>
-              <a:rPr sz="900" b="0">
+              <a:rPr sz="900" b="0" dirty="0">
                 <a:solidFill>
                   <a:srgbClr val="64748B"/>
                 </a:solidFill>
               </a:rPr>
-              <a:t>12 / 20</a:t>
-            </a:r>
+              <a:t>1</a:t>
+            </a:r>
+            <a:r>
+              <a:rPr lang="en-US" sz="900" b="0" dirty="0">
+                <a:solidFill>
+                  <a:srgbClr val="64748B"/>
+                </a:solidFill>
+              </a:rPr>
+              <a:t>3</a:t>
+            </a:r>
+            <a:r>
+              <a:rPr sz="900" b="0" dirty="0">
+                <a:solidFill>
+                  <a:srgbClr val="64748B"/>
+                </a:solidFill>
+              </a:rPr>
+              <a:t> / </a:t>
+            </a:r>
+            <a:r>
+              <a:rPr lang="en-US" sz="900" b="0" dirty="0">
+                <a:solidFill>
+                  <a:srgbClr val="64748B"/>
+                </a:solidFill>
+              </a:rPr>
+              <a:t>21</a:t>
+            </a:r>
+            <a:endParaRPr sz="900" b="0" dirty="0">
+              <a:solidFill>
+                <a:srgbClr val="64748B"/>
+              </a:solidFill>
+            </a:endParaRPr>
           </a:p>
         </p:txBody>
       </p:sp>
@@ -14121,13 +15318,250 @@
               </a:defRPr>
             </a:pPr>
             <a:r>
-              <a:rPr sz="2100" b="1">
-                <a:solidFill>
-                  <a:srgbClr val="101827"/>
-                </a:solidFill>
-              </a:rPr>
-              <a:t>Ở lần gọi model, lãng phí đến từ cả phạm vi xây dựng và độ dài câu trả lời</a:t>
-            </a:r>
+              <a:rPr sz="2100" b="1" dirty="0">
+                <a:solidFill>
+                  <a:srgbClr val="101827"/>
+                </a:solidFill>
+              </a:rPr>
+              <a:t>Ở </a:t>
+            </a:r>
+            <a:r>
+              <a:rPr sz="2100" b="1" dirty="0" err="1">
+                <a:solidFill>
+                  <a:srgbClr val="101827"/>
+                </a:solidFill>
+              </a:rPr>
+              <a:t>lần</a:t>
+            </a:r>
+            <a:r>
+              <a:rPr sz="2100" b="1" dirty="0">
+                <a:solidFill>
+                  <a:srgbClr val="101827"/>
+                </a:solidFill>
+              </a:rPr>
+              <a:t> </a:t>
+            </a:r>
+            <a:r>
+              <a:rPr sz="2100" b="1" dirty="0" err="1">
+                <a:solidFill>
+                  <a:srgbClr val="101827"/>
+                </a:solidFill>
+              </a:rPr>
+              <a:t>gọi</a:t>
+            </a:r>
+            <a:r>
+              <a:rPr sz="2100" b="1" dirty="0">
+                <a:solidFill>
+                  <a:srgbClr val="101827"/>
+                </a:solidFill>
+              </a:rPr>
+              <a:t> model, </a:t>
+            </a:r>
+            <a:r>
+              <a:rPr sz="2100" b="1" dirty="0" err="1">
+                <a:solidFill>
+                  <a:srgbClr val="101827"/>
+                </a:solidFill>
+              </a:rPr>
+              <a:t>lãng</a:t>
+            </a:r>
+            <a:r>
+              <a:rPr sz="2100" b="1" dirty="0">
+                <a:solidFill>
+                  <a:srgbClr val="101827"/>
+                </a:solidFill>
+              </a:rPr>
+              <a:t> </a:t>
+            </a:r>
+            <a:r>
+              <a:rPr sz="2100" b="1" dirty="0" err="1">
+                <a:solidFill>
+                  <a:srgbClr val="101827"/>
+                </a:solidFill>
+              </a:rPr>
+              <a:t>phí</a:t>
+            </a:r>
+            <a:r>
+              <a:rPr sz="2100" b="1" dirty="0">
+                <a:solidFill>
+                  <a:srgbClr val="101827"/>
+                </a:solidFill>
+              </a:rPr>
+              <a:t> </a:t>
+            </a:r>
+            <a:r>
+              <a:rPr sz="2100" b="1" dirty="0" err="1">
+                <a:solidFill>
+                  <a:srgbClr val="101827"/>
+                </a:solidFill>
+              </a:rPr>
+              <a:t>đến</a:t>
+            </a:r>
+            <a:r>
+              <a:rPr sz="2100" b="1" dirty="0">
+                <a:solidFill>
+                  <a:srgbClr val="101827"/>
+                </a:solidFill>
+              </a:rPr>
+              <a:t> </a:t>
+            </a:r>
+            <a:r>
+              <a:rPr sz="2100" b="1" dirty="0" err="1">
+                <a:solidFill>
+                  <a:srgbClr val="101827"/>
+                </a:solidFill>
+              </a:rPr>
+              <a:t>từ</a:t>
+            </a:r>
+            <a:r>
+              <a:rPr sz="2100" b="1" dirty="0">
+                <a:solidFill>
+                  <a:srgbClr val="101827"/>
+                </a:solidFill>
+              </a:rPr>
+              <a:t> </a:t>
+            </a:r>
+            <a:r>
+              <a:rPr sz="2100" b="1" dirty="0" err="1">
+                <a:solidFill>
+                  <a:srgbClr val="101827"/>
+                </a:solidFill>
+              </a:rPr>
+              <a:t>cả</a:t>
+            </a:r>
+            <a:r>
+              <a:rPr sz="2100" b="1" dirty="0">
+                <a:solidFill>
+                  <a:srgbClr val="101827"/>
+                </a:solidFill>
+              </a:rPr>
+              <a:t> </a:t>
+            </a:r>
+            <a:r>
+              <a:rPr sz="2100" b="1" dirty="0" err="1">
+                <a:solidFill>
+                  <a:srgbClr val="101827"/>
+                </a:solidFill>
+              </a:rPr>
+              <a:t>phạm</a:t>
+            </a:r>
+            <a:r>
+              <a:rPr sz="2100" b="1" dirty="0">
+                <a:solidFill>
+                  <a:srgbClr val="101827"/>
+                </a:solidFill>
+              </a:rPr>
+              <a:t> vi </a:t>
+            </a:r>
+            <a:r>
+              <a:rPr sz="2100" b="1" dirty="0" err="1">
+                <a:solidFill>
+                  <a:srgbClr val="101827"/>
+                </a:solidFill>
+              </a:rPr>
+              <a:t>xây</a:t>
+            </a:r>
+            <a:r>
+              <a:rPr sz="2100" b="1" dirty="0">
+                <a:solidFill>
+                  <a:srgbClr val="101827"/>
+                </a:solidFill>
+              </a:rPr>
+              <a:t> </a:t>
+            </a:r>
+            <a:r>
+              <a:rPr sz="2100" b="1" dirty="0" err="1">
+                <a:solidFill>
+                  <a:srgbClr val="101827"/>
+                </a:solidFill>
+              </a:rPr>
+              <a:t>dựng</a:t>
+            </a:r>
+            <a:r>
+              <a:rPr sz="2100" b="1" dirty="0">
+                <a:solidFill>
+                  <a:srgbClr val="101827"/>
+                </a:solidFill>
+              </a:rPr>
+              <a:t> và </a:t>
+            </a:r>
+            <a:r>
+              <a:rPr sz="2100" b="1" dirty="0" err="1">
+                <a:solidFill>
+                  <a:srgbClr val="101827"/>
+                </a:solidFill>
+              </a:rPr>
+              <a:t>độ</a:t>
+            </a:r>
+            <a:r>
+              <a:rPr sz="2100" b="1" dirty="0">
+                <a:solidFill>
+                  <a:srgbClr val="101827"/>
+                </a:solidFill>
+              </a:rPr>
+              <a:t> </a:t>
+            </a:r>
+            <a:r>
+              <a:rPr sz="2100" b="1" dirty="0" err="1">
+                <a:solidFill>
+                  <a:srgbClr val="101827"/>
+                </a:solidFill>
+              </a:rPr>
+              <a:t>dài</a:t>
+            </a:r>
+            <a:r>
+              <a:rPr sz="2100" b="1" dirty="0">
+                <a:solidFill>
+                  <a:srgbClr val="101827"/>
+                </a:solidFill>
+              </a:rPr>
+              <a:t> </a:t>
+            </a:r>
+            <a:r>
+              <a:rPr sz="2100" b="1" dirty="0" err="1">
+                <a:solidFill>
+                  <a:srgbClr val="101827"/>
+                </a:solidFill>
+              </a:rPr>
+              <a:t>câu</a:t>
+            </a:r>
+            <a:r>
+              <a:rPr sz="2100" b="1" dirty="0">
+                <a:solidFill>
+                  <a:srgbClr val="101827"/>
+                </a:solidFill>
+              </a:rPr>
+              <a:t> </a:t>
+            </a:r>
+            <a:r>
+              <a:rPr sz="2100" b="1" dirty="0" err="1">
+                <a:solidFill>
+                  <a:srgbClr val="101827"/>
+                </a:solidFill>
+              </a:rPr>
+              <a:t>trả</a:t>
+            </a:r>
+            <a:r>
+              <a:rPr sz="2100" b="1" dirty="0">
+                <a:solidFill>
+                  <a:srgbClr val="101827"/>
+                </a:solidFill>
+              </a:rPr>
+              <a:t> </a:t>
+            </a:r>
+            <a:r>
+              <a:rPr sz="2100" b="1" dirty="0" err="1">
+                <a:solidFill>
+                  <a:srgbClr val="101827"/>
+                </a:solidFill>
+              </a:rPr>
+              <a:t>lời</a:t>
+            </a:r>
+            <a:endParaRPr sz="2100" b="1" dirty="0">
+              <a:solidFill>
+                <a:srgbClr val="101827"/>
+              </a:solidFill>
+            </a:endParaRPr>
           </a:p>
         </p:txBody>
       </p:sp>
@@ -14159,6 +15593,13 @@
             </a:solidFill>
           </a:ln>
         </p:spPr>
+        <p:txBody>
+          <a:bodyPr/>
+          <a:lstStyle/>
+          <a:p>
+            <a:endParaRPr lang="en-US"/>
+          </a:p>
+        </p:txBody>
       </p:sp>
       <p:sp>
         <p:nvSpPr>
@@ -14201,13 +15642,26 @@
               </a:defRPr>
             </a:pPr>
             <a:r>
-              <a:rPr sz="1050" b="1">
+              <a:rPr sz="1050" b="1" dirty="0">
                 <a:solidFill>
                   <a:srgbClr val="64748B"/>
                 </a:solidFill>
               </a:rPr>
-              <a:t>13</a:t>
-            </a:r>
+              <a:t>1</a:t>
+            </a:r>
+            <a:r>
+              <a:rPr lang="en-US" sz="1050" b="1" dirty="0">
+                <a:solidFill>
+                  <a:srgbClr val="64748B"/>
+                </a:solidFill>
+              </a:rPr>
+              <a:t>4</a:t>
+            </a:r>
+            <a:endParaRPr sz="1050" b="1" dirty="0">
+              <a:solidFill>
+                <a:srgbClr val="64748B"/>
+              </a:solidFill>
+            </a:endParaRPr>
           </a:p>
         </p:txBody>
       </p:sp>
@@ -14244,6 +15698,13 @@
             </a:solidFill>
           </a:ln>
         </p:spPr>
+        <p:txBody>
+          <a:bodyPr/>
+          <a:lstStyle/>
+          <a:p>
+            <a:endParaRPr lang="en-US"/>
+          </a:p>
+        </p:txBody>
       </p:sp>
       <p:sp>
         <p:nvSpPr>
@@ -14399,6 +15860,13 @@
             </a:solidFill>
           </a:ln>
         </p:spPr>
+        <p:txBody>
+          <a:bodyPr/>
+          <a:lstStyle/>
+          <a:p>
+            <a:endParaRPr lang="en-US"/>
+          </a:p>
+        </p:txBody>
       </p:sp>
       <p:sp>
         <p:nvSpPr>
@@ -14559,6 +16027,13 @@
             </a:solidFill>
           </a:ln>
         </p:spPr>
+        <p:txBody>
+          <a:bodyPr/>
+          <a:lstStyle/>
+          <a:p>
+            <a:endParaRPr lang="en-US"/>
+          </a:p>
+        </p:txBody>
       </p:sp>
       <p:sp>
         <p:nvSpPr>
@@ -14751,6 +16226,13 @@
             </a:solidFill>
           </a:ln>
         </p:spPr>
+        <p:txBody>
+          <a:bodyPr/>
+          <a:lstStyle/>
+          <a:p>
+            <a:endParaRPr lang="en-US"/>
+          </a:p>
+        </p:txBody>
       </p:sp>
       <p:sp>
         <p:nvSpPr>
@@ -14988,6 +16470,13 @@
             </a:solidFill>
           </a:ln>
         </p:spPr>
+        <p:txBody>
+          <a:bodyPr/>
+          <a:lstStyle/>
+          <a:p>
+            <a:endParaRPr lang="en-US"/>
+          </a:p>
+        </p:txBody>
       </p:sp>
       <p:sp>
         <p:nvSpPr>
@@ -15071,6 +16560,13 @@
             </a:solidFill>
           </a:ln>
         </p:spPr>
+        <p:txBody>
+          <a:bodyPr/>
+          <a:lstStyle/>
+          <a:p>
+            <a:endParaRPr lang="en-US"/>
+          </a:p>
+        </p:txBody>
       </p:sp>
       <p:sp>
         <p:nvSpPr>
@@ -15266,6 +16762,13 @@
             </a:solidFill>
           </a:ln>
         </p:spPr>
+        <p:txBody>
+          <a:bodyPr/>
+          <a:lstStyle/>
+          <a:p>
+            <a:endParaRPr lang="en-US"/>
+          </a:p>
+        </p:txBody>
       </p:sp>
       <p:sp>
         <p:nvSpPr>
@@ -15573,6 +17076,13 @@
             </a:solidFill>
           </a:ln>
         </p:spPr>
+        <p:txBody>
+          <a:bodyPr/>
+          <a:lstStyle/>
+          <a:p>
+            <a:endParaRPr lang="en-US"/>
+          </a:p>
+        </p:txBody>
       </p:sp>
       <p:sp>
         <p:nvSpPr>
@@ -15856,6 +17366,13 @@
             </a:solidFill>
           </a:ln>
         </p:spPr>
+        <p:txBody>
+          <a:bodyPr/>
+          <a:lstStyle/>
+          <a:p>
+            <a:endParaRPr lang="en-US"/>
+          </a:p>
+        </p:txBody>
       </p:sp>
       <p:sp>
         <p:nvSpPr>
@@ -16347,6 +17864,13 @@
             </a:solidFill>
           </a:ln>
         </p:spPr>
+        <p:txBody>
+          <a:bodyPr/>
+          <a:lstStyle/>
+          <a:p>
+            <a:endParaRPr lang="en-US"/>
+          </a:p>
+        </p:txBody>
       </p:sp>
       <p:sp>
         <p:nvSpPr>
@@ -16430,6 +17954,13 @@
             </a:solidFill>
           </a:ln>
         </p:spPr>
+        <p:txBody>
+          <a:bodyPr/>
+          <a:lstStyle/>
+          <a:p>
+            <a:endParaRPr lang="en-US"/>
+          </a:p>
+        </p:txBody>
       </p:sp>
       <p:sp>
         <p:nvSpPr>
@@ -16520,6 +18051,13 @@
             </a:solidFill>
           </a:ln>
         </p:spPr>
+        <p:txBody>
+          <a:bodyPr/>
+          <a:lstStyle/>
+          <a:p>
+            <a:endParaRPr lang="en-US"/>
+          </a:p>
+        </p:txBody>
       </p:sp>
       <p:sp>
         <p:nvSpPr>
@@ -16601,6 +18139,13 @@
             </a:solidFill>
           </a:ln>
         </p:spPr>
+        <p:txBody>
+          <a:bodyPr/>
+          <a:lstStyle/>
+          <a:p>
+            <a:endParaRPr lang="en-US"/>
+          </a:p>
+        </p:txBody>
       </p:sp>
       <p:sp>
         <p:nvSpPr>
@@ -16694,13 +18239,42 @@
               </a:defRPr>
             </a:pPr>
             <a:r>
-              <a:rPr sz="900" b="0">
+              <a:rPr sz="900" b="0" dirty="0">
                 <a:solidFill>
                   <a:srgbClr val="64748B"/>
                 </a:solidFill>
               </a:rPr>
-              <a:t>13 / 20</a:t>
-            </a:r>
+              <a:t>1</a:t>
+            </a:r>
+            <a:r>
+              <a:rPr lang="en-US" sz="900" b="0" dirty="0">
+                <a:solidFill>
+                  <a:srgbClr val="64748B"/>
+                </a:solidFill>
+              </a:rPr>
+              <a:t>4</a:t>
+            </a:r>
+            <a:r>
+              <a:rPr sz="900" b="0" dirty="0">
+                <a:solidFill>
+                  <a:srgbClr val="64748B"/>
+                </a:solidFill>
+              </a:rPr>
+              <a:t> / </a:t>
+            </a:r>
+            <a:r>
+              <a:rPr lang="en-US" sz="900" b="0" dirty="0">
+                <a:solidFill>
+                  <a:srgbClr val="64748B"/>
+                </a:solidFill>
+              </a:rPr>
+              <a:t>21</a:t>
+            </a:r>
+            <a:endParaRPr sz="900" b="0" dirty="0">
+              <a:solidFill>
+                <a:srgbClr val="64748B"/>
+              </a:solidFill>
+            </a:endParaRPr>
           </a:p>
         </p:txBody>
       </p:sp>
@@ -17967,6 +19541,13 @@
             </a:solidFill>
           </a:ln>
         </p:spPr>
+        <p:txBody>
+          <a:bodyPr/>
+          <a:lstStyle/>
+          <a:p>
+            <a:endParaRPr lang="en-US"/>
+          </a:p>
+        </p:txBody>
       </p:sp>
       <p:sp>
         <p:nvSpPr>
@@ -18009,13 +19590,18 @@
               </a:defRPr>
             </a:pPr>
             <a:r>
-              <a:rPr sz="1050" b="1">
+              <a:rPr lang="en-US" sz="1050" b="1" dirty="0">
                 <a:solidFill>
                   <a:srgbClr val="64748B"/>
                 </a:solidFill>
               </a:rPr>
-              <a:t>14</a:t>
-            </a:r>
+              <a:t>15</a:t>
+            </a:r>
+            <a:endParaRPr sz="1050" b="1" dirty="0">
+              <a:solidFill>
+                <a:srgbClr val="64748B"/>
+              </a:solidFill>
+            </a:endParaRPr>
           </a:p>
         </p:txBody>
       </p:sp>
@@ -18052,6 +19638,13 @@
             </a:solidFill>
           </a:ln>
         </p:spPr>
+        <p:txBody>
+          <a:bodyPr/>
+          <a:lstStyle/>
+          <a:p>
+            <a:endParaRPr lang="en-US"/>
+          </a:p>
+        </p:txBody>
       </p:sp>
       <p:sp>
         <p:nvSpPr>
@@ -18186,6 +19779,13 @@
             </a:solidFill>
           </a:ln>
         </p:spPr>
+        <p:txBody>
+          <a:bodyPr/>
+          <a:lstStyle/>
+          <a:p>
+            <a:endParaRPr lang="en-US"/>
+          </a:p>
+        </p:txBody>
       </p:sp>
       <p:sp>
         <p:nvSpPr>
@@ -18407,6 +20007,13 @@
             </a:solidFill>
           </a:ln>
         </p:spPr>
+        <p:txBody>
+          <a:bodyPr/>
+          <a:lstStyle/>
+          <a:p>
+            <a:endParaRPr lang="en-US"/>
+          </a:p>
+        </p:txBody>
       </p:sp>
       <p:sp>
         <p:nvSpPr>
@@ -18490,6 +20097,13 @@
             </a:solidFill>
           </a:ln>
         </p:spPr>
+        <p:txBody>
+          <a:bodyPr/>
+          <a:lstStyle/>
+          <a:p>
+            <a:endParaRPr lang="en-US"/>
+          </a:p>
+        </p:txBody>
       </p:sp>
       <p:sp>
         <p:nvSpPr>
@@ -18893,6 +20507,13 @@
             </a:solidFill>
           </a:ln>
         </p:spPr>
+        <p:txBody>
+          <a:bodyPr/>
+          <a:lstStyle/>
+          <a:p>
+            <a:endParaRPr lang="en-US"/>
+          </a:p>
+        </p:txBody>
       </p:sp>
       <p:sp>
         <p:nvSpPr>
@@ -19036,6 +20657,13 @@
             </a:solidFill>
           </a:ln>
         </p:spPr>
+        <p:txBody>
+          <a:bodyPr/>
+          <a:lstStyle/>
+          <a:p>
+            <a:endParaRPr lang="en-US"/>
+          </a:p>
+        </p:txBody>
       </p:sp>
       <p:sp>
         <p:nvSpPr>
@@ -19203,6 +20831,13 @@
             </a:solidFill>
           </a:ln>
         </p:spPr>
+        <p:txBody>
+          <a:bodyPr/>
+          <a:lstStyle/>
+          <a:p>
+            <a:endParaRPr lang="en-US"/>
+          </a:p>
+        </p:txBody>
       </p:sp>
       <p:sp>
         <p:nvSpPr>
@@ -19245,14 +20880,47 @@
               </a:defRPr>
             </a:pPr>
             <a:r>
-              <a:rPr sz="1200" b="1">
+              <a:rPr sz="1200" b="1" dirty="0">
                 <a:solidFill>
                   <a:srgbClr val="6246B5"/>
                 </a:solidFill>
                 <a:hlinkClick r:id="rId3" action="ppaction://hlinksldjump"/>
               </a:rPr>
-              <a:t>← Quay lại vòng đời</a:t>
-            </a:r>
+              <a:t>← Quay lại </a:t>
+            </a:r>
+            <a:r>
+              <a:rPr sz="1200" b="1" dirty="0" err="1">
+                <a:solidFill>
+                  <a:srgbClr val="6246B5"/>
+                </a:solidFill>
+                <a:hlinkClick r:id="rId3" action="ppaction://hlinksldjump"/>
+              </a:rPr>
+              <a:t>vòng</a:t>
+            </a:r>
+            <a:r>
+              <a:rPr sz="1200" b="1" dirty="0">
+                <a:solidFill>
+                  <a:srgbClr val="6246B5"/>
+                </a:solidFill>
+                <a:hlinkClick r:id="rId3" action="ppaction://hlinksldjump"/>
+              </a:rPr>
+              <a:t> </a:t>
+            </a:r>
+            <a:r>
+              <a:rPr sz="1200" b="1" dirty="0" err="1">
+                <a:solidFill>
+                  <a:srgbClr val="6246B5"/>
+                </a:solidFill>
+                <a:hlinkClick r:id="rId3" action="ppaction://hlinksldjump"/>
+              </a:rPr>
+              <a:t>đời</a:t>
+            </a:r>
+            <a:endParaRPr sz="1200" b="1" dirty="0">
+              <a:solidFill>
+                <a:srgbClr val="6246B5"/>
+              </a:solidFill>
+              <a:hlinkClick r:id="rId3" action="ppaction://hlinksldjump"/>
+            </a:endParaRPr>
           </a:p>
         </p:txBody>
       </p:sp>
@@ -19284,6 +20952,13 @@
             </a:solidFill>
           </a:ln>
         </p:spPr>
+        <p:txBody>
+          <a:bodyPr/>
+          <a:lstStyle/>
+          <a:p>
+            <a:endParaRPr lang="en-US"/>
+          </a:p>
+        </p:txBody>
       </p:sp>
       <p:sp>
         <p:nvSpPr>
@@ -19377,13 +21052,42 @@
               </a:defRPr>
             </a:pPr>
             <a:r>
-              <a:rPr sz="900" b="0">
+              <a:rPr sz="900" b="0" dirty="0">
                 <a:solidFill>
                   <a:srgbClr val="64748B"/>
                 </a:solidFill>
               </a:rPr>
-              <a:t>14 / 20</a:t>
-            </a:r>
+              <a:t>1</a:t>
+            </a:r>
+            <a:r>
+              <a:rPr lang="en-US" sz="900" b="0" dirty="0">
+                <a:solidFill>
+                  <a:srgbClr val="64748B"/>
+                </a:solidFill>
+              </a:rPr>
+              <a:t>5 </a:t>
+            </a:r>
+            <a:r>
+              <a:rPr sz="900" b="0" dirty="0">
+                <a:solidFill>
+                  <a:srgbClr val="64748B"/>
+                </a:solidFill>
+              </a:rPr>
+              <a:t>/ </a:t>
+            </a:r>
+            <a:r>
+              <a:rPr lang="en-US" sz="900" b="0" dirty="0">
+                <a:solidFill>
+                  <a:srgbClr val="64748B"/>
+                </a:solidFill>
+              </a:rPr>
+              <a:t>21</a:t>
+            </a:r>
+            <a:endParaRPr sz="900" b="0" dirty="0">
+              <a:solidFill>
+                <a:srgbClr val="64748B"/>
+              </a:solidFill>
+            </a:endParaRPr>
           </a:p>
         </p:txBody>
       </p:sp>
@@ -19601,6 +21305,13 @@
             </a:solidFill>
           </a:ln>
         </p:spPr>
+        <p:txBody>
+          <a:bodyPr/>
+          <a:lstStyle/>
+          <a:p>
+            <a:endParaRPr lang="en-US"/>
+          </a:p>
+        </p:txBody>
       </p:sp>
       <p:sp>
         <p:nvSpPr>
@@ -19643,13 +21354,26 @@
               </a:defRPr>
             </a:pPr>
             <a:r>
-              <a:rPr sz="1050" b="1">
+              <a:rPr sz="1050" b="1" dirty="0">
                 <a:solidFill>
                   <a:srgbClr val="64748B"/>
                 </a:solidFill>
               </a:rPr>
-              <a:t>15</a:t>
-            </a:r>
+              <a:t>1</a:t>
+            </a:r>
+            <a:r>
+              <a:rPr lang="en-US" sz="1050" b="1" dirty="0">
+                <a:solidFill>
+                  <a:srgbClr val="64748B"/>
+                </a:solidFill>
+              </a:rPr>
+              <a:t>6</a:t>
+            </a:r>
+            <a:endParaRPr sz="1050" b="1" dirty="0">
+              <a:solidFill>
+                <a:srgbClr val="64748B"/>
+              </a:solidFill>
+            </a:endParaRPr>
           </a:p>
         </p:txBody>
       </p:sp>
@@ -19686,6 +21410,13 @@
             </a:solidFill>
           </a:ln>
         </p:spPr>
+        <p:txBody>
+          <a:bodyPr/>
+          <a:lstStyle/>
+          <a:p>
+            <a:endParaRPr lang="en-US"/>
+          </a:p>
+        </p:txBody>
       </p:sp>
       <p:sp>
         <p:nvSpPr>
@@ -19820,6 +21551,13 @@
             </a:solidFill>
           </a:ln>
         </p:spPr>
+        <p:txBody>
+          <a:bodyPr/>
+          <a:lstStyle/>
+          <a:p>
+            <a:endParaRPr lang="en-US"/>
+          </a:p>
+        </p:txBody>
       </p:sp>
       <p:sp>
         <p:nvSpPr>
@@ -20049,6 +21787,13 @@
             </a:solidFill>
           </a:ln>
         </p:spPr>
+        <p:txBody>
+          <a:bodyPr/>
+          <a:lstStyle/>
+          <a:p>
+            <a:endParaRPr lang="en-US"/>
+          </a:p>
+        </p:txBody>
       </p:sp>
       <p:sp>
         <p:nvSpPr>
@@ -20132,6 +21877,13 @@
             </a:solidFill>
           </a:ln>
         </p:spPr>
+        <p:txBody>
+          <a:bodyPr/>
+          <a:lstStyle/>
+          <a:p>
+            <a:endParaRPr lang="en-US"/>
+          </a:p>
+        </p:txBody>
       </p:sp>
       <p:sp>
         <p:nvSpPr>
@@ -20295,6 +22047,13 @@
             </a:solidFill>
           </a:ln>
         </p:spPr>
+        <p:txBody>
+          <a:bodyPr/>
+          <a:lstStyle/>
+          <a:p>
+            <a:endParaRPr lang="en-US"/>
+          </a:p>
+        </p:txBody>
       </p:sp>
       <p:sp>
         <p:nvSpPr>
@@ -20690,6 +22449,13 @@
             </a:solidFill>
           </a:ln>
         </p:spPr>
+        <p:txBody>
+          <a:bodyPr/>
+          <a:lstStyle/>
+          <a:p>
+            <a:endParaRPr lang="en-US"/>
+          </a:p>
+        </p:txBody>
       </p:sp>
       <p:sp>
         <p:nvSpPr>
@@ -20791,6 +22557,13 @@
             </a:solidFill>
           </a:ln>
         </p:spPr>
+        <p:txBody>
+          <a:bodyPr/>
+          <a:lstStyle/>
+          <a:p>
+            <a:endParaRPr lang="en-US"/>
+          </a:p>
+        </p:txBody>
       </p:sp>
       <p:sp>
         <p:nvSpPr>
@@ -20970,6 +22743,13 @@
             </a:solidFill>
           </a:ln>
         </p:spPr>
+        <p:txBody>
+          <a:bodyPr/>
+          <a:lstStyle/>
+          <a:p>
+            <a:endParaRPr lang="en-US"/>
+          </a:p>
+        </p:txBody>
       </p:sp>
       <p:sp>
         <p:nvSpPr>
@@ -21101,6 +22881,13 @@
             </a:solidFill>
           </a:ln>
         </p:spPr>
+        <p:txBody>
+          <a:bodyPr/>
+          <a:lstStyle/>
+          <a:p>
+            <a:endParaRPr lang="en-US"/>
+          </a:p>
+        </p:txBody>
       </p:sp>
       <p:sp>
         <p:nvSpPr>
@@ -21182,6 +22969,13 @@
             </a:solidFill>
           </a:ln>
         </p:spPr>
+        <p:txBody>
+          <a:bodyPr/>
+          <a:lstStyle/>
+          <a:p>
+            <a:endParaRPr lang="en-US"/>
+          </a:p>
+        </p:txBody>
       </p:sp>
       <p:sp>
         <p:nvSpPr>
@@ -21275,13 +23069,42 @@
               </a:defRPr>
             </a:pPr>
             <a:r>
-              <a:rPr sz="900" b="0">
+              <a:rPr sz="900" b="0" dirty="0">
                 <a:solidFill>
                   <a:srgbClr val="64748B"/>
                 </a:solidFill>
               </a:rPr>
-              <a:t>15 / 20</a:t>
-            </a:r>
+              <a:t>1</a:t>
+            </a:r>
+            <a:r>
+              <a:rPr lang="en-US" sz="900" b="0" dirty="0">
+                <a:solidFill>
+                  <a:srgbClr val="64748B"/>
+                </a:solidFill>
+              </a:rPr>
+              <a:t>6</a:t>
+            </a:r>
+            <a:r>
+              <a:rPr sz="900" b="0" dirty="0">
+                <a:solidFill>
+                  <a:srgbClr val="64748B"/>
+                </a:solidFill>
+              </a:rPr>
+              <a:t> / </a:t>
+            </a:r>
+            <a:r>
+              <a:rPr lang="en-US" sz="900" b="0" dirty="0">
+                <a:solidFill>
+                  <a:srgbClr val="64748B"/>
+                </a:solidFill>
+              </a:rPr>
+              <a:t>21</a:t>
+            </a:r>
+            <a:endParaRPr sz="900" b="0" dirty="0">
+              <a:solidFill>
+                <a:srgbClr val="64748B"/>
+              </a:solidFill>
+            </a:endParaRPr>
           </a:p>
         </p:txBody>
       </p:sp>
@@ -21453,6 +23276,13 @@
             </a:solidFill>
           </a:ln>
         </p:spPr>
+        <p:txBody>
+          <a:bodyPr/>
+          <a:lstStyle/>
+          <a:p>
+            <a:endParaRPr lang="en-US"/>
+          </a:p>
+        </p:txBody>
       </p:sp>
       <p:sp>
         <p:nvSpPr>
@@ -21495,13 +23325,26 @@
               </a:defRPr>
             </a:pPr>
             <a:r>
-              <a:rPr sz="1050" b="1">
+              <a:rPr sz="1050" b="1" dirty="0">
                 <a:solidFill>
                   <a:srgbClr val="64748B"/>
                 </a:solidFill>
               </a:rPr>
-              <a:t>16</a:t>
-            </a:r>
+              <a:t>1</a:t>
+            </a:r>
+            <a:r>
+              <a:rPr lang="en-US" sz="1050" b="1" dirty="0">
+                <a:solidFill>
+                  <a:srgbClr val="64748B"/>
+                </a:solidFill>
+              </a:rPr>
+              <a:t>7</a:t>
+            </a:r>
+            <a:endParaRPr sz="1050" b="1" dirty="0">
+              <a:solidFill>
+                <a:srgbClr val="64748B"/>
+              </a:solidFill>
+            </a:endParaRPr>
           </a:p>
         </p:txBody>
       </p:sp>
@@ -21538,6 +23381,13 @@
             </a:solidFill>
           </a:ln>
         </p:spPr>
+        <p:txBody>
+          <a:bodyPr/>
+          <a:lstStyle/>
+          <a:p>
+            <a:endParaRPr lang="en-US"/>
+          </a:p>
+        </p:txBody>
       </p:sp>
       <p:sp>
         <p:nvSpPr>
@@ -21672,6 +23522,13 @@
             </a:solidFill>
           </a:ln>
         </p:spPr>
+        <p:txBody>
+          <a:bodyPr/>
+          <a:lstStyle/>
+          <a:p>
+            <a:endParaRPr lang="en-US"/>
+          </a:p>
+        </p:txBody>
       </p:sp>
       <p:sp>
         <p:nvSpPr>
@@ -21984,6 +23841,13 @@
             </a:solidFill>
           </a:ln>
         </p:spPr>
+        <p:txBody>
+          <a:bodyPr/>
+          <a:lstStyle/>
+          <a:p>
+            <a:endParaRPr lang="en-US"/>
+          </a:p>
+        </p:txBody>
       </p:sp>
       <p:sp>
         <p:nvSpPr>
@@ -22224,6 +24088,13 @@
             </a:solidFill>
           </a:ln>
         </p:spPr>
+        <p:txBody>
+          <a:bodyPr/>
+          <a:lstStyle/>
+          <a:p>
+            <a:endParaRPr lang="en-US"/>
+          </a:p>
+        </p:txBody>
       </p:sp>
       <p:sp>
         <p:nvSpPr>
@@ -22501,6 +24372,13 @@
             </a:solidFill>
           </a:ln>
         </p:spPr>
+        <p:txBody>
+          <a:bodyPr/>
+          <a:lstStyle/>
+          <a:p>
+            <a:endParaRPr lang="en-US"/>
+          </a:p>
+        </p:txBody>
       </p:sp>
       <p:sp>
         <p:nvSpPr>
@@ -22584,6 +24462,13 @@
             </a:solidFill>
           </a:ln>
         </p:spPr>
+        <p:txBody>
+          <a:bodyPr/>
+          <a:lstStyle/>
+          <a:p>
+            <a:endParaRPr lang="en-US"/>
+          </a:p>
+        </p:txBody>
       </p:sp>
       <p:sp>
         <p:nvSpPr>
@@ -22891,6 +24776,13 @@
             </a:solidFill>
           </a:ln>
         </p:spPr>
+        <p:txBody>
+          <a:bodyPr/>
+          <a:lstStyle/>
+          <a:p>
+            <a:endParaRPr lang="en-US"/>
+          </a:p>
+        </p:txBody>
       </p:sp>
       <p:sp>
         <p:nvSpPr>
@@ -23094,6 +24986,13 @@
             </a:solidFill>
           </a:ln>
         </p:spPr>
+        <p:txBody>
+          <a:bodyPr/>
+          <a:lstStyle/>
+          <a:p>
+            <a:endParaRPr lang="en-US"/>
+          </a:p>
+        </p:txBody>
       </p:sp>
       <p:sp>
         <p:nvSpPr>
@@ -23497,6 +25396,13 @@
             </a:solidFill>
           </a:ln>
         </p:spPr>
+        <p:txBody>
+          <a:bodyPr/>
+          <a:lstStyle/>
+          <a:p>
+            <a:endParaRPr lang="en-US"/>
+          </a:p>
+        </p:txBody>
       </p:sp>
       <p:sp>
         <p:nvSpPr>
@@ -23578,6 +25484,13 @@
             </a:solidFill>
           </a:ln>
         </p:spPr>
+        <p:txBody>
+          <a:bodyPr/>
+          <a:lstStyle/>
+          <a:p>
+            <a:endParaRPr lang="en-US"/>
+          </a:p>
+        </p:txBody>
       </p:sp>
       <p:sp>
         <p:nvSpPr>
@@ -23671,13 +25584,42 @@
               </a:defRPr>
             </a:pPr>
             <a:r>
-              <a:rPr sz="900" b="0">
+              <a:rPr sz="900" b="0" dirty="0">
                 <a:solidFill>
                   <a:srgbClr val="64748B"/>
                 </a:solidFill>
               </a:rPr>
-              <a:t>16 / 20</a:t>
-            </a:r>
+              <a:t>1</a:t>
+            </a:r>
+            <a:r>
+              <a:rPr lang="en-US" sz="900" b="0" dirty="0">
+                <a:solidFill>
+                  <a:srgbClr val="64748B"/>
+                </a:solidFill>
+              </a:rPr>
+              <a:t>7</a:t>
+            </a:r>
+            <a:r>
+              <a:rPr sz="900" b="0" dirty="0">
+                <a:solidFill>
+                  <a:srgbClr val="64748B"/>
+                </a:solidFill>
+              </a:rPr>
+              <a:t> / </a:t>
+            </a:r>
+            <a:r>
+              <a:rPr lang="en-US" sz="900" dirty="0">
+                <a:solidFill>
+                  <a:srgbClr val="64748B"/>
+                </a:solidFill>
+              </a:rPr>
+              <a:t>21</a:t>
+            </a:r>
+            <a:endParaRPr sz="900" b="0" dirty="0">
+              <a:solidFill>
+                <a:srgbClr val="64748B"/>
+              </a:solidFill>
+            </a:endParaRPr>
           </a:p>
         </p:txBody>
       </p:sp>
@@ -23811,13 +25753,26 @@
               </a:defRPr>
             </a:pPr>
             <a:r>
-              <a:rPr sz="2325" b="1">
-                <a:solidFill>
-                  <a:srgbClr val="101827"/>
-                </a:solidFill>
-              </a:rPr>
-              <a:t>Checklist 1 — Quản lý vòng đời của một phiên</a:t>
-            </a:r>
+              <a:rPr sz="2325" b="1" dirty="0">
+                <a:solidFill>
+                  <a:srgbClr val="101827"/>
+                </a:solidFill>
+              </a:rPr>
+              <a:t>Checklist 1 — </a:t>
+            </a:r>
+            <a:r>
+              <a:rPr lang="en-US" sz="2325" b="1" dirty="0">
+                <a:solidFill>
+                  <a:srgbClr val="101827"/>
+                </a:solidFill>
+              </a:rPr>
+              <a:t>Workflow</a:t>
+            </a:r>
+            <a:endParaRPr sz="2325" b="1" dirty="0">
+              <a:solidFill>
+                <a:srgbClr val="101827"/>
+              </a:solidFill>
+            </a:endParaRPr>
           </a:p>
         </p:txBody>
       </p:sp>
@@ -23849,6 +25804,13 @@
             </a:solidFill>
           </a:ln>
         </p:spPr>
+        <p:txBody>
+          <a:bodyPr/>
+          <a:lstStyle/>
+          <a:p>
+            <a:endParaRPr lang="en-US"/>
+          </a:p>
+        </p:txBody>
       </p:sp>
       <p:sp>
         <p:nvSpPr>
@@ -23891,13 +25853,18 @@
               </a:defRPr>
             </a:pPr>
             <a:r>
-              <a:rPr sz="1050" b="1">
+              <a:rPr lang="en-US" sz="1050" b="1" dirty="0">
                 <a:solidFill>
                   <a:srgbClr val="64748B"/>
                 </a:solidFill>
               </a:rPr>
-              <a:t>17</a:t>
-            </a:r>
+              <a:t>18</a:t>
+            </a:r>
+            <a:endParaRPr sz="1050" b="1" dirty="0">
+              <a:solidFill>
+                <a:srgbClr val="64748B"/>
+              </a:solidFill>
+            </a:endParaRPr>
           </a:p>
         </p:txBody>
       </p:sp>
@@ -23934,6 +25901,13 @@
             </a:solidFill>
           </a:ln>
         </p:spPr>
+        <p:txBody>
+          <a:bodyPr/>
+          <a:lstStyle/>
+          <a:p>
+            <a:endParaRPr lang="en-US"/>
+          </a:p>
+        </p:txBody>
       </p:sp>
       <p:sp>
         <p:nvSpPr>
@@ -24019,6 +25993,13 @@
             </a:solidFill>
           </a:ln>
         </p:spPr>
+        <p:txBody>
+          <a:bodyPr/>
+          <a:lstStyle/>
+          <a:p>
+            <a:endParaRPr lang="en-US"/>
+          </a:p>
+        </p:txBody>
       </p:sp>
       <p:sp>
         <p:nvSpPr>
@@ -24100,11 +26081,7 @@
           </a:bodyPr>
           <a:lstStyle/>
           <a:p>
-            <a:pPr algn="l">
-              <a:lnSpc>
-                <a:spcPct val="100000"/>
-              </a:lnSpc>
-              <a:buNone/>
+            <a:pPr>
               <a:defRPr sz="1350" b="1">
                 <a:solidFill>
                   <a:srgbClr val="334155"/>
@@ -24120,7 +26097,7 @@
               <a:t>☐ </a:t>
             </a:r>
             <a:r>
-              <a:rPr sz="1125" b="1" dirty="0" err="1">
+              <a:rPr lang="en-US" sz="1350" b="1" dirty="0" err="1">
                 <a:solidFill>
                   <a:srgbClr val="334155"/>
                 </a:solidFill>
@@ -24128,23 +26105,7 @@
               <a:t>Một</a:t>
             </a:r>
             <a:r>
-              <a:rPr sz="1125" b="1" dirty="0">
-                <a:solidFill>
-                  <a:srgbClr val="334155"/>
-                </a:solidFill>
-              </a:rPr>
-              <a:t> task </a:t>
-            </a:r>
-            <a:r>
-              <a:rPr sz="1125" b="1" dirty="0" err="1">
-                <a:solidFill>
-                  <a:srgbClr val="334155"/>
-                </a:solidFill>
-              </a:rPr>
-              <a:t>cho</a:t>
-            </a:r>
-            <a:r>
-              <a:rPr sz="1125" b="1" dirty="0">
+              <a:rPr lang="en-US" sz="1350" b="1" dirty="0">
                 <a:solidFill>
                   <a:srgbClr val="334155"/>
                 </a:solidFill>
@@ -24152,7 +26113,55 @@
               <a:t> </a:t>
             </a:r>
             <a:r>
-              <a:rPr sz="1125" b="1" dirty="0" err="1">
+              <a:rPr lang="en-US" sz="1350" b="1" dirty="0" err="1">
+                <a:solidFill>
+                  <a:srgbClr val="334155"/>
+                </a:solidFill>
+              </a:rPr>
+              <a:t>phiên</a:t>
+            </a:r>
+            <a:r>
+              <a:rPr lang="en-US" sz="1350" b="1" dirty="0">
+                <a:solidFill>
+                  <a:srgbClr val="334155"/>
+                </a:solidFill>
+              </a:rPr>
+              <a:t> </a:t>
+            </a:r>
+            <a:r>
+              <a:rPr lang="en-US" sz="1350" b="1" dirty="0" err="1">
+                <a:solidFill>
+                  <a:srgbClr val="334155"/>
+                </a:solidFill>
+              </a:rPr>
+              <a:t>chỉ</a:t>
+            </a:r>
+            <a:r>
+              <a:rPr lang="en-US" sz="1350" b="1" dirty="0">
+                <a:solidFill>
+                  <a:srgbClr val="334155"/>
+                </a:solidFill>
+              </a:rPr>
+              <a:t> </a:t>
+            </a:r>
+            <a:r>
+              <a:rPr lang="en-US" sz="1350" b="1" dirty="0" err="1">
+                <a:solidFill>
+                  <a:srgbClr val="334155"/>
+                </a:solidFill>
+              </a:rPr>
+              <a:t>xử</a:t>
+            </a:r>
+            <a:r>
+              <a:rPr lang="en-US" sz="1350" b="1" dirty="0">
+                <a:solidFill>
+                  <a:srgbClr val="334155"/>
+                </a:solidFill>
+              </a:rPr>
+              <a:t> lý </a:t>
+            </a:r>
+            <a:r>
+              <a:rPr lang="en-US" sz="1350" b="1" dirty="0" err="1">
                 <a:solidFill>
                   <a:srgbClr val="334155"/>
                 </a:solidFill>
@@ -24160,7 +26169,7 @@
               <a:t>một</a:t>
             </a:r>
             <a:r>
-              <a:rPr sz="1125" b="1" dirty="0">
+              <a:rPr lang="en-US" sz="1350" b="1" dirty="0">
                 <a:solidFill>
                   <a:srgbClr val="334155"/>
                 </a:solidFill>
@@ -24168,12 +26177,68 @@
               <a:t> </a:t>
             </a:r>
             <a:r>
-              <a:rPr sz="1125" b="1" dirty="0" err="1">
-                <a:solidFill>
-                  <a:srgbClr val="334155"/>
-                </a:solidFill>
-              </a:rPr>
-              <a:t>phiên</a:t>
+              <a:rPr lang="en-US" sz="1350" b="1" dirty="0" err="1">
+                <a:solidFill>
+                  <a:srgbClr val="334155"/>
+                </a:solidFill>
+              </a:rPr>
+              <a:t>nhóm</a:t>
+            </a:r>
+            <a:r>
+              <a:rPr lang="en-US" sz="1350" b="1" dirty="0">
+                <a:solidFill>
+                  <a:srgbClr val="334155"/>
+                </a:solidFill>
+              </a:rPr>
+              <a:t> </a:t>
+            </a:r>
+            <a:r>
+              <a:rPr lang="en-US" sz="1350" b="1" dirty="0" err="1">
+                <a:solidFill>
+                  <a:srgbClr val="334155"/>
+                </a:solidFill>
+              </a:rPr>
+              <a:t>việc</a:t>
+            </a:r>
+            <a:r>
+              <a:rPr lang="en-US" sz="1350" b="1" dirty="0">
+                <a:solidFill>
+                  <a:srgbClr val="334155"/>
+                </a:solidFill>
+              </a:rPr>
+              <a:t> </a:t>
+            </a:r>
+            <a:r>
+              <a:rPr lang="en-US" sz="1350" b="1" dirty="0" err="1">
+                <a:solidFill>
+                  <a:srgbClr val="334155"/>
+                </a:solidFill>
+              </a:rPr>
+              <a:t>liên</a:t>
+            </a:r>
+            <a:r>
+              <a:rPr lang="en-US" sz="1350" b="1" dirty="0">
+                <a:solidFill>
+                  <a:srgbClr val="334155"/>
+                </a:solidFill>
+              </a:rPr>
+              <a:t> </a:t>
+            </a:r>
+            <a:r>
+              <a:rPr lang="en-US" sz="1350" b="1" dirty="0" err="1">
+                <a:solidFill>
+                  <a:srgbClr val="334155"/>
+                </a:solidFill>
+              </a:rPr>
+              <a:t>quan</a:t>
+            </a:r>
+            <a:r>
+              <a:rPr lang="en-US" sz="1350" b="1" dirty="0">
+                <a:solidFill>
+                  <a:srgbClr val="334155"/>
+                </a:solidFill>
+              </a:rPr>
+              <a:t>.</a:t>
             </a:r>
             <a:endParaRPr sz="1125" b="1" dirty="0">
               <a:solidFill>
@@ -24182,11 +26247,7 @@
             </a:endParaRPr>
           </a:p>
           <a:p>
-            <a:pPr algn="l">
-              <a:lnSpc>
-                <a:spcPct val="100000"/>
-              </a:lnSpc>
-              <a:buNone/>
+            <a:pPr>
               <a:defRPr sz="1350" b="1">
                 <a:solidFill>
                   <a:srgbClr val="334155"/>
@@ -24202,7 +26263,7 @@
               <a:t>☐ </a:t>
             </a:r>
             <a:r>
-              <a:rPr sz="1125" b="1" dirty="0" err="1">
+              <a:rPr lang="en-US" sz="1350" b="1" dirty="0" err="1">
                 <a:solidFill>
                   <a:srgbClr val="334155"/>
                 </a:solidFill>
@@ -24210,7 +26271,7 @@
               <a:t>Nêu</a:t>
             </a:r>
             <a:r>
-              <a:rPr sz="1125" b="1" dirty="0">
+              <a:rPr lang="en-US" sz="1350" b="1" dirty="0">
                 <a:solidFill>
                   <a:srgbClr val="334155"/>
                 </a:solidFill>
@@ -24218,7 +26279,23 @@
               <a:t> </a:t>
             </a:r>
             <a:r>
-              <a:rPr sz="1125" b="1" dirty="0" err="1">
+              <a:rPr lang="en-US" sz="1350" b="1" dirty="0" err="1">
+                <a:solidFill>
+                  <a:srgbClr val="334155"/>
+                </a:solidFill>
+              </a:rPr>
+              <a:t>rõ</a:t>
+            </a:r>
+            <a:r>
+              <a:rPr lang="en-US" sz="1350" b="1" dirty="0">
+                <a:solidFill>
+                  <a:srgbClr val="334155"/>
+                </a:solidFill>
+              </a:rPr>
+              <a:t> </a:t>
+            </a:r>
+            <a:r>
+              <a:rPr lang="en-US" sz="1350" b="1" dirty="0" err="1">
                 <a:solidFill>
                   <a:srgbClr val="334155"/>
                 </a:solidFill>
@@ -24226,7 +26303,7 @@
               <a:t>phạm</a:t>
             </a:r>
             <a:r>
-              <a:rPr sz="1125" b="1" dirty="0">
+              <a:rPr lang="en-US" sz="1350" b="1" dirty="0">
                 <a:solidFill>
                   <a:srgbClr val="334155"/>
                 </a:solidFill>
@@ -24234,7 +26311,7 @@
               <a:t> vi và </a:t>
             </a:r>
             <a:r>
-              <a:rPr sz="1125" b="1" dirty="0" err="1">
+              <a:rPr lang="en-US" sz="1350" b="1" dirty="0" err="1">
                 <a:solidFill>
                   <a:srgbClr val="334155"/>
                 </a:solidFill>
@@ -24242,7 +26319,7 @@
               <a:t>điều</a:t>
             </a:r>
             <a:r>
-              <a:rPr sz="1125" b="1" dirty="0">
+              <a:rPr lang="en-US" sz="1350" b="1" dirty="0">
                 <a:solidFill>
                   <a:srgbClr val="334155"/>
                 </a:solidFill>
@@ -24250,7 +26327,7 @@
               <a:t> </a:t>
             </a:r>
             <a:r>
-              <a:rPr sz="1125" b="1" dirty="0" err="1">
+              <a:rPr lang="en-US" sz="1350" b="1" dirty="0" err="1">
                 <a:solidFill>
                   <a:srgbClr val="334155"/>
                 </a:solidFill>
@@ -24258,7 +26335,7 @@
               <a:t>kiện</a:t>
             </a:r>
             <a:r>
-              <a:rPr sz="1125" b="1" dirty="0">
+              <a:rPr lang="en-US" sz="1350" b="1" dirty="0">
                 <a:solidFill>
                   <a:srgbClr val="334155"/>
                 </a:solidFill>
@@ -24266,7 +26343,7 @@
               <a:t> </a:t>
             </a:r>
             <a:r>
-              <a:rPr sz="1125" b="1" dirty="0" err="1">
+              <a:rPr lang="en-US" sz="1350" b="1" dirty="0" err="1">
                 <a:solidFill>
                   <a:srgbClr val="334155"/>
                 </a:solidFill>
@@ -24274,7 +26351,7 @@
               <a:t>hoàn</a:t>
             </a:r>
             <a:r>
-              <a:rPr sz="1125" b="1" dirty="0">
+              <a:rPr lang="en-US" sz="1350" b="1" dirty="0">
                 <a:solidFill>
                   <a:srgbClr val="334155"/>
                 </a:solidFill>
@@ -24282,12 +26359,20 @@
               <a:t> </a:t>
             </a:r>
             <a:r>
-              <a:rPr sz="1125" b="1" dirty="0" err="1">
+              <a:rPr lang="en-US" sz="1350" b="1" dirty="0" err="1">
                 <a:solidFill>
                   <a:srgbClr val="334155"/>
                 </a:solidFill>
               </a:rPr>
               <a:t>thành</a:t>
+            </a:r>
+            <a:r>
+              <a:rPr lang="en-US" sz="1350" b="1" dirty="0">
+                <a:solidFill>
+                  <a:srgbClr val="334155"/>
+                </a:solidFill>
+              </a:rPr>
+              <a:t>.</a:t>
             </a:r>
             <a:endParaRPr sz="1125" b="1" dirty="0">
               <a:solidFill>
@@ -24295,282 +26380,6 @@
               </a:solidFill>
             </a:endParaRPr>
           </a:p>
-          <a:p>
-            <a:pPr algn="l">
-              <a:lnSpc>
-                <a:spcPct val="100000"/>
-              </a:lnSpc>
-              <a:buNone/>
-              <a:defRPr sz="1350" b="1">
-                <a:solidFill>
-                  <a:srgbClr val="334155"/>
-                </a:solidFill>
-              </a:defRPr>
-            </a:pPr>
-            <a:r>
-              <a:rPr sz="1125" b="1" dirty="0">
-                <a:solidFill>
-                  <a:srgbClr val="334155"/>
-                </a:solidFill>
-              </a:rPr>
-              <a:t>☐ </a:t>
-            </a:r>
-            <a:r>
-              <a:rPr sz="1125" b="1" dirty="0" err="1">
-                <a:solidFill>
-                  <a:srgbClr val="334155"/>
-                </a:solidFill>
-              </a:rPr>
-              <a:t>Đưa</a:t>
-            </a:r>
-            <a:r>
-              <a:rPr sz="1125" b="1" dirty="0">
-                <a:solidFill>
-                  <a:srgbClr val="334155"/>
-                </a:solidFill>
-              </a:rPr>
-              <a:t> </a:t>
-            </a:r>
-            <a:r>
-              <a:rPr sz="1125" b="1" dirty="0" err="1">
-                <a:solidFill>
-                  <a:srgbClr val="334155"/>
-                </a:solidFill>
-              </a:rPr>
-              <a:t>ràng</a:t>
-            </a:r>
-            <a:r>
-              <a:rPr sz="1125" b="1" dirty="0">
-                <a:solidFill>
-                  <a:srgbClr val="334155"/>
-                </a:solidFill>
-              </a:rPr>
-              <a:t> </a:t>
-            </a:r>
-            <a:r>
-              <a:rPr sz="1125" b="1" dirty="0" err="1">
-                <a:solidFill>
-                  <a:srgbClr val="334155"/>
-                </a:solidFill>
-              </a:rPr>
-              <a:t>buộc</a:t>
-            </a:r>
-            <a:r>
-              <a:rPr sz="1125" b="1" dirty="0">
-                <a:solidFill>
-                  <a:srgbClr val="334155"/>
-                </a:solidFill>
-              </a:rPr>
-              <a:t> </a:t>
-            </a:r>
-            <a:r>
-              <a:rPr sz="1125" b="1" dirty="0" err="1">
-                <a:solidFill>
-                  <a:srgbClr val="334155"/>
-                </a:solidFill>
-              </a:rPr>
-              <a:t>quan</a:t>
-            </a:r>
-            <a:r>
-              <a:rPr sz="1125" b="1" dirty="0">
-                <a:solidFill>
-                  <a:srgbClr val="334155"/>
-                </a:solidFill>
-              </a:rPr>
-              <a:t> </a:t>
-            </a:r>
-            <a:r>
-              <a:rPr sz="1125" b="1" dirty="0" err="1">
-                <a:solidFill>
-                  <a:srgbClr val="334155"/>
-                </a:solidFill>
-              </a:rPr>
-              <a:t>trọng</a:t>
-            </a:r>
-            <a:r>
-              <a:rPr sz="1125" b="1" dirty="0">
-                <a:solidFill>
-                  <a:srgbClr val="334155"/>
-                </a:solidFill>
-              </a:rPr>
-              <a:t> </a:t>
-            </a:r>
-            <a:r>
-              <a:rPr sz="1125" b="1" dirty="0" err="1">
-                <a:solidFill>
-                  <a:srgbClr val="334155"/>
-                </a:solidFill>
-              </a:rPr>
-              <a:t>ngay</a:t>
-            </a:r>
-            <a:r>
-              <a:rPr sz="1125" b="1" dirty="0">
-                <a:solidFill>
-                  <a:srgbClr val="334155"/>
-                </a:solidFill>
-              </a:rPr>
-              <a:t> </a:t>
-            </a:r>
-            <a:r>
-              <a:rPr sz="1125" b="1" dirty="0" err="1">
-                <a:solidFill>
-                  <a:srgbClr val="334155"/>
-                </a:solidFill>
-              </a:rPr>
-              <a:t>từ</a:t>
-            </a:r>
-            <a:r>
-              <a:rPr sz="1125" b="1" dirty="0">
-                <a:solidFill>
-                  <a:srgbClr val="334155"/>
-                </a:solidFill>
-              </a:rPr>
-              <a:t> </a:t>
-            </a:r>
-            <a:r>
-              <a:rPr sz="1125" b="1" dirty="0" err="1">
-                <a:solidFill>
-                  <a:srgbClr val="334155"/>
-                </a:solidFill>
-              </a:rPr>
-              <a:t>đầu</a:t>
-            </a:r>
-            <a:endParaRPr sz="1125" b="1" dirty="0">
-              <a:solidFill>
-                <a:srgbClr val="334155"/>
-              </a:solidFill>
-            </a:endParaRPr>
-          </a:p>
-          <a:p>
-            <a:pPr algn="l">
-              <a:lnSpc>
-                <a:spcPct val="100000"/>
-              </a:lnSpc>
-              <a:buNone/>
-              <a:defRPr sz="1350" b="1">
-                <a:solidFill>
-                  <a:srgbClr val="334155"/>
-                </a:solidFill>
-              </a:defRPr>
-            </a:pPr>
-            <a:r>
-              <a:rPr sz="1125" b="1" dirty="0">
-                <a:solidFill>
-                  <a:srgbClr val="334155"/>
-                </a:solidFill>
-              </a:rPr>
-              <a:t>☐ </a:t>
-            </a:r>
-            <a:r>
-              <a:rPr sz="1125" b="1" dirty="0" err="1">
-                <a:solidFill>
-                  <a:srgbClr val="334155"/>
-                </a:solidFill>
-              </a:rPr>
-              <a:t>Chỉ</a:t>
-            </a:r>
-            <a:r>
-              <a:rPr sz="1125" b="1" dirty="0">
-                <a:solidFill>
-                  <a:srgbClr val="334155"/>
-                </a:solidFill>
-              </a:rPr>
-              <a:t> </a:t>
-            </a:r>
-            <a:r>
-              <a:rPr sz="1125" b="1" dirty="0" err="1">
-                <a:solidFill>
-                  <a:srgbClr val="334155"/>
-                </a:solidFill>
-              </a:rPr>
-              <a:t>đúng</a:t>
-            </a:r>
-            <a:r>
-              <a:rPr sz="1125" b="1" dirty="0">
-                <a:solidFill>
-                  <a:srgbClr val="334155"/>
-                </a:solidFill>
-              </a:rPr>
-              <a:t> file </a:t>
-            </a:r>
-            <a:r>
-              <a:rPr sz="1125" b="1" dirty="0" err="1">
-                <a:solidFill>
-                  <a:srgbClr val="334155"/>
-                </a:solidFill>
-              </a:rPr>
-              <a:t>hoặc</a:t>
-            </a:r>
-            <a:r>
-              <a:rPr sz="1125" b="1" dirty="0">
-                <a:solidFill>
-                  <a:srgbClr val="334155"/>
-                </a:solidFill>
-              </a:rPr>
-              <a:t> symbol </a:t>
-            </a:r>
-            <a:r>
-              <a:rPr sz="1125" b="1" dirty="0" err="1">
-                <a:solidFill>
-                  <a:srgbClr val="334155"/>
-                </a:solidFill>
-              </a:rPr>
-              <a:t>nếu</a:t>
-            </a:r>
-            <a:r>
-              <a:rPr sz="1125" b="1" dirty="0">
-                <a:solidFill>
-                  <a:srgbClr val="334155"/>
-                </a:solidFill>
-              </a:rPr>
-              <a:t> </a:t>
-            </a:r>
-            <a:r>
-              <a:rPr sz="1125" b="1" dirty="0" err="1">
-                <a:solidFill>
-                  <a:srgbClr val="334155"/>
-                </a:solidFill>
-              </a:rPr>
-              <a:t>biết</a:t>
-            </a:r>
-            <a:r>
-              <a:rPr sz="1125" b="1" dirty="0">
-                <a:solidFill>
-                  <a:srgbClr val="334155"/>
-                </a:solidFill>
-              </a:rPr>
-              <a:t> </a:t>
-            </a:r>
-            <a:r>
-              <a:rPr sz="1125" b="1" dirty="0" err="1">
-                <a:solidFill>
-                  <a:srgbClr val="334155"/>
-                </a:solidFill>
-              </a:rPr>
-              <a:t>vị</a:t>
-            </a:r>
-            <a:r>
-              <a:rPr sz="1125" b="1" dirty="0">
-                <a:solidFill>
-                  <a:srgbClr val="334155"/>
-                </a:solidFill>
-              </a:rPr>
-              <a:t> </a:t>
-            </a:r>
-            <a:r>
-              <a:rPr sz="1125" b="1" dirty="0" err="1">
-                <a:solidFill>
-                  <a:srgbClr val="334155"/>
-                </a:solidFill>
-              </a:rPr>
-              <a:t>trí</a:t>
-            </a:r>
-            <a:endParaRPr sz="1125" b="1" dirty="0">
-              <a:solidFill>
-                <a:srgbClr val="334155"/>
-              </a:solidFill>
-            </a:endParaRPr>
-          </a:p>
         </p:txBody>
       </p:sp>
       <p:sp>
@@ -24589,7 +26398,7 @@
         </p:nvSpPr>
         <p:spPr>
           <a:xfrm>
-            <a:off x="3295650" y="1600200"/>
+            <a:off x="4819650" y="1603829"/>
             <a:ext cx="2552700" cy="4000500"/>
           </a:xfrm>
           <a:prstGeom prst="roundRect">
@@ -24606,6 +26415,13 @@
             </a:solidFill>
           </a:ln>
         </p:spPr>
+        <p:txBody>
+          <a:bodyPr/>
+          <a:lstStyle/>
+          <a:p>
+            <a:endParaRPr lang="en-US"/>
+          </a:p>
+        </p:txBody>
       </p:sp>
       <p:sp>
         <p:nvSpPr>
@@ -24623,7 +26439,7 @@
         </p:nvSpPr>
         <p:spPr>
           <a:xfrm>
-            <a:off x="3467100" y="1752600"/>
+            <a:off x="4991100" y="1756229"/>
             <a:ext cx="2209800" cy="457200"/>
           </a:xfrm>
           <a:prstGeom prst="rect">
@@ -24648,7 +26464,7 @@
               </a:defRPr>
             </a:pPr>
             <a:r>
-              <a:rPr sz="1275" b="1">
+              <a:rPr sz="1275" b="1" dirty="0">
                 <a:solidFill>
                   <a:srgbClr val="D97706"/>
                 </a:solidFill>
@@ -24674,7 +26490,7 @@
         </p:nvSpPr>
         <p:spPr>
           <a:xfrm>
-            <a:off x="3467100" y="2266950"/>
+            <a:off x="4991100" y="2270579"/>
             <a:ext cx="2209800" cy="3048000"/>
           </a:xfrm>
           <a:prstGeom prst="rect">
@@ -24687,11 +26503,7 @@
           </a:bodyPr>
           <a:lstStyle/>
           <a:p>
-            <a:pPr algn="l">
-              <a:lnSpc>
-                <a:spcPct val="100000"/>
-              </a:lnSpc>
-              <a:buNone/>
+            <a:pPr>
               <a:defRPr sz="1350" b="1">
                 <a:solidFill>
                   <a:srgbClr val="334155"/>
@@ -24699,20 +26511,112 @@
               </a:defRPr>
             </a:pPr>
             <a:r>
-              <a:rPr sz="1125" b="1">
-                <a:solidFill>
-                  <a:srgbClr val="334155"/>
-                </a:solidFill>
-              </a:rPr>
-              <a:t>☐ Đưa đường dẫn thay vì dán nội dung agent tự đọc được</a:t>
-            </a:r>
-          </a:p>
-          <a:p>
-            <a:pPr algn="l">
-              <a:lnSpc>
-                <a:spcPct val="100000"/>
-              </a:lnSpc>
-              <a:buNone/>
+              <a:rPr sz="1125" b="1" dirty="0">
+                <a:solidFill>
+                  <a:srgbClr val="334155"/>
+                </a:solidFill>
+              </a:rPr>
+              <a:t>☐ </a:t>
+            </a:r>
+            <a:r>
+              <a:rPr lang="en-US" sz="1350" b="1" dirty="0" err="1">
+                <a:solidFill>
+                  <a:srgbClr val="334155"/>
+                </a:solidFill>
+              </a:rPr>
+              <a:t>Chỉ</a:t>
+            </a:r>
+            <a:r>
+              <a:rPr lang="en-US" sz="1350" b="1" dirty="0">
+                <a:solidFill>
+                  <a:srgbClr val="334155"/>
+                </a:solidFill>
+              </a:rPr>
+              <a:t> </a:t>
+            </a:r>
+            <a:r>
+              <a:rPr lang="en-US" sz="1350" b="1" dirty="0" err="1">
+                <a:solidFill>
+                  <a:srgbClr val="334155"/>
+                </a:solidFill>
+              </a:rPr>
+              <a:t>đưa</a:t>
+            </a:r>
+            <a:r>
+              <a:rPr lang="en-US" sz="1350" b="1" dirty="0">
+                <a:solidFill>
+                  <a:srgbClr val="334155"/>
+                </a:solidFill>
+              </a:rPr>
+              <a:t> </a:t>
+            </a:r>
+            <a:r>
+              <a:rPr lang="en-US" sz="1350" b="1" dirty="0" err="1">
+                <a:solidFill>
+                  <a:srgbClr val="334155"/>
+                </a:solidFill>
+              </a:rPr>
+              <a:t>vào</a:t>
+            </a:r>
+            <a:r>
+              <a:rPr lang="en-US" sz="1350" b="1" dirty="0">
+                <a:solidFill>
+                  <a:srgbClr val="334155"/>
+                </a:solidFill>
+              </a:rPr>
+              <a:t> context </a:t>
+            </a:r>
+            <a:r>
+              <a:rPr lang="en-US" sz="1350" b="1" dirty="0" err="1">
+                <a:solidFill>
+                  <a:srgbClr val="334155"/>
+                </a:solidFill>
+              </a:rPr>
+              <a:t>nội</a:t>
+            </a:r>
+            <a:r>
+              <a:rPr lang="en-US" sz="1350" b="1" dirty="0">
+                <a:solidFill>
+                  <a:srgbClr val="334155"/>
+                </a:solidFill>
+              </a:rPr>
+              <a:t> dung </a:t>
+            </a:r>
+            <a:r>
+              <a:rPr lang="en-US" sz="1350" b="1" dirty="0" err="1">
+                <a:solidFill>
+                  <a:srgbClr val="334155"/>
+                </a:solidFill>
+              </a:rPr>
+              <a:t>cần</a:t>
+            </a:r>
+            <a:r>
+              <a:rPr lang="en-US" sz="1350" b="1" dirty="0">
+                <a:solidFill>
+                  <a:srgbClr val="334155"/>
+                </a:solidFill>
+              </a:rPr>
+              <a:t> </a:t>
+            </a:r>
+            <a:r>
+              <a:rPr lang="en-US" sz="1350" b="1" dirty="0" err="1">
+                <a:solidFill>
+                  <a:srgbClr val="334155"/>
+                </a:solidFill>
+              </a:rPr>
+              <a:t>thiết</a:t>
+            </a:r>
+            <a:r>
+              <a:rPr lang="en-US" sz="1350" b="1" dirty="0">
+                <a:solidFill>
+                  <a:srgbClr val="334155"/>
+                </a:solidFill>
+              </a:rPr>
+              <a:t>.</a:t>
+            </a:r>
+          </a:p>
+          <a:p>
+            <a:pPr>
               <a:defRPr sz="1350" b="1">
                 <a:solidFill>
                   <a:srgbClr val="334155"/>
@@ -24720,54 +26624,44 @@
               </a:defRPr>
             </a:pPr>
             <a:r>
-              <a:rPr sz="1125" b="1">
-                <a:solidFill>
-                  <a:srgbClr val="334155"/>
-                </a:solidFill>
-              </a:rPr>
-              <a:t>☐ Chỉ đưa những dòng lỗi liên quan</a:t>
-            </a:r>
-          </a:p>
-          <a:p>
-            <a:pPr algn="l">
-              <a:lnSpc>
-                <a:spcPct val="100000"/>
-              </a:lnSpc>
-              <a:buNone/>
-              <a:defRPr sz="1350" b="1">
-                <a:solidFill>
-                  <a:srgbClr val="334155"/>
-                </a:solidFill>
-              </a:defRPr>
-            </a:pPr>
-            <a:r>
-              <a:rPr sz="1125" b="1">
-                <a:solidFill>
-                  <a:srgbClr val="334155"/>
-                </a:solidFill>
-              </a:rPr>
-              <a:t>☐ Chạy compiler/test thay vì yêu cầu model dự đoán</a:t>
-            </a:r>
-          </a:p>
-          <a:p>
-            <a:pPr algn="l">
-              <a:lnSpc>
-                <a:spcPct val="100000"/>
-              </a:lnSpc>
-              <a:buNone/>
-              <a:defRPr sz="1350" b="1">
-                <a:solidFill>
-                  <a:srgbClr val="334155"/>
-                </a:solidFill>
-              </a:defRPr>
-            </a:pPr>
-            <a:r>
-              <a:rPr sz="1125" b="1">
-                <a:solidFill>
-                  <a:srgbClr val="334155"/>
-                </a:solidFill>
-              </a:rPr>
-              <a:t>☐ Không đổi rules, model hoặc tool setup giữa task</a:t>
+              <a:rPr sz="1125" b="1" dirty="0">
+                <a:solidFill>
+                  <a:srgbClr val="334155"/>
+                </a:solidFill>
+              </a:rPr>
+              <a:t>☐ </a:t>
+            </a:r>
+            <a:r>
+              <a:rPr lang="en-US" sz="1350" b="1" dirty="0" err="1">
+                <a:solidFill>
+                  <a:srgbClr val="334155"/>
+                </a:solidFill>
+              </a:rPr>
+              <a:t>Chủ</a:t>
+            </a:r>
+            <a:r>
+              <a:rPr lang="en-US" sz="1350" b="1" dirty="0">
+                <a:solidFill>
+                  <a:srgbClr val="334155"/>
+                </a:solidFill>
+              </a:rPr>
+              <a:t> </a:t>
+            </a:r>
+            <a:r>
+              <a:rPr lang="en-US" sz="1350" b="1" dirty="0" err="1">
+                <a:solidFill>
+                  <a:srgbClr val="334155"/>
+                </a:solidFill>
+              </a:rPr>
+              <a:t>động</a:t>
+            </a:r>
+            <a:r>
+              <a:rPr lang="en-US" sz="1350" b="1" dirty="0">
+                <a:solidFill>
+                  <a:srgbClr val="334155"/>
+                </a:solidFill>
+              </a:rPr>
+              <a:t> compress context</a:t>
             </a:r>
           </a:p>
         </p:txBody>
@@ -24788,7 +26682,7 @@
         </p:nvSpPr>
         <p:spPr>
           <a:xfrm>
-            <a:off x="6096000" y="1600200"/>
+            <a:off x="9144000" y="1600200"/>
             <a:ext cx="2552700" cy="4000500"/>
           </a:xfrm>
           <a:prstGeom prst="roundRect">
@@ -24805,6 +26699,13 @@
             </a:solidFill>
           </a:ln>
         </p:spPr>
+        <p:txBody>
+          <a:bodyPr/>
+          <a:lstStyle/>
+          <a:p>
+            <a:endParaRPr lang="en-US"/>
+          </a:p>
+        </p:txBody>
       </p:sp>
       <p:sp>
         <p:nvSpPr>
@@ -24822,7 +26723,7 @@
         </p:nvSpPr>
         <p:spPr>
           <a:xfrm>
-            <a:off x="6267450" y="1752600"/>
+            <a:off x="9315450" y="1752600"/>
             <a:ext cx="2209800" cy="457200"/>
           </a:xfrm>
           <a:prstGeom prst="rect">
@@ -24847,7 +26748,7 @@
               </a:defRPr>
             </a:pPr>
             <a:r>
-              <a:rPr sz="1125" b="1">
+              <a:rPr sz="1280" b="1" dirty="0">
                 <a:solidFill>
                   <a:srgbClr val="6246B5"/>
                 </a:solidFill>
@@ -24873,7 +26774,7 @@
         </p:nvSpPr>
         <p:spPr>
           <a:xfrm>
-            <a:off x="6267450" y="2266950"/>
+            <a:off x="9315450" y="2266950"/>
             <a:ext cx="2209800" cy="3048000"/>
           </a:xfrm>
           <a:prstGeom prst="rect">
@@ -24886,286 +26787,237 @@
           </a:bodyPr>
           <a:lstStyle/>
           <a:p>
-            <a:pPr algn="l">
-              <a:lnSpc>
-                <a:spcPct val="100000"/>
-              </a:lnSpc>
-              <a:buNone/>
-              <a:defRPr sz="1350" b="1">
-                <a:solidFill>
-                  <a:srgbClr val="334155"/>
-                </a:solidFill>
-              </a:defRPr>
-            </a:pPr>
-            <a:r>
-              <a:rPr sz="1125" b="1">
-                <a:solidFill>
-                  <a:srgbClr val="334155"/>
-                </a:solidFill>
-              </a:rPr>
-              <a:t>☐ Cùng cách thất bại hai lần: dừng và lập kế hoạch lại</a:t>
-            </a:r>
-          </a:p>
-          <a:p>
-            <a:pPr algn="l">
-              <a:lnSpc>
-                <a:spcPct val="100000"/>
-              </a:lnSpc>
-              <a:buNone/>
-              <a:defRPr sz="1350" b="1">
-                <a:solidFill>
-                  <a:srgbClr val="334155"/>
-                </a:solidFill>
-              </a:defRPr>
-            </a:pPr>
-            <a:r>
-              <a:rPr sz="1125" b="1">
-                <a:solidFill>
-                  <a:srgbClr val="334155"/>
-                </a:solidFill>
-              </a:rPr>
-              <a:t>☐ Chỉ compact sau một phần công việc rõ ràng</a:t>
-            </a:r>
-          </a:p>
-          <a:p>
-            <a:pPr algn="l">
-              <a:lnSpc>
-                <a:spcPct val="100000"/>
-              </a:lnSpc>
-              <a:buNone/>
-              <a:defRPr sz="1350" b="1">
-                <a:solidFill>
-                  <a:srgbClr val="334155"/>
-                </a:solidFill>
-              </a:defRPr>
-            </a:pPr>
-            <a:r>
-              <a:rPr sz="1125" b="1">
-                <a:solidFill>
-                  <a:srgbClr val="334155"/>
-                </a:solidFill>
-              </a:rPr>
-              <a:t>☐ Không compact giữa lúc điều tra lỗi</a:t>
-            </a:r>
-          </a:p>
-          <a:p>
-            <a:pPr algn="l">
-              <a:lnSpc>
-                <a:spcPct val="100000"/>
-              </a:lnSpc>
-              <a:buNone/>
-              <a:defRPr sz="1350" b="1">
-                <a:solidFill>
-                  <a:srgbClr val="334155"/>
-                </a:solidFill>
-              </a:defRPr>
-            </a:pPr>
-            <a:r>
-              <a:rPr sz="1125" b="1">
-                <a:solidFill>
-                  <a:srgbClr val="334155"/>
-                </a:solidFill>
-              </a:rPr>
-              <a:t>☐ Lưu kết quả quan trọng trước compact hoặc restart</a:t>
-            </a:r>
-          </a:p>
-        </p:txBody>
-      </p:sp>
-      <p:sp>
-        <p:nvSpPr>
-          <p:cNvPr id="16" name="Rectangle: Rounded Corners 15">
-            <a:extLst>
-              <a:ext uri="{FF2B5EF4-FFF2-40B4-BE49-F238E27FC236}">
-                <a16:creationId xmlns:a16="http://schemas.microsoft.com/office/drawing/2014/main" id="{BD5A999F-3E05-4065-A808-FF1CAC70F78D}"/>
-              </a:ext>
-            </a:extLst>
-          </p:cNvPr>
-          <p:cNvSpPr>
-            <a:spLocks noGrp="1"/>
-          </p:cNvSpPr>
-          <p:nvPr/>
-        </p:nvSpPr>
-        <p:spPr>
-          <a:xfrm>
-            <a:off x="8896350" y="1600200"/>
-            <a:ext cx="2552700" cy="4000500"/>
-          </a:xfrm>
-          <a:prstGeom prst="roundRect">
-            <a:avLst>
-              <a:gd name="adj" fmla="val 4706"/>
-            </a:avLst>
-          </a:prstGeom>
-          <a:solidFill>
-            <a:srgbClr val="FFFFFF"/>
-          </a:solidFill>
-          <a:ln w="17145">
-            <a:solidFill>
-              <a:srgbClr val="0E9AA7"/>
-            </a:solidFill>
-          </a:ln>
-        </p:spPr>
-      </p:sp>
-      <p:sp>
-        <p:nvSpPr>
-          <p:cNvPr id="17" name="Rectangle 16">
-            <a:extLst>
-              <a:ext uri="{FF2B5EF4-FFF2-40B4-BE49-F238E27FC236}">
-                <a16:creationId xmlns:a16="http://schemas.microsoft.com/office/drawing/2014/main" id="{E66D391F-5DC7-4266-B71D-9EB8D668FF9B}"/>
-              </a:ext>
-            </a:extLst>
-          </p:cNvPr>
-          <p:cNvSpPr>
-            <a:spLocks noGrp="1"/>
-          </p:cNvSpPr>
-          <p:nvPr/>
-        </p:nvSpPr>
-        <p:spPr>
-          <a:xfrm>
-            <a:off x="9067800" y="1752600"/>
-            <a:ext cx="2209800" cy="457200"/>
-          </a:xfrm>
-          <a:prstGeom prst="rect">
-            <a:avLst/>
-          </a:prstGeom>
-        </p:spPr>
-        <p:txBody>
-          <a:bodyPr anchor="ctr">
-            <a:normAutofit/>
-          </a:bodyPr>
-          <a:lstStyle/>
-          <a:p>
-            <a:pPr algn="l">
-              <a:lnSpc>
-                <a:spcPct val="100000"/>
-              </a:lnSpc>
-              <a:buNone/>
-              <a:defRPr sz="1275" b="1">
-                <a:solidFill>
-                  <a:srgbClr val="0E9AA7"/>
-                </a:solidFill>
-              </a:defRPr>
-            </a:pPr>
-            <a:r>
-              <a:rPr sz="1275" b="1">
-                <a:solidFill>
-                  <a:srgbClr val="0E9AA7"/>
-                </a:solidFill>
-              </a:rPr>
-              <a:t>KẾT THÚC PHIÊN</a:t>
-            </a:r>
-          </a:p>
-        </p:txBody>
-      </p:sp>
-      <p:sp>
-        <p:nvSpPr>
-          <p:cNvPr id="18" name="Rectangle 17">
-            <a:extLst>
-              <a:ext uri="{FF2B5EF4-FFF2-40B4-BE49-F238E27FC236}">
-                <a16:creationId xmlns:a16="http://schemas.microsoft.com/office/drawing/2014/main" id="{BD6D934B-B8B2-4E28-BF51-D930DED9D240}"/>
-              </a:ext>
-            </a:extLst>
-          </p:cNvPr>
-          <p:cNvSpPr>
-            <a:spLocks noGrp="1"/>
-          </p:cNvSpPr>
-          <p:nvPr/>
-        </p:nvSpPr>
-        <p:spPr>
-          <a:xfrm>
-            <a:off x="9067800" y="2266950"/>
-            <a:ext cx="2209800" cy="3048000"/>
-          </a:xfrm>
-          <a:prstGeom prst="rect">
-            <a:avLst/>
-          </a:prstGeom>
-        </p:spPr>
-        <p:txBody>
-          <a:bodyPr anchor="ctr">
-            <a:normAutofit/>
-          </a:bodyPr>
-          <a:lstStyle/>
-          <a:p>
-            <a:pPr algn="l">
-              <a:lnSpc>
-                <a:spcPct val="100000"/>
-              </a:lnSpc>
-              <a:buNone/>
-              <a:defRPr sz="1350" b="1">
-                <a:solidFill>
-                  <a:srgbClr val="334155"/>
-                </a:solidFill>
-              </a:defRPr>
-            </a:pPr>
-            <a:r>
-              <a:rPr sz="1125" b="1">
-                <a:solidFill>
-                  <a:srgbClr val="334155"/>
-                </a:solidFill>
-              </a:rPr>
-              <a:t>☐ Task hoàn thành thì không đưa task khác vào cùng phiên</a:t>
-            </a:r>
-          </a:p>
-          <a:p>
-            <a:pPr algn="l">
-              <a:lnSpc>
-                <a:spcPct val="100000"/>
-              </a:lnSpc>
-              <a:buNone/>
-              <a:defRPr sz="1350" b="1">
-                <a:solidFill>
-                  <a:srgbClr val="334155"/>
-                </a:solidFill>
-              </a:defRPr>
-            </a:pPr>
-            <a:r>
-              <a:rPr sz="1125" b="1">
-                <a:solidFill>
-                  <a:srgbClr val="334155"/>
-                </a:solidFill>
-              </a:rPr>
-              <a:t>☐ Ghi rõ đã đổi gì, đã kiểm tra gì, còn gì chưa xong</a:t>
-            </a:r>
-          </a:p>
-          <a:p>
-            <a:pPr algn="l">
-              <a:lnSpc>
-                <a:spcPct val="100000"/>
-              </a:lnSpc>
-              <a:buNone/>
-              <a:defRPr sz="1350" b="1">
-                <a:solidFill>
-                  <a:srgbClr val="334155"/>
-                </a:solidFill>
-              </a:defRPr>
-            </a:pPr>
-            <a:r>
-              <a:rPr sz="1125" b="1">
-                <a:solidFill>
-                  <a:srgbClr val="334155"/>
-                </a:solidFill>
-              </a:rPr>
-              <a:t>☐ Tạo handoff nếu cần tiếp tục</a:t>
-            </a:r>
-          </a:p>
-          <a:p>
-            <a:pPr algn="l">
-              <a:lnSpc>
-                <a:spcPct val="100000"/>
-              </a:lnSpc>
-              <a:buNone/>
-              <a:defRPr sz="1350" b="1">
-                <a:solidFill>
-                  <a:srgbClr val="334155"/>
-                </a:solidFill>
-              </a:defRPr>
-            </a:pPr>
-            <a:r>
-              <a:rPr sz="1125" b="1">
-                <a:solidFill>
-                  <a:srgbClr val="334155"/>
-                </a:solidFill>
-              </a:rPr>
-              <a:t>☐ Mở phiên mới nếu task tiếp theo ít liên quan</a:t>
+            <a:r>
+              <a:rPr sz="1125" b="1" dirty="0">
+                <a:solidFill>
+                  <a:srgbClr val="334155"/>
+                </a:solidFill>
+              </a:rPr>
+              <a:t>☐ </a:t>
+            </a:r>
+            <a:r>
+              <a:rPr lang="en-US" sz="1350" b="1" dirty="0" err="1">
+                <a:solidFill>
+                  <a:srgbClr val="334155"/>
+                </a:solidFill>
+              </a:rPr>
+              <a:t>Dừng</a:t>
+            </a:r>
+            <a:r>
+              <a:rPr lang="en-US" sz="1350" b="1" dirty="0">
+                <a:solidFill>
+                  <a:srgbClr val="334155"/>
+                </a:solidFill>
+              </a:rPr>
+              <a:t> </a:t>
+            </a:r>
+            <a:r>
+              <a:rPr lang="en-US" sz="1350" b="1" dirty="0" err="1">
+                <a:solidFill>
+                  <a:srgbClr val="334155"/>
+                </a:solidFill>
+              </a:rPr>
+              <a:t>khi</a:t>
+            </a:r>
+            <a:r>
+              <a:rPr lang="en-US" sz="1350" b="1" dirty="0">
+                <a:solidFill>
+                  <a:srgbClr val="334155"/>
+                </a:solidFill>
+              </a:rPr>
+              <a:t> </a:t>
+            </a:r>
+            <a:r>
+              <a:rPr lang="en-US" sz="1350" b="1" dirty="0" err="1">
+                <a:solidFill>
+                  <a:srgbClr val="334155"/>
+                </a:solidFill>
+              </a:rPr>
+              <a:t>không</a:t>
+            </a:r>
+            <a:r>
+              <a:rPr lang="en-US" sz="1350" b="1" dirty="0">
+                <a:solidFill>
+                  <a:srgbClr val="334155"/>
+                </a:solidFill>
+              </a:rPr>
+              <a:t> </a:t>
+            </a:r>
+            <a:r>
+              <a:rPr lang="en-US" sz="1350" b="1" dirty="0" err="1">
+                <a:solidFill>
+                  <a:srgbClr val="334155"/>
+                </a:solidFill>
+              </a:rPr>
+              <a:t>có</a:t>
+            </a:r>
+            <a:r>
+              <a:rPr lang="en-US" sz="1350" b="1" dirty="0">
+                <a:solidFill>
+                  <a:srgbClr val="334155"/>
+                </a:solidFill>
+              </a:rPr>
+              <a:t> </a:t>
+            </a:r>
+            <a:r>
+              <a:rPr lang="en-US" sz="1350" b="1" dirty="0" err="1">
+                <a:solidFill>
+                  <a:srgbClr val="334155"/>
+                </a:solidFill>
+              </a:rPr>
+              <a:t>hướng</a:t>
+            </a:r>
+            <a:r>
+              <a:rPr lang="en-US" sz="1350" b="1" dirty="0">
+                <a:solidFill>
+                  <a:srgbClr val="334155"/>
+                </a:solidFill>
+              </a:rPr>
+              <a:t> </a:t>
+            </a:r>
+            <a:r>
+              <a:rPr lang="en-US" sz="1350" b="1" dirty="0" err="1">
+                <a:solidFill>
+                  <a:srgbClr val="334155"/>
+                </a:solidFill>
+              </a:rPr>
+              <a:t>mới</a:t>
+            </a:r>
+            <a:r>
+              <a:rPr lang="en-US" sz="1350" b="1" dirty="0">
+                <a:solidFill>
+                  <a:srgbClr val="334155"/>
+                </a:solidFill>
+              </a:rPr>
+              <a:t>, </a:t>
+            </a:r>
+            <a:r>
+              <a:rPr lang="en-US" sz="1350" b="1" dirty="0" err="1">
+                <a:solidFill>
+                  <a:srgbClr val="334155"/>
+                </a:solidFill>
+              </a:rPr>
+              <a:t>lưu</a:t>
+            </a:r>
+            <a:r>
+              <a:rPr lang="en-US" sz="1350" b="1" dirty="0">
+                <a:solidFill>
+                  <a:srgbClr val="334155"/>
+                </a:solidFill>
+              </a:rPr>
+              <a:t> </a:t>
+            </a:r>
+            <a:r>
+              <a:rPr lang="en-US" sz="1350" b="1" dirty="0" err="1">
+                <a:solidFill>
+                  <a:srgbClr val="334155"/>
+                </a:solidFill>
+              </a:rPr>
+              <a:t>kết</a:t>
+            </a:r>
+            <a:r>
+              <a:rPr lang="en-US" sz="1350" b="1" dirty="0">
+                <a:solidFill>
+                  <a:srgbClr val="334155"/>
+                </a:solidFill>
+              </a:rPr>
+              <a:t> </a:t>
+            </a:r>
+            <a:r>
+              <a:rPr lang="en-US" sz="1350" b="1" dirty="0" err="1">
+                <a:solidFill>
+                  <a:srgbClr val="334155"/>
+                </a:solidFill>
+              </a:rPr>
+              <a:t>quả</a:t>
+            </a:r>
+            <a:r>
+              <a:rPr lang="en-US" sz="1350" b="1" dirty="0">
+                <a:solidFill>
+                  <a:srgbClr val="334155"/>
+                </a:solidFill>
+              </a:rPr>
+              <a:t> </a:t>
+            </a:r>
+            <a:r>
+              <a:rPr lang="en-US" sz="1350" b="1" dirty="0" err="1">
+                <a:solidFill>
+                  <a:srgbClr val="334155"/>
+                </a:solidFill>
+              </a:rPr>
+              <a:t>quan</a:t>
+            </a:r>
+            <a:r>
+              <a:rPr lang="en-US" sz="1350" b="1" dirty="0">
+                <a:solidFill>
+                  <a:srgbClr val="334155"/>
+                </a:solidFill>
+              </a:rPr>
+              <a:t> </a:t>
+            </a:r>
+            <a:r>
+              <a:rPr lang="en-US" sz="1350" b="1" dirty="0" err="1">
+                <a:solidFill>
+                  <a:srgbClr val="334155"/>
+                </a:solidFill>
+              </a:rPr>
+              <a:t>trọng</a:t>
+            </a:r>
+            <a:r>
+              <a:rPr lang="en-US" sz="1350" b="1" dirty="0">
+                <a:solidFill>
+                  <a:srgbClr val="334155"/>
+                </a:solidFill>
+              </a:rPr>
+              <a:t> và </a:t>
+            </a:r>
+            <a:r>
+              <a:rPr lang="en-US" sz="1350" b="1" dirty="0" err="1">
+                <a:solidFill>
+                  <a:srgbClr val="334155"/>
+                </a:solidFill>
+              </a:rPr>
+              <a:t>lập</a:t>
+            </a:r>
+            <a:r>
+              <a:rPr lang="en-US" sz="1350" b="1" dirty="0">
+                <a:solidFill>
+                  <a:srgbClr val="334155"/>
+                </a:solidFill>
+              </a:rPr>
+              <a:t> </a:t>
+            </a:r>
+            <a:r>
+              <a:rPr lang="en-US" sz="1350" b="1" dirty="0" err="1">
+                <a:solidFill>
+                  <a:srgbClr val="334155"/>
+                </a:solidFill>
+              </a:rPr>
+              <a:t>phiên</a:t>
+            </a:r>
+            <a:r>
+              <a:rPr lang="en-US" sz="1350" b="1" dirty="0">
+                <a:solidFill>
+                  <a:srgbClr val="334155"/>
+                </a:solidFill>
+              </a:rPr>
+              <a:t> </a:t>
+            </a:r>
+            <a:r>
+              <a:rPr lang="en-US" sz="1350" b="1" dirty="0" err="1">
+                <a:solidFill>
+                  <a:srgbClr val="334155"/>
+                </a:solidFill>
+              </a:rPr>
+              <a:t>mới</a:t>
+            </a:r>
+            <a:r>
+              <a:rPr lang="en-US" sz="1350" b="1" dirty="0">
+                <a:solidFill>
+                  <a:srgbClr val="334155"/>
+                </a:solidFill>
+              </a:rPr>
+              <a:t> </a:t>
             </a:r>
           </a:p>
         </p:txBody>
@@ -25198,6 +27050,13 @@
             </a:solidFill>
           </a:ln>
         </p:spPr>
+        <p:txBody>
+          <a:bodyPr/>
+          <a:lstStyle/>
+          <a:p>
+            <a:endParaRPr lang="en-US"/>
+          </a:p>
+        </p:txBody>
       </p:sp>
       <p:sp>
         <p:nvSpPr>
@@ -25291,13 +27150,34 @@
               </a:defRPr>
             </a:pPr>
             <a:r>
-              <a:rPr sz="900" b="0">
+              <a:rPr lang="en-US" sz="900" b="0" dirty="0">
                 <a:solidFill>
                   <a:srgbClr val="64748B"/>
                 </a:solidFill>
               </a:rPr>
-              <a:t>17 / 20</a:t>
-            </a:r>
+              <a:t>18</a:t>
+            </a:r>
+            <a:r>
+              <a:rPr sz="900" b="0" dirty="0">
+                <a:solidFill>
+                  <a:srgbClr val="64748B"/>
+                </a:solidFill>
+              </a:rPr>
+              <a:t> / </a:t>
+            </a:r>
+            <a:r>
+              <a:rPr lang="en-US" sz="900" b="0" dirty="0">
+                <a:solidFill>
+                  <a:srgbClr val="64748B"/>
+                </a:solidFill>
+              </a:rPr>
+              <a:t>21</a:t>
+            </a:r>
+            <a:endParaRPr sz="900" b="0" dirty="0">
+              <a:solidFill>
+                <a:srgbClr val="64748B"/>
+              </a:solidFill>
+            </a:endParaRPr>
           </a:p>
         </p:txBody>
       </p:sp>
@@ -25469,6 +27349,13 @@
             </a:solidFill>
           </a:ln>
         </p:spPr>
+        <p:txBody>
+          <a:bodyPr/>
+          <a:lstStyle/>
+          <a:p>
+            <a:endParaRPr lang="en-US"/>
+          </a:p>
+        </p:txBody>
       </p:sp>
       <p:sp>
         <p:nvSpPr>
@@ -25511,13 +27398,18 @@
               </a:defRPr>
             </a:pPr>
             <a:r>
-              <a:rPr sz="900" b="1">
+              <a:rPr lang="en-US" sz="900" b="1" dirty="0">
                 <a:solidFill>
                   <a:srgbClr val="64748B"/>
                 </a:solidFill>
               </a:rPr>
-              <a:t>18</a:t>
-            </a:r>
+              <a:t>19</a:t>
+            </a:r>
+            <a:endParaRPr sz="900" b="1" dirty="0">
+              <a:solidFill>
+                <a:srgbClr val="64748B"/>
+              </a:solidFill>
+            </a:endParaRPr>
           </a:p>
         </p:txBody>
       </p:sp>
@@ -25552,6 +27444,13 @@
             </a:solidFill>
           </a:ln>
         </p:spPr>
+        <p:txBody>
+          <a:bodyPr/>
+          <a:lstStyle/>
+          <a:p>
+            <a:endParaRPr lang="en-US"/>
+          </a:p>
+        </p:txBody>
       </p:sp>
       <p:sp>
         <p:nvSpPr>
@@ -25640,6 +27539,13 @@
             </a:solidFill>
           </a:ln>
         </p:spPr>
+        <p:txBody>
+          <a:bodyPr/>
+          <a:lstStyle/>
+          <a:p>
+            <a:endParaRPr lang="en-US"/>
+          </a:p>
+        </p:txBody>
       </p:sp>
       <p:sp>
         <p:nvSpPr>
@@ -25723,6 +27629,13 @@
             </a:solidFill>
           </a:ln>
         </p:spPr>
+        <p:txBody>
+          <a:bodyPr/>
+          <a:lstStyle/>
+          <a:p>
+            <a:endParaRPr lang="en-US"/>
+          </a:p>
+        </p:txBody>
       </p:sp>
       <p:sp>
         <p:nvSpPr>
@@ -25806,6 +27719,13 @@
             </a:solidFill>
           </a:ln>
         </p:spPr>
+        <p:txBody>
+          <a:bodyPr/>
+          <a:lstStyle/>
+          <a:p>
+            <a:endParaRPr lang="en-US"/>
+          </a:p>
+        </p:txBody>
       </p:sp>
       <p:sp>
         <p:nvSpPr>
@@ -25889,6 +27809,13 @@
             </a:solidFill>
           </a:ln>
         </p:spPr>
+        <p:txBody>
+          <a:bodyPr/>
+          <a:lstStyle/>
+          <a:p>
+            <a:endParaRPr lang="en-US"/>
+          </a:p>
+        </p:txBody>
       </p:sp>
       <p:sp>
         <p:nvSpPr>
@@ -25972,6 +27899,13 @@
             </a:solidFill>
           </a:ln>
         </p:spPr>
+        <p:txBody>
+          <a:bodyPr/>
+          <a:lstStyle/>
+          <a:p>
+            <a:endParaRPr lang="en-US"/>
+          </a:p>
+        </p:txBody>
       </p:sp>
       <p:sp>
         <p:nvSpPr>
@@ -26055,6 +27989,13 @@
             </a:solidFill>
           </a:ln>
         </p:spPr>
+        <p:txBody>
+          <a:bodyPr/>
+          <a:lstStyle/>
+          <a:p>
+            <a:endParaRPr lang="en-US"/>
+          </a:p>
+        </p:txBody>
       </p:sp>
       <p:sp>
         <p:nvSpPr>
@@ -26138,6 +28079,13 @@
             </a:solidFill>
           </a:ln>
         </p:spPr>
+        <p:txBody>
+          <a:bodyPr/>
+          <a:lstStyle/>
+          <a:p>
+            <a:endParaRPr lang="en-US" dirty="0"/>
+          </a:p>
+        </p:txBody>
       </p:sp>
       <p:sp>
         <p:nvSpPr>
@@ -26221,6 +28169,13 @@
             </a:solidFill>
           </a:ln>
         </p:spPr>
+        <p:txBody>
+          <a:bodyPr/>
+          <a:lstStyle/>
+          <a:p>
+            <a:endParaRPr lang="en-US"/>
+          </a:p>
+        </p:txBody>
       </p:sp>
       <p:sp>
         <p:nvSpPr>
@@ -26304,6 +28259,13 @@
             </a:solidFill>
           </a:ln>
         </p:spPr>
+        <p:txBody>
+          <a:bodyPr/>
+          <a:lstStyle/>
+          <a:p>
+            <a:endParaRPr lang="en-US"/>
+          </a:p>
+        </p:txBody>
       </p:sp>
       <p:sp>
         <p:nvSpPr>
@@ -26387,6 +28349,13 @@
             </a:solidFill>
           </a:ln>
         </p:spPr>
+        <p:txBody>
+          <a:bodyPr/>
+          <a:lstStyle/>
+          <a:p>
+            <a:endParaRPr lang="en-US"/>
+          </a:p>
+        </p:txBody>
       </p:sp>
       <p:sp>
         <p:nvSpPr>
@@ -26470,6 +28439,13 @@
             </a:solidFill>
           </a:ln>
         </p:spPr>
+        <p:txBody>
+          <a:bodyPr/>
+          <a:lstStyle/>
+          <a:p>
+            <a:endParaRPr lang="en-US"/>
+          </a:p>
+        </p:txBody>
       </p:sp>
       <p:sp>
         <p:nvSpPr>
@@ -26512,13 +28488,266 @@
               </a:defRPr>
             </a:pPr>
             <a:r>
-              <a:rPr sz="1050" b="0">
-                <a:solidFill>
-                  <a:srgbClr val="101827"/>
-                </a:solidFill>
-              </a:rPr>
-              <a:t>Dùng mức vừa phải cho việc thường ngày; chỉ nâng khi task thực sự cần suy luận sâu</a:t>
-            </a:r>
+              <a:rPr sz="1050" b="0" dirty="0">
+                <a:solidFill>
+                  <a:srgbClr val="101827"/>
+                </a:solidFill>
+              </a:rPr>
+              <a:t>Dùng </a:t>
+            </a:r>
+            <a:r>
+              <a:rPr sz="1050" b="0" dirty="0" err="1">
+                <a:solidFill>
+                  <a:srgbClr val="101827"/>
+                </a:solidFill>
+              </a:rPr>
+              <a:t>mức</a:t>
+            </a:r>
+            <a:r>
+              <a:rPr sz="1050" b="0" dirty="0">
+                <a:solidFill>
+                  <a:srgbClr val="101827"/>
+                </a:solidFill>
+              </a:rPr>
+              <a:t> </a:t>
+            </a:r>
+            <a:r>
+              <a:rPr sz="1050" b="0" dirty="0" err="1">
+                <a:solidFill>
+                  <a:srgbClr val="101827"/>
+                </a:solidFill>
+              </a:rPr>
+              <a:t>vừa</a:t>
+            </a:r>
+            <a:r>
+              <a:rPr sz="1050" b="0" dirty="0">
+                <a:solidFill>
+                  <a:srgbClr val="101827"/>
+                </a:solidFill>
+              </a:rPr>
+              <a:t> </a:t>
+            </a:r>
+            <a:r>
+              <a:rPr sz="1050" b="0" dirty="0" err="1">
+                <a:solidFill>
+                  <a:srgbClr val="101827"/>
+                </a:solidFill>
+              </a:rPr>
+              <a:t>phải</a:t>
+            </a:r>
+            <a:r>
+              <a:rPr sz="1050" b="0" dirty="0">
+                <a:solidFill>
+                  <a:srgbClr val="101827"/>
+                </a:solidFill>
+              </a:rPr>
+              <a:t> </a:t>
+            </a:r>
+            <a:r>
+              <a:rPr sz="1050" b="0" dirty="0" err="1">
+                <a:solidFill>
+                  <a:srgbClr val="101827"/>
+                </a:solidFill>
+              </a:rPr>
+              <a:t>cho</a:t>
+            </a:r>
+            <a:r>
+              <a:rPr sz="1050" b="0" dirty="0">
+                <a:solidFill>
+                  <a:srgbClr val="101827"/>
+                </a:solidFill>
+              </a:rPr>
+              <a:t> </a:t>
+            </a:r>
+            <a:r>
+              <a:rPr sz="1050" b="0" dirty="0" err="1">
+                <a:solidFill>
+                  <a:srgbClr val="101827"/>
+                </a:solidFill>
+              </a:rPr>
+              <a:t>việc</a:t>
+            </a:r>
+            <a:r>
+              <a:rPr sz="1050" b="0" dirty="0">
+                <a:solidFill>
+                  <a:srgbClr val="101827"/>
+                </a:solidFill>
+              </a:rPr>
+              <a:t> </a:t>
+            </a:r>
+            <a:r>
+              <a:rPr sz="1050" b="0" dirty="0" err="1">
+                <a:solidFill>
+                  <a:srgbClr val="101827"/>
+                </a:solidFill>
+              </a:rPr>
+              <a:t>thường</a:t>
+            </a:r>
+            <a:r>
+              <a:rPr sz="1050" b="0" dirty="0">
+                <a:solidFill>
+                  <a:srgbClr val="101827"/>
+                </a:solidFill>
+              </a:rPr>
+              <a:t> </a:t>
+            </a:r>
+            <a:r>
+              <a:rPr sz="1050" b="0" dirty="0" err="1">
+                <a:solidFill>
+                  <a:srgbClr val="101827"/>
+                </a:solidFill>
+              </a:rPr>
+              <a:t>ngày</a:t>
+            </a:r>
+            <a:r>
+              <a:rPr sz="1050" b="0" dirty="0">
+                <a:solidFill>
+                  <a:srgbClr val="101827"/>
+                </a:solidFill>
+              </a:rPr>
+              <a:t>; </a:t>
+            </a:r>
+            <a:r>
+              <a:rPr sz="1050" b="0" dirty="0" err="1">
+                <a:solidFill>
+                  <a:srgbClr val="101827"/>
+                </a:solidFill>
+              </a:rPr>
+              <a:t>chỉ</a:t>
+            </a:r>
+            <a:r>
+              <a:rPr sz="1050" b="0" dirty="0">
+                <a:solidFill>
+                  <a:srgbClr val="101827"/>
+                </a:solidFill>
+              </a:rPr>
+              <a:t> </a:t>
+            </a:r>
+            <a:r>
+              <a:rPr sz="1050" b="0" dirty="0" err="1">
+                <a:solidFill>
+                  <a:srgbClr val="101827"/>
+                </a:solidFill>
+              </a:rPr>
+              <a:t>nâng</a:t>
+            </a:r>
+            <a:r>
+              <a:rPr sz="1050" b="0" dirty="0">
+                <a:solidFill>
+                  <a:srgbClr val="101827"/>
+                </a:solidFill>
+              </a:rPr>
+              <a:t> </a:t>
+            </a:r>
+            <a:r>
+              <a:rPr sz="1050" b="0" dirty="0" err="1">
+                <a:solidFill>
+                  <a:srgbClr val="101827"/>
+                </a:solidFill>
+              </a:rPr>
+              <a:t>khi</a:t>
+            </a:r>
+            <a:r>
+              <a:rPr sz="1050" b="0" dirty="0">
+                <a:solidFill>
+                  <a:srgbClr val="101827"/>
+                </a:solidFill>
+              </a:rPr>
+              <a:t> task </a:t>
+            </a:r>
+            <a:r>
+              <a:rPr sz="1050" b="0" dirty="0" err="1">
+                <a:solidFill>
+                  <a:srgbClr val="101827"/>
+                </a:solidFill>
+              </a:rPr>
+              <a:t>thực</a:t>
+            </a:r>
+            <a:r>
+              <a:rPr sz="1050" b="0" dirty="0">
+                <a:solidFill>
+                  <a:srgbClr val="101827"/>
+                </a:solidFill>
+              </a:rPr>
+              <a:t> </a:t>
+            </a:r>
+            <a:r>
+              <a:rPr sz="1050" b="0" dirty="0" err="1">
+                <a:solidFill>
+                  <a:srgbClr val="101827"/>
+                </a:solidFill>
+              </a:rPr>
+              <a:t>sự</a:t>
+            </a:r>
+            <a:r>
+              <a:rPr sz="1050" b="0" dirty="0">
+                <a:solidFill>
+                  <a:srgbClr val="101827"/>
+                </a:solidFill>
+              </a:rPr>
+              <a:t> </a:t>
+            </a:r>
+            <a:r>
+              <a:rPr sz="1050" b="0" dirty="0" err="1">
+                <a:solidFill>
+                  <a:srgbClr val="101827"/>
+                </a:solidFill>
+              </a:rPr>
+              <a:t>cần</a:t>
+            </a:r>
+            <a:r>
+              <a:rPr sz="1050" b="0" dirty="0">
+                <a:solidFill>
+                  <a:srgbClr val="101827"/>
+                </a:solidFill>
+              </a:rPr>
+              <a:t> </a:t>
+            </a:r>
+            <a:r>
+              <a:rPr sz="1050" b="0" dirty="0" err="1">
+                <a:solidFill>
+                  <a:srgbClr val="101827"/>
+                </a:solidFill>
+              </a:rPr>
+              <a:t>suy</a:t>
+            </a:r>
+            <a:r>
+              <a:rPr sz="1050" b="0" dirty="0">
+                <a:solidFill>
+                  <a:srgbClr val="101827"/>
+                </a:solidFill>
+              </a:rPr>
+              <a:t> </a:t>
+            </a:r>
+            <a:r>
+              <a:rPr sz="1050" b="0" dirty="0" err="1">
+                <a:solidFill>
+                  <a:srgbClr val="101827"/>
+                </a:solidFill>
+              </a:rPr>
+              <a:t>luận</a:t>
+            </a:r>
+            <a:r>
+              <a:rPr sz="1050" b="0" dirty="0">
+                <a:solidFill>
+                  <a:srgbClr val="101827"/>
+                </a:solidFill>
+              </a:rPr>
+              <a:t> </a:t>
+            </a:r>
+            <a:r>
+              <a:rPr sz="1050" b="0" dirty="0" err="1">
+                <a:solidFill>
+                  <a:srgbClr val="101827"/>
+                </a:solidFill>
+              </a:rPr>
+              <a:t>sâu</a:t>
+            </a:r>
+            <a:endParaRPr sz="1050" b="0" dirty="0">
+              <a:solidFill>
+                <a:srgbClr val="101827"/>
+              </a:solidFill>
+            </a:endParaRPr>
           </a:p>
         </p:txBody>
       </p:sp>
@@ -26553,6 +28782,13 @@
             </a:solidFill>
           </a:ln>
         </p:spPr>
+        <p:txBody>
+          <a:bodyPr/>
+          <a:lstStyle/>
+          <a:p>
+            <a:endParaRPr lang="en-US"/>
+          </a:p>
+        </p:txBody>
       </p:sp>
       <p:sp>
         <p:nvSpPr>
@@ -26636,6 +28872,13 @@
             </a:solidFill>
           </a:ln>
         </p:spPr>
+        <p:txBody>
+          <a:bodyPr/>
+          <a:lstStyle/>
+          <a:p>
+            <a:endParaRPr lang="en-US"/>
+          </a:p>
+        </p:txBody>
       </p:sp>
       <p:sp>
         <p:nvSpPr>
@@ -26678,12 +28921,12 @@
               </a:defRPr>
             </a:pPr>
             <a:r>
-              <a:rPr sz="1125" b="0">
-                <a:solidFill>
-                  <a:srgbClr val="101827"/>
-                </a:solidFill>
-              </a:rPr>
-              <a:t>Output verbosity</a:t>
+              <a:rPr lang="en-US" sz="1125" dirty="0">
+                <a:solidFill>
+                  <a:srgbClr val="101827"/>
+                </a:solidFill>
+              </a:rPr>
+              <a:t>Model routing</a:t>
             </a:r>
           </a:p>
         </p:txBody>
@@ -26719,6 +28962,13 @@
             </a:solidFill>
           </a:ln>
         </p:spPr>
+        <p:txBody>
+          <a:bodyPr/>
+          <a:lstStyle/>
+          <a:p>
+            <a:endParaRPr lang="en-US"/>
+          </a:p>
+        </p:txBody>
       </p:sp>
       <p:sp>
         <p:nvSpPr>
@@ -26749,25 +28999,252 @@
           </a:bodyPr>
           <a:lstStyle/>
           <a:p>
-            <a:pPr algn="ctr">
-              <a:lnSpc>
-                <a:spcPct val="100000"/>
-              </a:lnSpc>
+            <a:pPr marL="0" algn="ctr" rtl="0" eaLnBrk="1" latinLnBrk="0" hangingPunct="1">
               <a:buNone/>
-              <a:defRPr sz="1350" b="0">
-                <a:solidFill>
-                  <a:srgbClr val="101827"/>
-                </a:solidFill>
-              </a:defRPr>
             </a:pPr>
             <a:r>
-              <a:rPr sz="1050" b="0">
-                <a:solidFill>
-                  <a:srgbClr val="101827"/>
-                </a:solidFill>
-              </a:rPr>
-              <a:t>Chọn output ngắn hoặc concise nếu harness/model hỗ trợ</a:t>
-            </a:r>
+              <a:rPr lang="en-US" sz="1050" b="0" kern="1200" dirty="0" err="1">
+                <a:solidFill>
+                  <a:srgbClr val="101827"/>
+                </a:solidFill>
+                <a:effectLst/>
+                <a:latin typeface="Calibri" panose="020F0502020204030204" pitchFamily="34" charset="0"/>
+                <a:ea typeface="Calibri" panose="020F0502020204030204" pitchFamily="34" charset="0"/>
+                <a:cs typeface="Calibri" panose="020F0502020204030204" pitchFamily="34" charset="0"/>
+              </a:rPr>
+              <a:t>Chọn</a:t>
+            </a:r>
+            <a:r>
+              <a:rPr lang="en-US" sz="1050" b="0" kern="1200" dirty="0">
+                <a:solidFill>
+                  <a:srgbClr val="101827"/>
+                </a:solidFill>
+                <a:effectLst/>
+                <a:latin typeface="Calibri" panose="020F0502020204030204" pitchFamily="34" charset="0"/>
+                <a:ea typeface="Calibri" panose="020F0502020204030204" pitchFamily="34" charset="0"/>
+                <a:cs typeface="Calibri" panose="020F0502020204030204" pitchFamily="34" charset="0"/>
+              </a:rPr>
+              <a:t> model </a:t>
+            </a:r>
+            <a:r>
+              <a:rPr lang="en-US" sz="1050" b="0" kern="1200" dirty="0" err="1">
+                <a:solidFill>
+                  <a:srgbClr val="101827"/>
+                </a:solidFill>
+                <a:effectLst/>
+                <a:latin typeface="Calibri" panose="020F0502020204030204" pitchFamily="34" charset="0"/>
+                <a:ea typeface="Calibri" panose="020F0502020204030204" pitchFamily="34" charset="0"/>
+                <a:cs typeface="Calibri" panose="020F0502020204030204" pitchFamily="34" charset="0"/>
+              </a:rPr>
+              <a:t>phù</a:t>
+            </a:r>
+            <a:r>
+              <a:rPr lang="en-US" sz="1050" b="0" kern="1200" dirty="0">
+                <a:solidFill>
+                  <a:srgbClr val="101827"/>
+                </a:solidFill>
+                <a:effectLst/>
+                <a:latin typeface="Calibri" panose="020F0502020204030204" pitchFamily="34" charset="0"/>
+                <a:ea typeface="Calibri" panose="020F0502020204030204" pitchFamily="34" charset="0"/>
+                <a:cs typeface="Calibri" panose="020F0502020204030204" pitchFamily="34" charset="0"/>
+              </a:rPr>
+              <a:t> </a:t>
+            </a:r>
+            <a:r>
+              <a:rPr lang="en-US" sz="1050" b="0" kern="1200" dirty="0" err="1">
+                <a:solidFill>
+                  <a:srgbClr val="101827"/>
+                </a:solidFill>
+                <a:effectLst/>
+                <a:latin typeface="Calibri" panose="020F0502020204030204" pitchFamily="34" charset="0"/>
+                <a:ea typeface="Calibri" panose="020F0502020204030204" pitchFamily="34" charset="0"/>
+                <a:cs typeface="Calibri" panose="020F0502020204030204" pitchFamily="34" charset="0"/>
+              </a:rPr>
+              <a:t>hợp</a:t>
+            </a:r>
+            <a:r>
+              <a:rPr lang="en-US" sz="1050" b="0" kern="1200" dirty="0">
+                <a:solidFill>
+                  <a:srgbClr val="101827"/>
+                </a:solidFill>
+                <a:effectLst/>
+                <a:latin typeface="Calibri" panose="020F0502020204030204" pitchFamily="34" charset="0"/>
+                <a:ea typeface="Calibri" panose="020F0502020204030204" pitchFamily="34" charset="0"/>
+                <a:cs typeface="Calibri" panose="020F0502020204030204" pitchFamily="34" charset="0"/>
+              </a:rPr>
+              <a:t> </a:t>
+            </a:r>
+            <a:r>
+              <a:rPr lang="en-US" sz="1050" b="0" kern="1200" dirty="0" err="1">
+                <a:solidFill>
+                  <a:srgbClr val="101827"/>
+                </a:solidFill>
+                <a:effectLst/>
+                <a:latin typeface="Calibri" panose="020F0502020204030204" pitchFamily="34" charset="0"/>
+                <a:ea typeface="Calibri" panose="020F0502020204030204" pitchFamily="34" charset="0"/>
+                <a:cs typeface="Calibri" panose="020F0502020204030204" pitchFamily="34" charset="0"/>
+              </a:rPr>
+              <a:t>ngay</a:t>
+            </a:r>
+            <a:r>
+              <a:rPr lang="en-US" sz="1050" b="0" kern="1200" dirty="0">
+                <a:solidFill>
+                  <a:srgbClr val="101827"/>
+                </a:solidFill>
+                <a:effectLst/>
+                <a:latin typeface="Calibri" panose="020F0502020204030204" pitchFamily="34" charset="0"/>
+                <a:ea typeface="Calibri" panose="020F0502020204030204" pitchFamily="34" charset="0"/>
+                <a:cs typeface="Calibri" panose="020F0502020204030204" pitchFamily="34" charset="0"/>
+              </a:rPr>
+              <a:t> </a:t>
+            </a:r>
+            <a:r>
+              <a:rPr lang="en-US" sz="1050" b="0" kern="1200" dirty="0" err="1">
+                <a:solidFill>
+                  <a:srgbClr val="101827"/>
+                </a:solidFill>
+                <a:effectLst/>
+                <a:latin typeface="Calibri" panose="020F0502020204030204" pitchFamily="34" charset="0"/>
+                <a:ea typeface="Calibri" panose="020F0502020204030204" pitchFamily="34" charset="0"/>
+                <a:cs typeface="Calibri" panose="020F0502020204030204" pitchFamily="34" charset="0"/>
+              </a:rPr>
+              <a:t>từ</a:t>
+            </a:r>
+            <a:r>
+              <a:rPr lang="en-US" sz="1050" b="0" kern="1200" dirty="0">
+                <a:solidFill>
+                  <a:srgbClr val="101827"/>
+                </a:solidFill>
+                <a:effectLst/>
+                <a:latin typeface="Calibri" panose="020F0502020204030204" pitchFamily="34" charset="0"/>
+                <a:ea typeface="Calibri" panose="020F0502020204030204" pitchFamily="34" charset="0"/>
+                <a:cs typeface="Calibri" panose="020F0502020204030204" pitchFamily="34" charset="0"/>
+              </a:rPr>
+              <a:t> </a:t>
+            </a:r>
+            <a:r>
+              <a:rPr lang="en-US" sz="1050" b="0" kern="1200" dirty="0" err="1">
+                <a:solidFill>
+                  <a:srgbClr val="101827"/>
+                </a:solidFill>
+                <a:effectLst/>
+                <a:latin typeface="Calibri" panose="020F0502020204030204" pitchFamily="34" charset="0"/>
+                <a:ea typeface="Calibri" panose="020F0502020204030204" pitchFamily="34" charset="0"/>
+                <a:cs typeface="Calibri" panose="020F0502020204030204" pitchFamily="34" charset="0"/>
+              </a:rPr>
+              <a:t>đầu</a:t>
+            </a:r>
+            <a:r>
+              <a:rPr lang="en-US" sz="1050" b="0" kern="1200" dirty="0">
+                <a:solidFill>
+                  <a:srgbClr val="101827"/>
+                </a:solidFill>
+                <a:effectLst/>
+                <a:latin typeface="Calibri" panose="020F0502020204030204" pitchFamily="34" charset="0"/>
+                <a:ea typeface="Calibri" panose="020F0502020204030204" pitchFamily="34" charset="0"/>
+                <a:cs typeface="Calibri" panose="020F0502020204030204" pitchFamily="34" charset="0"/>
+              </a:rPr>
+              <a:t> </a:t>
+            </a:r>
+            <a:r>
+              <a:rPr lang="en-US" sz="1050" b="0" kern="1200" dirty="0" err="1">
+                <a:solidFill>
+                  <a:srgbClr val="101827"/>
+                </a:solidFill>
+                <a:effectLst/>
+                <a:latin typeface="Calibri" panose="020F0502020204030204" pitchFamily="34" charset="0"/>
+                <a:ea typeface="Calibri" panose="020F0502020204030204" pitchFamily="34" charset="0"/>
+                <a:cs typeface="Calibri" panose="020F0502020204030204" pitchFamily="34" charset="0"/>
+              </a:rPr>
+              <a:t>phiên</a:t>
+            </a:r>
+            <a:r>
+              <a:rPr lang="en-US" sz="1050" b="0" kern="1200" dirty="0">
+                <a:solidFill>
+                  <a:srgbClr val="101827"/>
+                </a:solidFill>
+                <a:effectLst/>
+                <a:latin typeface="Calibri" panose="020F0502020204030204" pitchFamily="34" charset="0"/>
+                <a:ea typeface="Calibri" panose="020F0502020204030204" pitchFamily="34" charset="0"/>
+                <a:cs typeface="Calibri" panose="020F0502020204030204" pitchFamily="34" charset="0"/>
+              </a:rPr>
+              <a:t>; </a:t>
+            </a:r>
+            <a:r>
+              <a:rPr lang="en-US" sz="1050" b="0" kern="1200" dirty="0" err="1">
+                <a:solidFill>
+                  <a:srgbClr val="101827"/>
+                </a:solidFill>
+                <a:effectLst/>
+                <a:latin typeface="Calibri" panose="020F0502020204030204" pitchFamily="34" charset="0"/>
+                <a:ea typeface="Calibri" panose="020F0502020204030204" pitchFamily="34" charset="0"/>
+                <a:cs typeface="Calibri" panose="020F0502020204030204" pitchFamily="34" charset="0"/>
+              </a:rPr>
+              <a:t>tránh</a:t>
+            </a:r>
+            <a:r>
+              <a:rPr lang="en-US" sz="1050" b="0" kern="1200" dirty="0">
+                <a:solidFill>
+                  <a:srgbClr val="101827"/>
+                </a:solidFill>
+                <a:effectLst/>
+                <a:latin typeface="Calibri" panose="020F0502020204030204" pitchFamily="34" charset="0"/>
+                <a:ea typeface="Calibri" panose="020F0502020204030204" pitchFamily="34" charset="0"/>
+                <a:cs typeface="Calibri" panose="020F0502020204030204" pitchFamily="34" charset="0"/>
+              </a:rPr>
+              <a:t> </a:t>
+            </a:r>
+            <a:r>
+              <a:rPr lang="en-US" sz="1050" b="0" kern="1200" dirty="0" err="1">
+                <a:solidFill>
+                  <a:srgbClr val="101827"/>
+                </a:solidFill>
+                <a:effectLst/>
+                <a:latin typeface="Calibri" panose="020F0502020204030204" pitchFamily="34" charset="0"/>
+                <a:ea typeface="Calibri" panose="020F0502020204030204" pitchFamily="34" charset="0"/>
+                <a:cs typeface="Calibri" panose="020F0502020204030204" pitchFamily="34" charset="0"/>
+              </a:rPr>
+              <a:t>đổi</a:t>
+            </a:r>
+            <a:r>
+              <a:rPr lang="en-US" sz="1050" b="0" kern="1200" dirty="0">
+                <a:solidFill>
+                  <a:srgbClr val="101827"/>
+                </a:solidFill>
+                <a:effectLst/>
+                <a:latin typeface="Calibri" panose="020F0502020204030204" pitchFamily="34" charset="0"/>
+                <a:ea typeface="Calibri" panose="020F0502020204030204" pitchFamily="34" charset="0"/>
+                <a:cs typeface="Calibri" panose="020F0502020204030204" pitchFamily="34" charset="0"/>
+              </a:rPr>
+              <a:t> model </a:t>
+            </a:r>
+            <a:r>
+              <a:rPr lang="en-US" sz="1050" b="0" kern="1200" dirty="0" err="1">
+                <a:solidFill>
+                  <a:srgbClr val="101827"/>
+                </a:solidFill>
+                <a:effectLst/>
+                <a:latin typeface="Calibri" panose="020F0502020204030204" pitchFamily="34" charset="0"/>
+                <a:ea typeface="Calibri" panose="020F0502020204030204" pitchFamily="34" charset="0"/>
+                <a:cs typeface="Calibri" panose="020F0502020204030204" pitchFamily="34" charset="0"/>
+              </a:rPr>
+              <a:t>giữa</a:t>
+            </a:r>
+            <a:r>
+              <a:rPr lang="en-US" sz="1050" b="0" kern="1200" dirty="0">
+                <a:solidFill>
+                  <a:srgbClr val="101827"/>
+                </a:solidFill>
+                <a:effectLst/>
+                <a:latin typeface="Calibri" panose="020F0502020204030204" pitchFamily="34" charset="0"/>
+                <a:ea typeface="Calibri" panose="020F0502020204030204" pitchFamily="34" charset="0"/>
+                <a:cs typeface="Calibri" panose="020F0502020204030204" pitchFamily="34" charset="0"/>
+              </a:rPr>
+              <a:t> task</a:t>
+            </a:r>
+            <a:endParaRPr lang="en-US" sz="1200" dirty="0">
+              <a:effectLst/>
+            </a:endParaRPr>
           </a:p>
         </p:txBody>
       </p:sp>
@@ -26802,6 +29279,13 @@
             </a:solidFill>
           </a:ln>
         </p:spPr>
+        <p:txBody>
+          <a:bodyPr/>
+          <a:lstStyle/>
+          <a:p>
+            <a:endParaRPr lang="en-US"/>
+          </a:p>
+        </p:txBody>
       </p:sp>
       <p:sp>
         <p:nvSpPr>
@@ -26885,6 +29369,13 @@
             </a:solidFill>
           </a:ln>
         </p:spPr>
+        <p:txBody>
+          <a:bodyPr/>
+          <a:lstStyle/>
+          <a:p>
+            <a:endParaRPr lang="en-US"/>
+          </a:p>
+        </p:txBody>
       </p:sp>
       <p:sp>
         <p:nvSpPr>
@@ -26927,13 +29418,42 @@
               </a:defRPr>
             </a:pPr>
             <a:r>
-              <a:rPr sz="1125" b="0">
-                <a:solidFill>
-                  <a:srgbClr val="101827"/>
-                </a:solidFill>
-              </a:rPr>
-              <a:t>Tool và MCP đang bật</a:t>
-            </a:r>
+              <a:rPr sz="1125" b="0" dirty="0">
+                <a:solidFill>
+                  <a:srgbClr val="101827"/>
+                </a:solidFill>
+              </a:rPr>
+              <a:t>Tool và MCP </a:t>
+            </a:r>
+            <a:r>
+              <a:rPr sz="1125" b="0" dirty="0" err="1">
+                <a:solidFill>
+                  <a:srgbClr val="101827"/>
+                </a:solidFill>
+              </a:rPr>
+              <a:t>đang</a:t>
+            </a:r>
+            <a:r>
+              <a:rPr sz="1125" b="0" dirty="0">
+                <a:solidFill>
+                  <a:srgbClr val="101827"/>
+                </a:solidFill>
+              </a:rPr>
+              <a:t> </a:t>
+            </a:r>
+            <a:r>
+              <a:rPr sz="1125" b="0" dirty="0" err="1">
+                <a:solidFill>
+                  <a:srgbClr val="101827"/>
+                </a:solidFill>
+              </a:rPr>
+              <a:t>bật</a:t>
+            </a:r>
+            <a:endParaRPr sz="1125" b="0" dirty="0">
+              <a:solidFill>
+                <a:srgbClr val="101827"/>
+              </a:solidFill>
+            </a:endParaRPr>
           </a:p>
         </p:txBody>
       </p:sp>
@@ -26968,6 +29488,13 @@
             </a:solidFill>
           </a:ln>
         </p:spPr>
+        <p:txBody>
+          <a:bodyPr/>
+          <a:lstStyle/>
+          <a:p>
+            <a:endParaRPr lang="en-US"/>
+          </a:p>
+        </p:txBody>
       </p:sp>
       <p:sp>
         <p:nvSpPr>
@@ -27051,6 +29578,13 @@
             </a:solidFill>
           </a:ln>
         </p:spPr>
+        <p:txBody>
+          <a:bodyPr/>
+          <a:lstStyle/>
+          <a:p>
+            <a:endParaRPr lang="en-US"/>
+          </a:p>
+        </p:txBody>
       </p:sp>
       <p:sp>
         <p:nvSpPr>
@@ -27134,6 +29668,13 @@
             </a:solidFill>
           </a:ln>
         </p:spPr>
+        <p:txBody>
+          <a:bodyPr/>
+          <a:lstStyle/>
+          <a:p>
+            <a:endParaRPr lang="en-US"/>
+          </a:p>
+        </p:txBody>
       </p:sp>
       <p:sp>
         <p:nvSpPr>
@@ -27164,25 +29705,24 @@
           </a:bodyPr>
           <a:lstStyle/>
           <a:p>
-            <a:pPr algn="ctr">
-              <a:lnSpc>
-                <a:spcPct val="100000"/>
-              </a:lnSpc>
+            <a:pPr marL="0" algn="ctr" rtl="0" eaLnBrk="1" latinLnBrk="0" hangingPunct="1">
               <a:buNone/>
-              <a:defRPr sz="1350" b="0">
-                <a:solidFill>
-                  <a:srgbClr val="101827"/>
-                </a:solidFill>
-              </a:defRPr>
             </a:pPr>
             <a:r>
-              <a:rPr sz="1125" b="0">
-                <a:solidFill>
-                  <a:srgbClr val="101827"/>
-                </a:solidFill>
-              </a:rPr>
-              <a:t>Model routing</a:t>
-            </a:r>
+              <a:rPr lang="en-US" sz="1100" b="0" kern="1200" dirty="0">
+                <a:solidFill>
+                  <a:srgbClr val="101827"/>
+                </a:solidFill>
+                <a:effectLst/>
+                <a:latin typeface="Calibri" panose="020F0502020204030204" pitchFamily="34" charset="0"/>
+                <a:ea typeface="Calibri" panose="020F0502020204030204" pitchFamily="34" charset="0"/>
+                <a:cs typeface="Calibri" panose="020F0502020204030204" pitchFamily="34" charset="0"/>
+              </a:rPr>
+              <a:t>Output verbosity</a:t>
+            </a:r>
+            <a:endParaRPr lang="en-US" sz="1600" dirty="0">
+              <a:effectLst/>
+            </a:endParaRPr>
           </a:p>
         </p:txBody>
       </p:sp>
@@ -27217,6 +29757,13 @@
             </a:solidFill>
           </a:ln>
         </p:spPr>
+        <p:txBody>
+          <a:bodyPr/>
+          <a:lstStyle/>
+          <a:p>
+            <a:endParaRPr lang="en-US"/>
+          </a:p>
+        </p:txBody>
       </p:sp>
       <p:sp>
         <p:nvSpPr>
@@ -27247,25 +29794,144 @@
           </a:bodyPr>
           <a:lstStyle/>
           <a:p>
-            <a:pPr algn="ctr">
-              <a:lnSpc>
-                <a:spcPct val="100000"/>
-              </a:lnSpc>
+            <a:pPr marL="0" algn="ctr" rtl="0" eaLnBrk="1" latinLnBrk="0" hangingPunct="1">
               <a:buNone/>
-              <a:defRPr sz="1350" b="0">
-                <a:solidFill>
-                  <a:srgbClr val="101827"/>
-                </a:solidFill>
-              </a:defRPr>
             </a:pPr>
             <a:r>
-              <a:rPr sz="1050" b="0">
-                <a:solidFill>
-                  <a:srgbClr val="101827"/>
-                </a:solidFill>
-              </a:rPr>
-              <a:t>Chọn model phù hợp ngay từ đầu phiên; tránh đổi model giữa task</a:t>
-            </a:r>
+              <a:rPr lang="en-US" sz="1050" b="0" kern="1200" dirty="0" err="1">
+                <a:solidFill>
+                  <a:srgbClr val="101827"/>
+                </a:solidFill>
+                <a:effectLst/>
+                <a:latin typeface="Calibri" panose="020F0502020204030204" pitchFamily="34" charset="0"/>
+                <a:ea typeface="Calibri" panose="020F0502020204030204" pitchFamily="34" charset="0"/>
+                <a:cs typeface="Calibri" panose="020F0502020204030204" pitchFamily="34" charset="0"/>
+              </a:rPr>
+              <a:t>Chọn</a:t>
+            </a:r>
+            <a:r>
+              <a:rPr lang="en-US" sz="1050" b="0" kern="1200" dirty="0">
+                <a:solidFill>
+                  <a:srgbClr val="101827"/>
+                </a:solidFill>
+                <a:effectLst/>
+                <a:latin typeface="Calibri" panose="020F0502020204030204" pitchFamily="34" charset="0"/>
+                <a:ea typeface="Calibri" panose="020F0502020204030204" pitchFamily="34" charset="0"/>
+                <a:cs typeface="Calibri" panose="020F0502020204030204" pitchFamily="34" charset="0"/>
+              </a:rPr>
+              <a:t> output </a:t>
+            </a:r>
+            <a:r>
+              <a:rPr lang="en-US" sz="1050" b="0" kern="1200" dirty="0" err="1">
+                <a:solidFill>
+                  <a:srgbClr val="101827"/>
+                </a:solidFill>
+                <a:effectLst/>
+                <a:latin typeface="Calibri" panose="020F0502020204030204" pitchFamily="34" charset="0"/>
+                <a:ea typeface="Calibri" panose="020F0502020204030204" pitchFamily="34" charset="0"/>
+                <a:cs typeface="Calibri" panose="020F0502020204030204" pitchFamily="34" charset="0"/>
+              </a:rPr>
+              <a:t>ngắn</a:t>
+            </a:r>
+            <a:r>
+              <a:rPr lang="en-US" sz="1050" b="0" kern="1200" dirty="0">
+                <a:solidFill>
+                  <a:srgbClr val="101827"/>
+                </a:solidFill>
+                <a:effectLst/>
+                <a:latin typeface="Calibri" panose="020F0502020204030204" pitchFamily="34" charset="0"/>
+                <a:ea typeface="Calibri" panose="020F0502020204030204" pitchFamily="34" charset="0"/>
+                <a:cs typeface="Calibri" panose="020F0502020204030204" pitchFamily="34" charset="0"/>
+              </a:rPr>
+              <a:t> </a:t>
+            </a:r>
+            <a:r>
+              <a:rPr lang="en-US" sz="1050" b="0" kern="1200" dirty="0" err="1">
+                <a:solidFill>
+                  <a:srgbClr val="101827"/>
+                </a:solidFill>
+                <a:effectLst/>
+                <a:latin typeface="Calibri" panose="020F0502020204030204" pitchFamily="34" charset="0"/>
+                <a:ea typeface="Calibri" panose="020F0502020204030204" pitchFamily="34" charset="0"/>
+                <a:cs typeface="Calibri" panose="020F0502020204030204" pitchFamily="34" charset="0"/>
+              </a:rPr>
+              <a:t>hoặc</a:t>
+            </a:r>
+            <a:r>
+              <a:rPr lang="en-US" sz="1050" b="0" kern="1200" dirty="0">
+                <a:solidFill>
+                  <a:srgbClr val="101827"/>
+                </a:solidFill>
+                <a:effectLst/>
+                <a:latin typeface="Calibri" panose="020F0502020204030204" pitchFamily="34" charset="0"/>
+                <a:ea typeface="Calibri" panose="020F0502020204030204" pitchFamily="34" charset="0"/>
+                <a:cs typeface="Calibri" panose="020F0502020204030204" pitchFamily="34" charset="0"/>
+              </a:rPr>
+              <a:t> concise </a:t>
+            </a:r>
+            <a:r>
+              <a:rPr lang="en-US" sz="1050" b="0" kern="1200" dirty="0" err="1">
+                <a:solidFill>
+                  <a:srgbClr val="101827"/>
+                </a:solidFill>
+                <a:effectLst/>
+                <a:latin typeface="Calibri" panose="020F0502020204030204" pitchFamily="34" charset="0"/>
+                <a:ea typeface="Calibri" panose="020F0502020204030204" pitchFamily="34" charset="0"/>
+                <a:cs typeface="Calibri" panose="020F0502020204030204" pitchFamily="34" charset="0"/>
+              </a:rPr>
+              <a:t>nếu</a:t>
+            </a:r>
+            <a:r>
+              <a:rPr lang="en-US" sz="1050" b="0" kern="1200" dirty="0">
+                <a:solidFill>
+                  <a:srgbClr val="101827"/>
+                </a:solidFill>
+                <a:effectLst/>
+                <a:latin typeface="Calibri" panose="020F0502020204030204" pitchFamily="34" charset="0"/>
+                <a:ea typeface="Calibri" panose="020F0502020204030204" pitchFamily="34" charset="0"/>
+                <a:cs typeface="Calibri" panose="020F0502020204030204" pitchFamily="34" charset="0"/>
+              </a:rPr>
+              <a:t> harness/model </a:t>
+            </a:r>
+            <a:r>
+              <a:rPr lang="en-US" sz="1050" b="0" kern="1200" dirty="0" err="1">
+                <a:solidFill>
+                  <a:srgbClr val="101827"/>
+                </a:solidFill>
+                <a:effectLst/>
+                <a:latin typeface="Calibri" panose="020F0502020204030204" pitchFamily="34" charset="0"/>
+                <a:ea typeface="Calibri" panose="020F0502020204030204" pitchFamily="34" charset="0"/>
+                <a:cs typeface="Calibri" panose="020F0502020204030204" pitchFamily="34" charset="0"/>
+              </a:rPr>
+              <a:t>hỗ</a:t>
+            </a:r>
+            <a:r>
+              <a:rPr lang="en-US" sz="1050" b="0" kern="1200" dirty="0">
+                <a:solidFill>
+                  <a:srgbClr val="101827"/>
+                </a:solidFill>
+                <a:effectLst/>
+                <a:latin typeface="Calibri" panose="020F0502020204030204" pitchFamily="34" charset="0"/>
+                <a:ea typeface="Calibri" panose="020F0502020204030204" pitchFamily="34" charset="0"/>
+                <a:cs typeface="Calibri" panose="020F0502020204030204" pitchFamily="34" charset="0"/>
+              </a:rPr>
+              <a:t> </a:t>
+            </a:r>
+            <a:r>
+              <a:rPr lang="en-US" sz="1050" b="0" kern="1200" dirty="0" err="1">
+                <a:solidFill>
+                  <a:srgbClr val="101827"/>
+                </a:solidFill>
+                <a:effectLst/>
+                <a:latin typeface="Calibri" panose="020F0502020204030204" pitchFamily="34" charset="0"/>
+                <a:ea typeface="Calibri" panose="020F0502020204030204" pitchFamily="34" charset="0"/>
+                <a:cs typeface="Calibri" panose="020F0502020204030204" pitchFamily="34" charset="0"/>
+              </a:rPr>
+              <a:t>trợ</a:t>
+            </a:r>
+            <a:endParaRPr lang="en-US" sz="1200" dirty="0">
+              <a:effectLst/>
+            </a:endParaRPr>
           </a:p>
         </p:txBody>
       </p:sp>
@@ -27285,7 +29951,7 @@
         </p:nvSpPr>
         <p:spPr>
           <a:xfrm>
-            <a:off x="495300" y="5143500"/>
+            <a:off x="476250" y="5143500"/>
             <a:ext cx="11201400" cy="800100"/>
           </a:xfrm>
           <a:prstGeom prst="roundRect">
@@ -27302,6 +29968,13 @@
             </a:solidFill>
           </a:ln>
         </p:spPr>
+        <p:txBody>
+          <a:bodyPr/>
+          <a:lstStyle/>
+          <a:p>
+            <a:endParaRPr lang="en-US"/>
+          </a:p>
+        </p:txBody>
       </p:sp>
       <p:sp>
         <p:nvSpPr>
@@ -27344,12 +30017,236 @@
               </a:defRPr>
             </a:pPr>
             <a:r>
-              <a:rPr sz="1200" b="1">
+              <a:rPr sz="1200" b="1" dirty="0">
                 <a:solidFill>
                   <a:srgbClr val="0E9AA7"/>
                 </a:solidFill>
               </a:rPr>
-              <a:t>Instruction files: Giữ CLAUDE.md, AGENTS.md và rules file ngắn; loại bỏ nội dung trùng lặp và dẫn tới tài liệu chi tiết thay vì nhúng toàn bộ.</a:t>
+              <a:t>Instruction files: </a:t>
+            </a:r>
+            <a:r>
+              <a:rPr sz="1200" b="1" dirty="0" err="1">
+                <a:solidFill>
+                  <a:srgbClr val="0E9AA7"/>
+                </a:solidFill>
+              </a:rPr>
+              <a:t>Giữ</a:t>
+            </a:r>
+            <a:r>
+              <a:rPr sz="1200" b="1" dirty="0">
+                <a:solidFill>
+                  <a:srgbClr val="0E9AA7"/>
+                </a:solidFill>
+              </a:rPr>
+              <a:t> CLAUDE.md, AGENTS.md và rules file </a:t>
+            </a:r>
+            <a:r>
+              <a:rPr sz="1200" b="1" dirty="0" err="1">
+                <a:solidFill>
+                  <a:srgbClr val="0E9AA7"/>
+                </a:solidFill>
+              </a:rPr>
+              <a:t>ngắn</a:t>
+            </a:r>
+            <a:r>
+              <a:rPr sz="1200" b="1" dirty="0">
+                <a:solidFill>
+                  <a:srgbClr val="0E9AA7"/>
+                </a:solidFill>
+              </a:rPr>
+              <a:t>; </a:t>
+            </a:r>
+            <a:r>
+              <a:rPr sz="1200" b="1" dirty="0" err="1">
+                <a:solidFill>
+                  <a:srgbClr val="0E9AA7"/>
+                </a:solidFill>
+              </a:rPr>
+              <a:t>loại</a:t>
+            </a:r>
+            <a:r>
+              <a:rPr sz="1200" b="1" dirty="0">
+                <a:solidFill>
+                  <a:srgbClr val="0E9AA7"/>
+                </a:solidFill>
+              </a:rPr>
+              <a:t> </a:t>
+            </a:r>
+            <a:r>
+              <a:rPr sz="1200" b="1" dirty="0" err="1">
+                <a:solidFill>
+                  <a:srgbClr val="0E9AA7"/>
+                </a:solidFill>
+              </a:rPr>
+              <a:t>bỏ</a:t>
+            </a:r>
+            <a:r>
+              <a:rPr sz="1200" b="1" dirty="0">
+                <a:solidFill>
+                  <a:srgbClr val="0E9AA7"/>
+                </a:solidFill>
+              </a:rPr>
+              <a:t> </a:t>
+            </a:r>
+            <a:r>
+              <a:rPr sz="1200" b="1" dirty="0" err="1">
+                <a:solidFill>
+                  <a:srgbClr val="0E9AA7"/>
+                </a:solidFill>
+              </a:rPr>
+              <a:t>nội</a:t>
+            </a:r>
+            <a:r>
+              <a:rPr sz="1200" b="1" dirty="0">
+                <a:solidFill>
+                  <a:srgbClr val="0E9AA7"/>
+                </a:solidFill>
+              </a:rPr>
+              <a:t> dung </a:t>
+            </a:r>
+            <a:r>
+              <a:rPr sz="1200" b="1" dirty="0" err="1">
+                <a:solidFill>
+                  <a:srgbClr val="0E9AA7"/>
+                </a:solidFill>
+              </a:rPr>
+              <a:t>trùng</a:t>
+            </a:r>
+            <a:r>
+              <a:rPr sz="1200" b="1" dirty="0">
+                <a:solidFill>
+                  <a:srgbClr val="0E9AA7"/>
+                </a:solidFill>
+              </a:rPr>
+              <a:t> </a:t>
+            </a:r>
+            <a:r>
+              <a:rPr sz="1200" b="1" dirty="0" err="1">
+                <a:solidFill>
+                  <a:srgbClr val="0E9AA7"/>
+                </a:solidFill>
+              </a:rPr>
+              <a:t>lặp</a:t>
+            </a:r>
+            <a:r>
+              <a:rPr lang="en-US" sz="1200" b="1" dirty="0">
+                <a:solidFill>
+                  <a:srgbClr val="0E9AA7"/>
+                </a:solidFill>
+              </a:rPr>
+              <a:t>; </a:t>
+            </a:r>
+            <a:r>
+              <a:rPr lang="en-US" sz="1200" b="1" dirty="0" err="1">
+                <a:solidFill>
+                  <a:srgbClr val="0E9AA7"/>
+                </a:solidFill>
+              </a:rPr>
+              <a:t>sử</a:t>
+            </a:r>
+            <a:r>
+              <a:rPr lang="en-US" sz="1200" b="1" dirty="0">
+                <a:solidFill>
+                  <a:srgbClr val="0E9AA7"/>
+                </a:solidFill>
+              </a:rPr>
+              <a:t> </a:t>
+            </a:r>
+            <a:r>
+              <a:rPr lang="en-US" sz="1200" b="1" dirty="0" err="1">
+                <a:solidFill>
+                  <a:srgbClr val="0E9AA7"/>
+                </a:solidFill>
+              </a:rPr>
+              <a:t>dụng</a:t>
+            </a:r>
+            <a:r>
+              <a:rPr lang="en-US" sz="1200" b="1" dirty="0">
+                <a:solidFill>
+                  <a:srgbClr val="0E9AA7"/>
+                </a:solidFill>
+              </a:rPr>
+              <a:t> </a:t>
+            </a:r>
+            <a:r>
+              <a:rPr lang="en-US" sz="1200" b="1" dirty="0" err="1">
+                <a:solidFill>
+                  <a:srgbClr val="0E9AA7"/>
+                </a:solidFill>
+              </a:rPr>
+              <a:t>đường</a:t>
+            </a:r>
+            <a:r>
+              <a:rPr lang="en-US" sz="1200" b="1" dirty="0">
+                <a:solidFill>
+                  <a:srgbClr val="0E9AA7"/>
+                </a:solidFill>
+              </a:rPr>
+              <a:t> </a:t>
+            </a:r>
+            <a:r>
+              <a:rPr lang="en-US" sz="1200" b="1" dirty="0" err="1">
+                <a:solidFill>
+                  <a:srgbClr val="0E9AA7"/>
+                </a:solidFill>
+              </a:rPr>
+              <a:t>dẫn</a:t>
+            </a:r>
+            <a:r>
+              <a:rPr lang="en-US" sz="1200" b="1" dirty="0">
+                <a:solidFill>
+                  <a:srgbClr val="0E9AA7"/>
+                </a:solidFill>
+              </a:rPr>
+              <a:t> </a:t>
+            </a:r>
+            <a:r>
+              <a:rPr lang="en-US" sz="1200" b="1" dirty="0" err="1">
+                <a:solidFill>
+                  <a:srgbClr val="0E9AA7"/>
+                </a:solidFill>
+              </a:rPr>
+              <a:t>tới</a:t>
+            </a:r>
+            <a:r>
+              <a:rPr lang="en-US" sz="1200" b="1" dirty="0">
+                <a:solidFill>
+                  <a:srgbClr val="0E9AA7"/>
+                </a:solidFill>
+              </a:rPr>
+              <a:t> tài </a:t>
+            </a:r>
+            <a:r>
+              <a:rPr lang="en-US" sz="1200" b="1" dirty="0" err="1">
+                <a:solidFill>
+                  <a:srgbClr val="0E9AA7"/>
+                </a:solidFill>
+              </a:rPr>
+              <a:t>liệu</a:t>
+            </a:r>
+            <a:r>
+              <a:rPr lang="en-US" sz="1200" b="1" dirty="0">
+                <a:solidFill>
+                  <a:srgbClr val="0E9AA7"/>
+                </a:solidFill>
+              </a:rPr>
+              <a:t> chi </a:t>
+            </a:r>
+            <a:r>
+              <a:rPr lang="en-US" sz="1200" b="1" dirty="0" err="1">
+                <a:solidFill>
+                  <a:srgbClr val="0E9AA7"/>
+                </a:solidFill>
+              </a:rPr>
+              <a:t>tiết</a:t>
+            </a:r>
+            <a:r>
+              <a:rPr sz="1200" b="1" dirty="0">
+                <a:solidFill>
+                  <a:srgbClr val="0E9AA7"/>
+                </a:solidFill>
+              </a:rPr>
+              <a:t>.</a:t>
             </a:r>
           </a:p>
         </p:txBody>
@@ -27382,6 +30279,13 @@
             </a:solidFill>
           </a:ln>
         </p:spPr>
+        <p:txBody>
+          <a:bodyPr/>
+          <a:lstStyle/>
+          <a:p>
+            <a:endParaRPr lang="en-US"/>
+          </a:p>
+        </p:txBody>
       </p:sp>
       <p:sp>
         <p:nvSpPr>
@@ -27475,13 +30379,34 @@
               </a:defRPr>
             </a:pPr>
             <a:r>
-              <a:rPr sz="900" b="0">
+              <a:rPr lang="en-US" sz="900" b="0" dirty="0">
                 <a:solidFill>
                   <a:srgbClr val="64748B"/>
                 </a:solidFill>
               </a:rPr>
-              <a:t>18 / 20</a:t>
-            </a:r>
+              <a:t>19</a:t>
+            </a:r>
+            <a:r>
+              <a:rPr sz="900" b="0" dirty="0">
+                <a:solidFill>
+                  <a:srgbClr val="64748B"/>
+                </a:solidFill>
+              </a:rPr>
+              <a:t> / </a:t>
+            </a:r>
+            <a:r>
+              <a:rPr lang="en-US" sz="900" b="0" dirty="0">
+                <a:solidFill>
+                  <a:srgbClr val="64748B"/>
+                </a:solidFill>
+              </a:rPr>
+              <a:t>21</a:t>
+            </a:r>
+            <a:endParaRPr sz="900" b="0" dirty="0">
+              <a:solidFill>
+                <a:srgbClr val="64748B"/>
+              </a:solidFill>
+            </a:endParaRPr>
           </a:p>
         </p:txBody>
       </p:sp>
@@ -27653,6 +30578,13 @@
             </a:solidFill>
           </a:ln>
         </p:spPr>
+        <p:txBody>
+          <a:bodyPr/>
+          <a:lstStyle/>
+          <a:p>
+            <a:endParaRPr lang="en-US"/>
+          </a:p>
+        </p:txBody>
       </p:sp>
       <p:sp>
         <p:nvSpPr>
@@ -27738,6 +30670,13 @@
             </a:solidFill>
           </a:ln>
         </p:spPr>
+        <p:txBody>
+          <a:bodyPr/>
+          <a:lstStyle/>
+          <a:p>
+            <a:endParaRPr lang="en-US"/>
+          </a:p>
+        </p:txBody>
       </p:sp>
       <p:sp>
         <p:nvSpPr>
@@ -27818,6 +30757,13 @@
             </a:solidFill>
           </a:ln>
         </p:spPr>
+        <p:txBody>
+          <a:bodyPr/>
+          <a:lstStyle/>
+          <a:p>
+            <a:endParaRPr lang="en-US"/>
+          </a:p>
+        </p:txBody>
       </p:sp>
       <p:sp>
         <p:nvSpPr>
@@ -27850,6 +30796,13 @@
             </a:solidFill>
           </a:ln>
         </p:spPr>
+        <p:txBody>
+          <a:bodyPr/>
+          <a:lstStyle/>
+          <a:p>
+            <a:endParaRPr lang="en-US"/>
+          </a:p>
+        </p:txBody>
       </p:sp>
       <p:sp>
         <p:nvSpPr>
@@ -27951,6 +30904,13 @@
             </a:solidFill>
           </a:ln>
         </p:spPr>
+        <p:txBody>
+          <a:bodyPr/>
+          <a:lstStyle/>
+          <a:p>
+            <a:endParaRPr lang="en-US"/>
+          </a:p>
+        </p:txBody>
       </p:sp>
       <p:sp>
         <p:nvSpPr>
@@ -27983,6 +30943,13 @@
             </a:solidFill>
           </a:ln>
         </p:spPr>
+        <p:txBody>
+          <a:bodyPr/>
+          <a:lstStyle/>
+          <a:p>
+            <a:endParaRPr lang="en-US"/>
+          </a:p>
+        </p:txBody>
       </p:sp>
       <p:sp>
         <p:nvSpPr>
@@ -28113,6 +31080,13 @@
             </a:solidFill>
           </a:ln>
         </p:spPr>
+        <p:txBody>
+          <a:bodyPr/>
+          <a:lstStyle/>
+          <a:p>
+            <a:endParaRPr lang="en-US"/>
+          </a:p>
+        </p:txBody>
       </p:sp>
       <p:sp>
         <p:nvSpPr>
@@ -28145,6 +31119,13 @@
             </a:solidFill>
           </a:ln>
         </p:spPr>
+        <p:txBody>
+          <a:bodyPr/>
+          <a:lstStyle/>
+          <a:p>
+            <a:endParaRPr lang="en-US"/>
+          </a:p>
+        </p:txBody>
       </p:sp>
       <p:sp>
         <p:nvSpPr>
@@ -28273,6 +31254,13 @@
             </a:solidFill>
           </a:ln>
         </p:spPr>
+        <p:txBody>
+          <a:bodyPr/>
+          <a:lstStyle/>
+          <a:p>
+            <a:endParaRPr lang="en-US"/>
+          </a:p>
+        </p:txBody>
       </p:sp>
       <p:sp>
         <p:nvSpPr>
@@ -28305,6 +31293,13 @@
             </a:solidFill>
           </a:ln>
         </p:spPr>
+        <p:txBody>
+          <a:bodyPr/>
+          <a:lstStyle/>
+          <a:p>
+            <a:endParaRPr lang="en-US"/>
+          </a:p>
+        </p:txBody>
       </p:sp>
       <p:sp>
         <p:nvSpPr>
@@ -28414,6 +31409,13 @@
             </a:solidFill>
           </a:ln>
         </p:spPr>
+        <p:txBody>
+          <a:bodyPr/>
+          <a:lstStyle/>
+          <a:p>
+            <a:endParaRPr lang="en-US"/>
+          </a:p>
+        </p:txBody>
       </p:sp>
       <p:sp>
         <p:nvSpPr>
@@ -28446,6 +31448,13 @@
             </a:solidFill>
           </a:ln>
         </p:spPr>
+        <p:txBody>
+          <a:bodyPr/>
+          <a:lstStyle/>
+          <a:p>
+            <a:endParaRPr lang="en-US"/>
+          </a:p>
+        </p:txBody>
       </p:sp>
       <p:sp>
         <p:nvSpPr>
@@ -28529,6 +31538,13 @@
             </a:solidFill>
           </a:ln>
         </p:spPr>
+        <p:txBody>
+          <a:bodyPr/>
+          <a:lstStyle/>
+          <a:p>
+            <a:endParaRPr lang="en-US"/>
+          </a:p>
+        </p:txBody>
       </p:sp>
       <p:sp>
         <p:nvSpPr>
@@ -28571,20 +31587,12 @@
               </a:defRPr>
             </a:pPr>
             <a:r>
-              <a:rPr sz="1200" b="1" dirty="0" err="1">
+              <a:rPr sz="1200" b="1" dirty="0">
                 <a:solidFill>
                   <a:srgbClr val="0E9AA7"/>
                 </a:solidFill>
               </a:rPr>
-              <a:t>Trả</a:t>
-            </a:r>
-            <a:r>
-              <a:rPr sz="1200" b="1" dirty="0">
-                <a:solidFill>
-                  <a:srgbClr val="0E9AA7"/>
-                </a:solidFill>
-              </a:rPr>
-              <a:t> </a:t>
+              <a:t>Trả </a:t>
             </a:r>
             <a:r>
               <a:rPr sz="1200" b="1" dirty="0" err="1">
@@ -28651,6 +31659,13 @@
             </a:solidFill>
           </a:ln>
         </p:spPr>
+        <p:txBody>
+          <a:bodyPr/>
+          <a:lstStyle/>
+          <a:p>
+            <a:endParaRPr lang="en-US"/>
+          </a:p>
+        </p:txBody>
       </p:sp>
       <p:sp>
         <p:nvSpPr>
@@ -28744,13 +31759,90 @@
               </a:defRPr>
             </a:pPr>
             <a:r>
-              <a:rPr sz="1800" b="1">
-                <a:solidFill>
-                  <a:srgbClr val="101827"/>
-                </a:solidFill>
-              </a:rPr>
-              <a:t>1 yêu cầu  →  1 câu trả lời</a:t>
-            </a:r>
+              <a:rPr sz="1800" b="1" dirty="0">
+                <a:solidFill>
+                  <a:srgbClr val="101827"/>
+                </a:solidFill>
+              </a:rPr>
+              <a:t>1 </a:t>
+            </a:r>
+            <a:r>
+              <a:rPr sz="1800" b="1" dirty="0" err="1">
+                <a:solidFill>
+                  <a:srgbClr val="101827"/>
+                </a:solidFill>
+              </a:rPr>
+              <a:t>yêu</a:t>
+            </a:r>
+            <a:r>
+              <a:rPr sz="1800" b="1" dirty="0">
+                <a:solidFill>
+                  <a:srgbClr val="101827"/>
+                </a:solidFill>
+              </a:rPr>
+              <a:t> </a:t>
+            </a:r>
+            <a:r>
+              <a:rPr sz="1800" b="1" dirty="0" err="1">
+                <a:solidFill>
+                  <a:srgbClr val="101827"/>
+                </a:solidFill>
+              </a:rPr>
+              <a:t>cầu</a:t>
+            </a:r>
+            <a:r>
+              <a:rPr sz="1800" b="1" dirty="0">
+                <a:solidFill>
+                  <a:srgbClr val="101827"/>
+                </a:solidFill>
+              </a:rPr>
+              <a:t>  →  1 </a:t>
+            </a:r>
+            <a:r>
+              <a:rPr sz="1800" b="1" dirty="0" err="1">
+                <a:solidFill>
+                  <a:srgbClr val="101827"/>
+                </a:solidFill>
+              </a:rPr>
+              <a:t>câu</a:t>
+            </a:r>
+            <a:r>
+              <a:rPr sz="1800" b="1" dirty="0">
+                <a:solidFill>
+                  <a:srgbClr val="101827"/>
+                </a:solidFill>
+              </a:rPr>
+              <a:t> </a:t>
+            </a:r>
+            <a:r>
+              <a:rPr sz="1800" b="1" dirty="0" err="1">
+                <a:solidFill>
+                  <a:srgbClr val="101827"/>
+                </a:solidFill>
+              </a:rPr>
+              <a:t>trả</a:t>
+            </a:r>
+            <a:r>
+              <a:rPr sz="1800" b="1" dirty="0">
+                <a:solidFill>
+                  <a:srgbClr val="101827"/>
+                </a:solidFill>
+              </a:rPr>
+              <a:t> </a:t>
+            </a:r>
+            <a:r>
+              <a:rPr sz="1800" b="1" dirty="0" err="1">
+                <a:solidFill>
+                  <a:srgbClr val="101827"/>
+                </a:solidFill>
+              </a:rPr>
+              <a:t>lời</a:t>
+            </a:r>
+            <a:endParaRPr sz="1800" b="1" dirty="0">
+              <a:solidFill>
+                <a:srgbClr val="101827"/>
+              </a:solidFill>
+            </a:endParaRPr>
           </a:p>
         </p:txBody>
       </p:sp>
@@ -28787,6 +31879,13 @@
             </a:solidFill>
           </a:ln>
         </p:spPr>
+        <p:txBody>
+          <a:bodyPr/>
+          <a:lstStyle/>
+          <a:p>
+            <a:endParaRPr lang="en-US"/>
+          </a:p>
+        </p:txBody>
       </p:sp>
       <p:sp>
         <p:nvSpPr>
@@ -28923,6 +32022,13 @@
             </a:solidFill>
           </a:ln>
         </p:spPr>
+        <p:txBody>
+          <a:bodyPr/>
+          <a:lstStyle/>
+          <a:p>
+            <a:endParaRPr lang="en-US"/>
+          </a:p>
+        </p:txBody>
       </p:sp>
       <p:sp>
         <p:nvSpPr>
@@ -29003,6 +32109,13 @@
             </a:solidFill>
           </a:ln>
         </p:spPr>
+        <p:txBody>
+          <a:bodyPr/>
+          <a:lstStyle/>
+          <a:p>
+            <a:endParaRPr lang="en-US"/>
+          </a:p>
+        </p:txBody>
       </p:sp>
       <p:sp>
         <p:nvSpPr>
@@ -29370,6 +32483,13 @@
             </a:solidFill>
           </a:ln>
         </p:spPr>
+        <p:txBody>
+          <a:bodyPr/>
+          <a:lstStyle/>
+          <a:p>
+            <a:endParaRPr lang="en-US"/>
+          </a:p>
+        </p:txBody>
       </p:sp>
       <p:sp>
         <p:nvSpPr>
@@ -29412,13 +32532,18 @@
               </a:defRPr>
             </a:pPr>
             <a:r>
-              <a:rPr sz="900" b="1">
+              <a:rPr lang="en-US" sz="900" b="1" dirty="0">
                 <a:solidFill>
                   <a:srgbClr val="64748B"/>
                 </a:solidFill>
               </a:rPr>
-              <a:t>19</a:t>
-            </a:r>
+              <a:t>20</a:t>
+            </a:r>
+            <a:endParaRPr sz="900" b="1" dirty="0">
+              <a:solidFill>
+                <a:srgbClr val="64748B"/>
+              </a:solidFill>
+            </a:endParaRPr>
           </a:p>
         </p:txBody>
       </p:sp>
@@ -29455,6 +32580,13 @@
             </a:solidFill>
           </a:ln>
         </p:spPr>
+        <p:txBody>
+          <a:bodyPr/>
+          <a:lstStyle/>
+          <a:p>
+            <a:endParaRPr lang="en-US"/>
+          </a:p>
+        </p:txBody>
       </p:sp>
       <p:sp>
         <p:nvSpPr>
@@ -29540,6 +32672,13 @@
             </a:solidFill>
           </a:ln>
         </p:spPr>
+        <p:txBody>
+          <a:bodyPr/>
+          <a:lstStyle/>
+          <a:p>
+            <a:endParaRPr lang="en-US"/>
+          </a:p>
+        </p:txBody>
       </p:sp>
       <p:sp>
         <p:nvSpPr>
@@ -30056,6 +33195,13 @@
             </a:solidFill>
           </a:ln>
         </p:spPr>
+        <p:txBody>
+          <a:bodyPr/>
+          <a:lstStyle/>
+          <a:p>
+            <a:endParaRPr lang="en-US"/>
+          </a:p>
+        </p:txBody>
       </p:sp>
       <p:sp>
         <p:nvSpPr>
@@ -30149,13 +33295,194 @@
               </a:defRPr>
             </a:pPr>
             <a:r>
-              <a:rPr sz="1013" b="1">
-                <a:solidFill>
-                  <a:srgbClr val="334155"/>
-                </a:solidFill>
-              </a:rPr>
-              <a:t>Vấn đề: câu trả lời dài, nhiều mở bài hoặc tóm tắt</a:t>
-            </a:r>
+              <a:rPr sz="1013" b="1" dirty="0" err="1">
+                <a:solidFill>
+                  <a:srgbClr val="334155"/>
+                </a:solidFill>
+              </a:rPr>
+              <a:t>Vấn</a:t>
+            </a:r>
+            <a:r>
+              <a:rPr sz="1013" b="1" dirty="0">
+                <a:solidFill>
+                  <a:srgbClr val="334155"/>
+                </a:solidFill>
+              </a:rPr>
+              <a:t> </a:t>
+            </a:r>
+            <a:r>
+              <a:rPr sz="1013" b="1" dirty="0" err="1">
+                <a:solidFill>
+                  <a:srgbClr val="334155"/>
+                </a:solidFill>
+              </a:rPr>
+              <a:t>đề</a:t>
+            </a:r>
+            <a:r>
+              <a:rPr sz="1013" b="1" dirty="0">
+                <a:solidFill>
+                  <a:srgbClr val="334155"/>
+                </a:solidFill>
+              </a:rPr>
+              <a:t>: </a:t>
+            </a:r>
+            <a:r>
+              <a:rPr sz="1013" b="1" dirty="0" err="1">
+                <a:solidFill>
+                  <a:srgbClr val="334155"/>
+                </a:solidFill>
+              </a:rPr>
+              <a:t>câu</a:t>
+            </a:r>
+            <a:r>
+              <a:rPr sz="1013" b="1" dirty="0">
+                <a:solidFill>
+                  <a:srgbClr val="334155"/>
+                </a:solidFill>
+              </a:rPr>
+              <a:t> </a:t>
+            </a:r>
+            <a:r>
+              <a:rPr sz="1013" b="1" dirty="0" err="1">
+                <a:solidFill>
+                  <a:srgbClr val="334155"/>
+                </a:solidFill>
+              </a:rPr>
+              <a:t>trả</a:t>
+            </a:r>
+            <a:r>
+              <a:rPr sz="1013" b="1" dirty="0">
+                <a:solidFill>
+                  <a:srgbClr val="334155"/>
+                </a:solidFill>
+              </a:rPr>
+              <a:t> </a:t>
+            </a:r>
+            <a:r>
+              <a:rPr sz="1013" b="1" dirty="0" err="1">
+                <a:solidFill>
+                  <a:srgbClr val="334155"/>
+                </a:solidFill>
+              </a:rPr>
+              <a:t>lời</a:t>
+            </a:r>
+            <a:r>
+              <a:rPr sz="1013" b="1" dirty="0">
+                <a:solidFill>
+                  <a:srgbClr val="334155"/>
+                </a:solidFill>
+              </a:rPr>
+              <a:t> </a:t>
+            </a:r>
+            <a:r>
+              <a:rPr sz="1013" b="1" dirty="0" err="1">
+                <a:solidFill>
+                  <a:srgbClr val="334155"/>
+                </a:solidFill>
+              </a:rPr>
+              <a:t>dài</a:t>
+            </a:r>
+            <a:r>
+              <a:rPr sz="1013" b="1" dirty="0">
+                <a:solidFill>
+                  <a:srgbClr val="334155"/>
+                </a:solidFill>
+              </a:rPr>
+              <a:t>, </a:t>
+            </a:r>
+            <a:r>
+              <a:rPr sz="1013" b="1" dirty="0" err="1">
+                <a:solidFill>
+                  <a:srgbClr val="334155"/>
+                </a:solidFill>
+              </a:rPr>
+              <a:t>nhiều</a:t>
+            </a:r>
+            <a:r>
+              <a:rPr sz="1013" b="1" dirty="0">
+                <a:solidFill>
+                  <a:srgbClr val="334155"/>
+                </a:solidFill>
+              </a:rPr>
+              <a:t> </a:t>
+            </a:r>
+            <a:r>
+              <a:rPr sz="1013" b="1" dirty="0" err="1">
+                <a:solidFill>
+                  <a:srgbClr val="334155"/>
+                </a:solidFill>
+              </a:rPr>
+              <a:t>mở</a:t>
+            </a:r>
+            <a:r>
+              <a:rPr sz="1013" b="1" dirty="0">
+                <a:solidFill>
+                  <a:srgbClr val="334155"/>
+                </a:solidFill>
+              </a:rPr>
+              <a:t> </a:t>
+            </a:r>
+            <a:r>
+              <a:rPr sz="1013" b="1" dirty="0" err="1">
+                <a:solidFill>
+                  <a:srgbClr val="334155"/>
+                </a:solidFill>
+              </a:rPr>
+              <a:t>bài</a:t>
+            </a:r>
+            <a:r>
+              <a:rPr sz="1013" b="1" dirty="0">
+                <a:solidFill>
+                  <a:srgbClr val="334155"/>
+                </a:solidFill>
+              </a:rPr>
+              <a:t> </a:t>
+            </a:r>
+            <a:r>
+              <a:rPr sz="1013" b="1" dirty="0" err="1">
+                <a:solidFill>
+                  <a:srgbClr val="334155"/>
+                </a:solidFill>
+              </a:rPr>
+              <a:t>hoặc</a:t>
+            </a:r>
+            <a:r>
+              <a:rPr sz="1013" b="1" dirty="0">
+                <a:solidFill>
+                  <a:srgbClr val="334155"/>
+                </a:solidFill>
+              </a:rPr>
+              <a:t> </a:t>
+            </a:r>
+            <a:r>
+              <a:rPr sz="1013" b="1" dirty="0" err="1">
+                <a:solidFill>
+                  <a:srgbClr val="334155"/>
+                </a:solidFill>
+              </a:rPr>
+              <a:t>tóm</a:t>
+            </a:r>
+            <a:r>
+              <a:rPr sz="1013" b="1" dirty="0">
+                <a:solidFill>
+                  <a:srgbClr val="334155"/>
+                </a:solidFill>
+              </a:rPr>
+              <a:t> </a:t>
+            </a:r>
+            <a:r>
+              <a:rPr sz="1013" b="1" dirty="0" err="1">
+                <a:solidFill>
+                  <a:srgbClr val="334155"/>
+                </a:solidFill>
+              </a:rPr>
+              <a:t>tắt</a:t>
+            </a:r>
+            <a:endParaRPr sz="1013" b="1" dirty="0">
+              <a:solidFill>
+                <a:srgbClr val="334155"/>
+              </a:solidFill>
+            </a:endParaRPr>
           </a:p>
           <a:p>
             <a:pPr algn="l">
@@ -30170,13 +33497,130 @@
               </a:defRPr>
             </a:pPr>
             <a:r>
-              <a:rPr sz="1013" b="1">
-                <a:solidFill>
-                  <a:srgbClr val="334155"/>
-                </a:solidFill>
-              </a:rPr>
-              <a:t>Nên cân nhắc: harness thiếu kiểm soát độ dài</a:t>
-            </a:r>
+              <a:rPr sz="1013" b="1" dirty="0" err="1">
+                <a:solidFill>
+                  <a:srgbClr val="334155"/>
+                </a:solidFill>
+              </a:rPr>
+              <a:t>Nên</a:t>
+            </a:r>
+            <a:r>
+              <a:rPr sz="1013" b="1" dirty="0">
+                <a:solidFill>
+                  <a:srgbClr val="334155"/>
+                </a:solidFill>
+              </a:rPr>
+              <a:t> </a:t>
+            </a:r>
+            <a:r>
+              <a:rPr sz="1013" b="1" dirty="0" err="1">
+                <a:solidFill>
+                  <a:srgbClr val="334155"/>
+                </a:solidFill>
+              </a:rPr>
+              <a:t>cân</a:t>
+            </a:r>
+            <a:r>
+              <a:rPr sz="1013" b="1" dirty="0">
+                <a:solidFill>
+                  <a:srgbClr val="334155"/>
+                </a:solidFill>
+              </a:rPr>
+              <a:t> </a:t>
+            </a:r>
+            <a:r>
+              <a:rPr sz="1013" b="1" dirty="0" err="1">
+                <a:solidFill>
+                  <a:srgbClr val="334155"/>
+                </a:solidFill>
+              </a:rPr>
+              <a:t>nhắc</a:t>
+            </a:r>
+            <a:r>
+              <a:rPr sz="1013" b="1" dirty="0">
+                <a:solidFill>
+                  <a:srgbClr val="334155"/>
+                </a:solidFill>
+              </a:rPr>
+              <a:t>: harness </a:t>
+            </a:r>
+            <a:r>
+              <a:rPr sz="1013" b="1" dirty="0" err="1">
+                <a:solidFill>
+                  <a:srgbClr val="334155"/>
+                </a:solidFill>
+              </a:rPr>
+              <a:t>thiếu</a:t>
+            </a:r>
+            <a:r>
+              <a:rPr sz="1013" b="1" dirty="0">
+                <a:solidFill>
+                  <a:srgbClr val="334155"/>
+                </a:solidFill>
+              </a:rPr>
+              <a:t> </a:t>
+            </a:r>
+            <a:r>
+              <a:rPr sz="1013" b="1" dirty="0" err="1">
+                <a:solidFill>
+                  <a:srgbClr val="334155"/>
+                </a:solidFill>
+              </a:rPr>
+              <a:t>kiểm</a:t>
+            </a:r>
+            <a:r>
+              <a:rPr sz="1013" b="1" dirty="0">
+                <a:solidFill>
+                  <a:srgbClr val="334155"/>
+                </a:solidFill>
+              </a:rPr>
+              <a:t> </a:t>
+            </a:r>
+            <a:r>
+              <a:rPr sz="1013" b="1" dirty="0" err="1">
+                <a:solidFill>
+                  <a:srgbClr val="334155"/>
+                </a:solidFill>
+              </a:rPr>
+              <a:t>soát</a:t>
+            </a:r>
+            <a:r>
+              <a:rPr sz="1013" b="1" dirty="0">
+                <a:solidFill>
+                  <a:srgbClr val="334155"/>
+                </a:solidFill>
+              </a:rPr>
+              <a:t> </a:t>
+            </a:r>
+            <a:r>
+              <a:rPr sz="1013" b="1" dirty="0" err="1">
+                <a:solidFill>
+                  <a:srgbClr val="334155"/>
+                </a:solidFill>
+              </a:rPr>
+              <a:t>độ</a:t>
+            </a:r>
+            <a:r>
+              <a:rPr sz="1013" b="1" dirty="0">
+                <a:solidFill>
+                  <a:srgbClr val="334155"/>
+                </a:solidFill>
+              </a:rPr>
+              <a:t> </a:t>
+            </a:r>
+            <a:r>
+              <a:rPr sz="1013" b="1" dirty="0" err="1">
+                <a:solidFill>
+                  <a:srgbClr val="334155"/>
+                </a:solidFill>
+              </a:rPr>
+              <a:t>dài</a:t>
+            </a:r>
+            <a:endParaRPr sz="1013" b="1" dirty="0">
+              <a:solidFill>
+                <a:srgbClr val="334155"/>
+              </a:solidFill>
+            </a:endParaRPr>
           </a:p>
           <a:p>
             <a:pPr algn="l">
@@ -30191,12 +33635,148 @@
               </a:defRPr>
             </a:pPr>
             <a:r>
-              <a:rPr sz="1013" b="1">
-                <a:solidFill>
-                  <a:srgbClr val="334155"/>
-                </a:solidFill>
-              </a:rPr>
-              <a:t>Không phù hợp: tài liệu hoặc giải thích dành cho con người</a:t>
+              <a:rPr sz="1013" b="1" dirty="0" err="1">
+                <a:solidFill>
+                  <a:srgbClr val="334155"/>
+                </a:solidFill>
+              </a:rPr>
+              <a:t>Không</a:t>
+            </a:r>
+            <a:r>
+              <a:rPr sz="1013" b="1" dirty="0">
+                <a:solidFill>
+                  <a:srgbClr val="334155"/>
+                </a:solidFill>
+              </a:rPr>
+              <a:t> </a:t>
+            </a:r>
+            <a:r>
+              <a:rPr sz="1013" b="1" dirty="0" err="1">
+                <a:solidFill>
+                  <a:srgbClr val="334155"/>
+                </a:solidFill>
+              </a:rPr>
+              <a:t>phù</a:t>
+            </a:r>
+            <a:r>
+              <a:rPr sz="1013" b="1" dirty="0">
+                <a:solidFill>
+                  <a:srgbClr val="334155"/>
+                </a:solidFill>
+              </a:rPr>
+              <a:t> </a:t>
+            </a:r>
+            <a:r>
+              <a:rPr sz="1013" b="1" dirty="0" err="1">
+                <a:solidFill>
+                  <a:srgbClr val="334155"/>
+                </a:solidFill>
+              </a:rPr>
+              <a:t>hợp</a:t>
+            </a:r>
+            <a:r>
+              <a:rPr sz="1013" b="1" dirty="0">
+                <a:solidFill>
+                  <a:srgbClr val="334155"/>
+                </a:solidFill>
+              </a:rPr>
+              <a:t>: tài </a:t>
+            </a:r>
+            <a:r>
+              <a:rPr sz="1013" b="1" dirty="0" err="1">
+                <a:solidFill>
+                  <a:srgbClr val="334155"/>
+                </a:solidFill>
+              </a:rPr>
+              <a:t>liệu</a:t>
+            </a:r>
+            <a:r>
+              <a:rPr sz="1013" b="1" dirty="0">
+                <a:solidFill>
+                  <a:srgbClr val="334155"/>
+                </a:solidFill>
+              </a:rPr>
+              <a:t> </a:t>
+            </a:r>
+            <a:r>
+              <a:rPr sz="1013" b="1" dirty="0" err="1">
+                <a:solidFill>
+                  <a:srgbClr val="334155"/>
+                </a:solidFill>
+              </a:rPr>
+              <a:t>hoặc</a:t>
+            </a:r>
+            <a:r>
+              <a:rPr sz="1013" b="1" dirty="0">
+                <a:solidFill>
+                  <a:srgbClr val="334155"/>
+                </a:solidFill>
+              </a:rPr>
+              <a:t> </a:t>
+            </a:r>
+            <a:r>
+              <a:rPr sz="1013" b="1" dirty="0" err="1">
+                <a:solidFill>
+                  <a:srgbClr val="334155"/>
+                </a:solidFill>
+              </a:rPr>
+              <a:t>giải</a:t>
+            </a:r>
+            <a:r>
+              <a:rPr sz="1013" b="1" dirty="0">
+                <a:solidFill>
+                  <a:srgbClr val="334155"/>
+                </a:solidFill>
+              </a:rPr>
+              <a:t> </a:t>
+            </a:r>
+            <a:r>
+              <a:rPr sz="1013" b="1" dirty="0" err="1">
+                <a:solidFill>
+                  <a:srgbClr val="334155"/>
+                </a:solidFill>
+              </a:rPr>
+              <a:t>thích</a:t>
+            </a:r>
+            <a:r>
+              <a:rPr sz="1013" b="1" dirty="0">
+                <a:solidFill>
+                  <a:srgbClr val="334155"/>
+                </a:solidFill>
+              </a:rPr>
+              <a:t> </a:t>
+            </a:r>
+            <a:r>
+              <a:rPr sz="1013" b="1" dirty="0" err="1">
+                <a:solidFill>
+                  <a:srgbClr val="334155"/>
+                </a:solidFill>
+              </a:rPr>
+              <a:t>dành</a:t>
+            </a:r>
+            <a:r>
+              <a:rPr sz="1013" b="1" dirty="0">
+                <a:solidFill>
+                  <a:srgbClr val="334155"/>
+                </a:solidFill>
+              </a:rPr>
+              <a:t> </a:t>
+            </a:r>
+            <a:r>
+              <a:rPr sz="1013" b="1" dirty="0" err="1">
+                <a:solidFill>
+                  <a:srgbClr val="334155"/>
+                </a:solidFill>
+              </a:rPr>
+              <a:t>cho</a:t>
+            </a:r>
+            <a:r>
+              <a:rPr sz="1013" b="1" dirty="0">
+                <a:solidFill>
+                  <a:srgbClr val="334155"/>
+                </a:solidFill>
+              </a:rPr>
+              <a:t> con người</a:t>
             </a:r>
           </a:p>
         </p:txBody>
@@ -30234,6 +33814,13 @@
             </a:solidFill>
           </a:ln>
         </p:spPr>
+        <p:txBody>
+          <a:bodyPr/>
+          <a:lstStyle/>
+          <a:p>
+            <a:endParaRPr lang="en-US"/>
+          </a:p>
+        </p:txBody>
       </p:sp>
       <p:sp>
         <p:nvSpPr>
@@ -30412,6 +33999,13 @@
             </a:solidFill>
           </a:ln>
         </p:spPr>
+        <p:txBody>
+          <a:bodyPr/>
+          <a:lstStyle/>
+          <a:p>
+            <a:endParaRPr lang="en-US"/>
+          </a:p>
+        </p:txBody>
       </p:sp>
       <p:sp>
         <p:nvSpPr>
@@ -30590,6 +34184,13 @@
             </a:solidFill>
           </a:ln>
         </p:spPr>
+        <p:txBody>
+          <a:bodyPr/>
+          <a:lstStyle/>
+          <a:p>
+            <a:endParaRPr lang="en-US"/>
+          </a:p>
+        </p:txBody>
       </p:sp>
       <p:sp>
         <p:nvSpPr>
@@ -31670,6 +35271,13 @@
             </a:solidFill>
           </a:ln>
         </p:spPr>
+        <p:txBody>
+          <a:bodyPr/>
+          <a:lstStyle/>
+          <a:p>
+            <a:endParaRPr lang="en-US"/>
+          </a:p>
+        </p:txBody>
       </p:sp>
       <p:sp>
         <p:nvSpPr>
@@ -31763,13 +35371,34 @@
               </a:defRPr>
             </a:pPr>
             <a:r>
-              <a:rPr sz="900" b="0">
+              <a:rPr lang="en-US" sz="900" b="0" dirty="0">
                 <a:solidFill>
                   <a:srgbClr val="64748B"/>
                 </a:solidFill>
               </a:rPr>
-              <a:t>19 / 20</a:t>
-            </a:r>
+              <a:t>20</a:t>
+            </a:r>
+            <a:r>
+              <a:rPr sz="900" b="0" dirty="0">
+                <a:solidFill>
+                  <a:srgbClr val="64748B"/>
+                </a:solidFill>
+              </a:rPr>
+              <a:t> / 2</a:t>
+            </a:r>
+            <a:r>
+              <a:rPr lang="en-US" sz="900" b="0" dirty="0">
+                <a:solidFill>
+                  <a:srgbClr val="64748B"/>
+                </a:solidFill>
+              </a:rPr>
+              <a:t>1</a:t>
+            </a:r>
+            <a:endParaRPr sz="900" b="0" dirty="0">
+              <a:solidFill>
+                <a:srgbClr val="64748B"/>
+              </a:solidFill>
+            </a:endParaRPr>
           </a:p>
         </p:txBody>
       </p:sp>
@@ -32249,6 +35878,13 @@
             </a:solidFill>
           </a:ln>
         </p:spPr>
+        <p:txBody>
+          <a:bodyPr/>
+          <a:lstStyle/>
+          <a:p>
+            <a:endParaRPr lang="en-US"/>
+          </a:p>
+        </p:txBody>
       </p:sp>
       <p:sp>
         <p:nvSpPr>
@@ -32296,7 +35932,7 @@
                   <a:srgbClr val="64748B"/>
                 </a:solidFill>
               </a:rPr>
-              <a:t>20</a:t>
+              <a:t>21</a:t>
             </a:r>
             <a:endParaRPr sz="1050" b="1" dirty="0">
               <a:solidFill>
@@ -32337,6 +35973,13 @@
             </a:solidFill>
           </a:ln>
         </p:spPr>
+        <p:txBody>
+          <a:bodyPr/>
+          <a:lstStyle/>
+          <a:p>
+            <a:endParaRPr lang="en-US"/>
+          </a:p>
+        </p:txBody>
       </p:sp>
       <p:sp>
         <p:nvSpPr>
@@ -32895,22 +36538,13 @@
               </a:defRPr>
             </a:pPr>
             <a:r>
-              <a:rPr lang="en-US" sz="1400" b="1" dirty="0" err="1">
+              <a:rPr lang="en-US" sz="1400" b="1" dirty="0">
                 <a:solidFill>
                   <a:srgbClr val="101827"/>
                 </a:solidFill>
                 <a:hlinkClick r:id="rId6" action="ppaction://hlinksldjump"/>
               </a:rPr>
-              <a:t>Trả</a:t>
-            </a:r>
-            <a:r>
-              <a:rPr lang="en-US" sz="1400" b="1" dirty="0">
-                <a:solidFill>
-                  <a:srgbClr val="101827"/>
-                </a:solidFill>
-                <a:hlinkClick r:id="rId6" action="ppaction://hlinksldjump"/>
-              </a:rPr>
-              <a:t> </a:t>
+              <a:t>Trả </a:t>
             </a:r>
             <a:r>
               <a:rPr lang="en-US" sz="1400" b="1" dirty="0" err="1">
@@ -33207,6 +36841,13 @@
             </a:solidFill>
           </a:ln>
         </p:spPr>
+        <p:txBody>
+          <a:bodyPr/>
+          <a:lstStyle/>
+          <a:p>
+            <a:endParaRPr lang="en-US"/>
+          </a:p>
+        </p:txBody>
       </p:sp>
       <p:sp>
         <p:nvSpPr>
@@ -33301,7 +36942,7 @@
                   <a:srgbClr val="64748B"/>
                 </a:solidFill>
               </a:rPr>
-              <a:t>20 / 20</a:t>
+              <a:t>21 / 21</a:t>
             </a:r>
           </a:p>
         </p:txBody>
@@ -33655,15 +37296,7 @@
             <a:pPr algn="ctr"/>
             <a:r>
               <a:rPr lang="en-US" sz="1200" b="1" dirty="0"/>
-              <a:t>3.1. </a:t>
-            </a:r>
-            <a:r>
-              <a:rPr lang="en-US" sz="1200" b="1" dirty="0" err="1"/>
-              <a:t>Trả</a:t>
-            </a:r>
-            <a:r>
-              <a:rPr lang="en-US" sz="1200" b="1" dirty="0"/>
-              <a:t> </a:t>
+              <a:t>3.1. Trả </a:t>
             </a:r>
             <a:r>
               <a:rPr lang="en-US" sz="1200" b="1" dirty="0" err="1"/>
@@ -34098,6 +37731,13 @@
             </a:solidFill>
           </a:ln>
         </p:spPr>
+        <p:txBody>
+          <a:bodyPr/>
+          <a:lstStyle/>
+          <a:p>
+            <a:endParaRPr lang="en-US"/>
+          </a:p>
+        </p:txBody>
       </p:sp>
       <p:sp>
         <p:nvSpPr>
@@ -34362,6 +38002,13 @@
             </a:solidFill>
           </a:ln>
         </p:spPr>
+        <p:txBody>
+          <a:bodyPr/>
+          <a:lstStyle/>
+          <a:p>
+            <a:endParaRPr lang="en-US"/>
+          </a:p>
+        </p:txBody>
       </p:sp>
       <p:sp>
         <p:nvSpPr>
@@ -34447,6 +38094,13 @@
             </a:solidFill>
           </a:ln>
         </p:spPr>
+        <p:txBody>
+          <a:bodyPr/>
+          <a:lstStyle/>
+          <a:p>
+            <a:endParaRPr lang="en-US"/>
+          </a:p>
+        </p:txBody>
       </p:sp>
       <p:sp>
         <p:nvSpPr>
@@ -34583,6 +38237,13 @@
             </a:solidFill>
           </a:ln>
         </p:spPr>
+        <p:txBody>
+          <a:bodyPr/>
+          <a:lstStyle/>
+          <a:p>
+            <a:endParaRPr lang="en-US"/>
+          </a:p>
+        </p:txBody>
       </p:sp>
       <p:sp>
         <p:nvSpPr>
@@ -34719,6 +38380,13 @@
             </a:solidFill>
           </a:ln>
         </p:spPr>
+        <p:txBody>
+          <a:bodyPr/>
+          <a:lstStyle/>
+          <a:p>
+            <a:endParaRPr lang="en-US"/>
+          </a:p>
+        </p:txBody>
       </p:sp>
       <p:sp>
         <p:nvSpPr>
@@ -34804,6 +38472,13 @@
             </a:solidFill>
           </a:ln>
         </p:spPr>
+        <p:txBody>
+          <a:bodyPr/>
+          <a:lstStyle/>
+          <a:p>
+            <a:endParaRPr lang="en-US"/>
+          </a:p>
+        </p:txBody>
       </p:sp>
       <p:sp>
         <p:nvSpPr>
@@ -34889,6 +38564,13 @@
             </a:solidFill>
           </a:ln>
         </p:spPr>
+        <p:txBody>
+          <a:bodyPr/>
+          <a:lstStyle/>
+          <a:p>
+            <a:endParaRPr lang="en-US"/>
+          </a:p>
+        </p:txBody>
       </p:sp>
       <p:sp>
         <p:nvSpPr>
@@ -34974,6 +38656,13 @@
             </a:solidFill>
           </a:ln>
         </p:spPr>
+        <p:txBody>
+          <a:bodyPr/>
+          <a:lstStyle/>
+          <a:p>
+            <a:endParaRPr lang="en-US"/>
+          </a:p>
+        </p:txBody>
       </p:sp>
       <p:sp>
         <p:nvSpPr>
@@ -35059,6 +38748,13 @@
             </a:solidFill>
           </a:ln>
         </p:spPr>
+        <p:txBody>
+          <a:bodyPr/>
+          <a:lstStyle/>
+          <a:p>
+            <a:endParaRPr lang="en-US"/>
+          </a:p>
+        </p:txBody>
       </p:sp>
       <p:sp>
         <p:nvSpPr>
@@ -35144,6 +38840,13 @@
             </a:solidFill>
           </a:ln>
         </p:spPr>
+        <p:txBody>
+          <a:bodyPr/>
+          <a:lstStyle/>
+          <a:p>
+            <a:endParaRPr lang="en-US"/>
+          </a:p>
+        </p:txBody>
       </p:sp>
       <p:sp>
         <p:nvSpPr>
@@ -35229,6 +38932,13 @@
             </a:solidFill>
           </a:ln>
         </p:spPr>
+        <p:txBody>
+          <a:bodyPr/>
+          <a:lstStyle/>
+          <a:p>
+            <a:endParaRPr lang="en-US"/>
+          </a:p>
+        </p:txBody>
       </p:sp>
       <p:sp>
         <p:nvSpPr>
@@ -35314,6 +39024,13 @@
             </a:solidFill>
           </a:ln>
         </p:spPr>
+        <p:txBody>
+          <a:bodyPr/>
+          <a:lstStyle/>
+          <a:p>
+            <a:endParaRPr lang="en-US"/>
+          </a:p>
+        </p:txBody>
       </p:sp>
       <p:sp>
         <p:nvSpPr>
@@ -35570,6 +39287,13 @@
             </a:solidFill>
           </a:ln>
         </p:spPr>
+        <p:txBody>
+          <a:bodyPr/>
+          <a:lstStyle/>
+          <a:p>
+            <a:endParaRPr lang="en-US"/>
+          </a:p>
+        </p:txBody>
       </p:sp>
       <p:sp>
         <p:nvSpPr>
@@ -35818,6 +39542,13 @@
             </a:solidFill>
           </a:ln>
         </p:spPr>
+        <p:txBody>
+          <a:bodyPr/>
+          <a:lstStyle/>
+          <a:p>
+            <a:endParaRPr lang="en-US"/>
+          </a:p>
+        </p:txBody>
       </p:sp>
       <p:sp>
         <p:nvSpPr>
@@ -36465,13 +40196,210 @@
               </a:defRPr>
             </a:pPr>
             <a:r>
-              <a:rPr sz="2775" b="1">
-                <a:solidFill>
-                  <a:srgbClr val="101827"/>
-                </a:solidFill>
-              </a:rPr>
-              <a:t>Cùng một diện tích văn bản, lượng token có thể lệch gần 5 lần</a:t>
-            </a:r>
+              <a:rPr sz="2775" b="1" dirty="0" err="1">
+                <a:solidFill>
+                  <a:srgbClr val="101827"/>
+                </a:solidFill>
+              </a:rPr>
+              <a:t>Cùng</a:t>
+            </a:r>
+            <a:r>
+              <a:rPr sz="2775" b="1" dirty="0">
+                <a:solidFill>
+                  <a:srgbClr val="101827"/>
+                </a:solidFill>
+              </a:rPr>
+              <a:t> </a:t>
+            </a:r>
+            <a:r>
+              <a:rPr lang="en-US" sz="2775" b="1" dirty="0" err="1">
+                <a:solidFill>
+                  <a:srgbClr val="101827"/>
+                </a:solidFill>
+              </a:rPr>
+              <a:t>số</a:t>
+            </a:r>
+            <a:r>
+              <a:rPr lang="en-US" sz="2775" b="1" dirty="0">
+                <a:solidFill>
+                  <a:srgbClr val="101827"/>
+                </a:solidFill>
+              </a:rPr>
+              <a:t> </a:t>
+            </a:r>
+            <a:r>
+              <a:rPr lang="en-US" sz="2775" b="1" dirty="0" err="1">
+                <a:solidFill>
+                  <a:srgbClr val="101827"/>
+                </a:solidFill>
+              </a:rPr>
+              <a:t>lượng</a:t>
+            </a:r>
+            <a:r>
+              <a:rPr lang="en-US" sz="2775" b="1" dirty="0">
+                <a:solidFill>
+                  <a:srgbClr val="101827"/>
+                </a:solidFill>
+              </a:rPr>
+              <a:t> </a:t>
+            </a:r>
+            <a:r>
+              <a:rPr lang="en-US" sz="2775" b="1" dirty="0" err="1">
+                <a:solidFill>
+                  <a:srgbClr val="101827"/>
+                </a:solidFill>
+              </a:rPr>
+              <a:t>ký</a:t>
+            </a:r>
+            <a:r>
+              <a:rPr lang="en-US" sz="2775" b="1" dirty="0">
+                <a:solidFill>
+                  <a:srgbClr val="101827"/>
+                </a:solidFill>
+              </a:rPr>
+              <a:t> </a:t>
+            </a:r>
+            <a:r>
+              <a:rPr lang="en-US" sz="2775" b="1" dirty="0" err="1">
+                <a:solidFill>
+                  <a:srgbClr val="101827"/>
+                </a:solidFill>
+              </a:rPr>
+              <a:t>tự</a:t>
+            </a:r>
+            <a:r>
+              <a:rPr sz="2775" b="1" dirty="0">
+                <a:solidFill>
+                  <a:srgbClr val="101827"/>
+                </a:solidFill>
+              </a:rPr>
+              <a:t>, </a:t>
+            </a:r>
+            <a:r>
+              <a:rPr sz="2775" b="1" dirty="0" err="1">
+                <a:solidFill>
+                  <a:srgbClr val="101827"/>
+                </a:solidFill>
+              </a:rPr>
+              <a:t>lượng</a:t>
+            </a:r>
+            <a:r>
+              <a:rPr sz="2775" b="1" dirty="0">
+                <a:solidFill>
+                  <a:srgbClr val="101827"/>
+                </a:solidFill>
+              </a:rPr>
+              <a:t> token </a:t>
+            </a:r>
+            <a:r>
+              <a:rPr lang="en-US" sz="2775" b="1" dirty="0" err="1">
+                <a:solidFill>
+                  <a:srgbClr val="101827"/>
+                </a:solidFill>
+              </a:rPr>
+              <a:t>tiêu</a:t>
+            </a:r>
+            <a:r>
+              <a:rPr lang="en-US" sz="2775" b="1" dirty="0">
+                <a:solidFill>
+                  <a:srgbClr val="101827"/>
+                </a:solidFill>
+              </a:rPr>
+              <a:t> </a:t>
+            </a:r>
+            <a:r>
+              <a:rPr lang="en-US" sz="2775" b="1" dirty="0" err="1">
+                <a:solidFill>
+                  <a:srgbClr val="101827"/>
+                </a:solidFill>
+              </a:rPr>
+              <a:t>tốn</a:t>
+            </a:r>
+            <a:r>
+              <a:rPr lang="en-US" sz="2775" b="1" dirty="0">
+                <a:solidFill>
+                  <a:srgbClr val="101827"/>
+                </a:solidFill>
+              </a:rPr>
+              <a:t> </a:t>
+            </a:r>
+            <a:r>
+              <a:rPr sz="2775" b="1" dirty="0" err="1">
+                <a:solidFill>
+                  <a:srgbClr val="101827"/>
+                </a:solidFill>
+              </a:rPr>
+              <a:t>có</a:t>
+            </a:r>
+            <a:r>
+              <a:rPr sz="2775" b="1" dirty="0">
+                <a:solidFill>
+                  <a:srgbClr val="101827"/>
+                </a:solidFill>
+              </a:rPr>
+              <a:t> </a:t>
+            </a:r>
+            <a:r>
+              <a:rPr sz="2775" b="1" dirty="0" err="1">
+                <a:solidFill>
+                  <a:srgbClr val="101827"/>
+                </a:solidFill>
+              </a:rPr>
+              <a:t>thể</a:t>
+            </a:r>
+            <a:r>
+              <a:rPr sz="2775" b="1" dirty="0">
+                <a:solidFill>
+                  <a:srgbClr val="101827"/>
+                </a:solidFill>
+              </a:rPr>
+              <a:t> </a:t>
+            </a:r>
+            <a:r>
+              <a:rPr sz="2775" b="1" dirty="0" err="1">
+                <a:solidFill>
+                  <a:srgbClr val="101827"/>
+                </a:solidFill>
+              </a:rPr>
+              <a:t>lệch</a:t>
+            </a:r>
+            <a:r>
+              <a:rPr sz="2775" b="1" dirty="0">
+                <a:solidFill>
+                  <a:srgbClr val="101827"/>
+                </a:solidFill>
+              </a:rPr>
+              <a:t> </a:t>
+            </a:r>
+            <a:r>
+              <a:rPr sz="2775" b="1" dirty="0" err="1">
+                <a:solidFill>
+                  <a:srgbClr val="101827"/>
+                </a:solidFill>
+              </a:rPr>
+              <a:t>gần</a:t>
+            </a:r>
+            <a:r>
+              <a:rPr sz="2775" b="1" dirty="0">
+                <a:solidFill>
+                  <a:srgbClr val="101827"/>
+                </a:solidFill>
+              </a:rPr>
+              <a:t> 5 </a:t>
+            </a:r>
+            <a:r>
+              <a:rPr sz="2775" b="1" dirty="0" err="1">
+                <a:solidFill>
+                  <a:srgbClr val="101827"/>
+                </a:solidFill>
+              </a:rPr>
+              <a:t>lần</a:t>
+            </a:r>
+            <a:endParaRPr sz="2775" b="1" dirty="0">
+              <a:solidFill>
+                <a:srgbClr val="101827"/>
+              </a:solidFill>
+            </a:endParaRPr>
           </a:p>
         </p:txBody>
       </p:sp>
@@ -36503,6 +40431,13 @@
             </a:solidFill>
           </a:ln>
         </p:spPr>
+        <p:txBody>
+          <a:bodyPr/>
+          <a:lstStyle/>
+          <a:p>
+            <a:endParaRPr lang="en-US"/>
+          </a:p>
+        </p:txBody>
       </p:sp>
       <p:sp>
         <p:nvSpPr>
@@ -36586,6 +40521,13 @@
             </a:solidFill>
           </a:ln>
         </p:spPr>
+        <p:txBody>
+          <a:bodyPr/>
+          <a:lstStyle/>
+          <a:p>
+            <a:endParaRPr lang="en-US"/>
+          </a:p>
+        </p:txBody>
       </p:sp>
       <p:sp>
         <p:nvSpPr>
@@ -36669,6 +40611,13 @@
             </a:solidFill>
           </a:ln>
         </p:spPr>
+        <p:txBody>
+          <a:bodyPr/>
+          <a:lstStyle/>
+          <a:p>
+            <a:endParaRPr lang="en-US"/>
+          </a:p>
+        </p:txBody>
       </p:sp>
       <p:sp>
         <p:nvSpPr>
@@ -36752,6 +40701,13 @@
             </a:solidFill>
           </a:ln>
         </p:spPr>
+        <p:txBody>
+          <a:bodyPr/>
+          <a:lstStyle/>
+          <a:p>
+            <a:endParaRPr lang="en-US"/>
+          </a:p>
+        </p:txBody>
       </p:sp>
       <p:sp>
         <p:nvSpPr>
@@ -36835,6 +40791,13 @@
             </a:solidFill>
           </a:ln>
         </p:spPr>
+        <p:txBody>
+          <a:bodyPr/>
+          <a:lstStyle/>
+          <a:p>
+            <a:endParaRPr lang="en-US"/>
+          </a:p>
+        </p:txBody>
       </p:sp>
       <p:sp>
         <p:nvSpPr>
@@ -36918,6 +40881,13 @@
             </a:solidFill>
           </a:ln>
         </p:spPr>
+        <p:txBody>
+          <a:bodyPr/>
+          <a:lstStyle/>
+          <a:p>
+            <a:endParaRPr lang="en-US"/>
+          </a:p>
+        </p:txBody>
       </p:sp>
       <p:sp>
         <p:nvSpPr>
@@ -37001,6 +40971,13 @@
             </a:solidFill>
           </a:ln>
         </p:spPr>
+        <p:txBody>
+          <a:bodyPr/>
+          <a:lstStyle/>
+          <a:p>
+            <a:endParaRPr lang="en-US"/>
+          </a:p>
+        </p:txBody>
       </p:sp>
       <p:sp>
         <p:nvSpPr>
@@ -37084,6 +41061,13 @@
             </a:solidFill>
           </a:ln>
         </p:spPr>
+        <p:txBody>
+          <a:bodyPr/>
+          <a:lstStyle/>
+          <a:p>
+            <a:endParaRPr lang="en-US"/>
+          </a:p>
+        </p:txBody>
       </p:sp>
       <p:sp>
         <p:nvSpPr>
@@ -37167,6 +41151,13 @@
             </a:solidFill>
           </a:ln>
         </p:spPr>
+        <p:txBody>
+          <a:bodyPr/>
+          <a:lstStyle/>
+          <a:p>
+            <a:endParaRPr lang="en-US"/>
+          </a:p>
+        </p:txBody>
       </p:sp>
       <p:sp>
         <p:nvSpPr>
@@ -37250,6 +41241,13 @@
             </a:solidFill>
           </a:ln>
         </p:spPr>
+        <p:txBody>
+          <a:bodyPr/>
+          <a:lstStyle/>
+          <a:p>
+            <a:endParaRPr lang="en-US"/>
+          </a:p>
+        </p:txBody>
       </p:sp>
       <p:sp>
         <p:nvSpPr>
@@ -37365,6 +41363,13 @@
             </a:solidFill>
           </a:ln>
         </p:spPr>
+        <p:txBody>
+          <a:bodyPr/>
+          <a:lstStyle/>
+          <a:p>
+            <a:endParaRPr lang="en-US"/>
+          </a:p>
+        </p:txBody>
       </p:sp>
       <p:sp>
         <p:nvSpPr>
@@ -37448,6 +41453,13 @@
             </a:solidFill>
           </a:ln>
         </p:spPr>
+        <p:txBody>
+          <a:bodyPr/>
+          <a:lstStyle/>
+          <a:p>
+            <a:endParaRPr lang="en-US"/>
+          </a:p>
+        </p:txBody>
       </p:sp>
       <p:sp>
         <p:nvSpPr>
@@ -37531,6 +41543,13 @@
             </a:solidFill>
           </a:ln>
         </p:spPr>
+        <p:txBody>
+          <a:bodyPr/>
+          <a:lstStyle/>
+          <a:p>
+            <a:endParaRPr lang="en-US"/>
+          </a:p>
+        </p:txBody>
       </p:sp>
       <p:sp>
         <p:nvSpPr>
@@ -37614,6 +41633,13 @@
             </a:solidFill>
           </a:ln>
         </p:spPr>
+        <p:txBody>
+          <a:bodyPr/>
+          <a:lstStyle/>
+          <a:p>
+            <a:endParaRPr lang="en-US"/>
+          </a:p>
+        </p:txBody>
       </p:sp>
       <p:sp>
         <p:nvSpPr>
@@ -37697,6 +41723,13 @@
             </a:solidFill>
           </a:ln>
         </p:spPr>
+        <p:txBody>
+          <a:bodyPr/>
+          <a:lstStyle/>
+          <a:p>
+            <a:endParaRPr lang="en-US"/>
+          </a:p>
+        </p:txBody>
       </p:sp>
       <p:sp>
         <p:nvSpPr>
@@ -37780,6 +41813,13 @@
             </a:solidFill>
           </a:ln>
         </p:spPr>
+        <p:txBody>
+          <a:bodyPr/>
+          <a:lstStyle/>
+          <a:p>
+            <a:endParaRPr lang="en-US"/>
+          </a:p>
+        </p:txBody>
       </p:sp>
       <p:sp>
         <p:nvSpPr>
@@ -37863,6 +41903,13 @@
             </a:solidFill>
           </a:ln>
         </p:spPr>
+        <p:txBody>
+          <a:bodyPr/>
+          <a:lstStyle/>
+          <a:p>
+            <a:endParaRPr lang="en-US"/>
+          </a:p>
+        </p:txBody>
       </p:sp>
       <p:sp>
         <p:nvSpPr>
@@ -37946,6 +41993,13 @@
             </a:solidFill>
           </a:ln>
         </p:spPr>
+        <p:txBody>
+          <a:bodyPr/>
+          <a:lstStyle/>
+          <a:p>
+            <a:endParaRPr lang="en-US"/>
+          </a:p>
+        </p:txBody>
       </p:sp>
       <p:sp>
         <p:nvSpPr>
@@ -38029,6 +42083,13 @@
             </a:solidFill>
           </a:ln>
         </p:spPr>
+        <p:txBody>
+          <a:bodyPr/>
+          <a:lstStyle/>
+          <a:p>
+            <a:endParaRPr lang="en-US"/>
+          </a:p>
+        </p:txBody>
       </p:sp>
       <p:sp>
         <p:nvSpPr>
@@ -38112,6 +42173,13 @@
             </a:solidFill>
           </a:ln>
         </p:spPr>
+        <p:txBody>
+          <a:bodyPr/>
+          <a:lstStyle/>
+          <a:p>
+            <a:endParaRPr lang="en-US"/>
+          </a:p>
+        </p:txBody>
       </p:sp>
       <p:sp>
         <p:nvSpPr>
@@ -38195,6 +42263,13 @@
             </a:solidFill>
           </a:ln>
         </p:spPr>
+        <p:txBody>
+          <a:bodyPr/>
+          <a:lstStyle/>
+          <a:p>
+            <a:endParaRPr lang="en-US"/>
+          </a:p>
+        </p:txBody>
       </p:sp>
       <p:sp>
         <p:nvSpPr>
@@ -38280,6 +42355,13 @@
             </a:solidFill>
           </a:ln>
         </p:spPr>
+        <p:txBody>
+          <a:bodyPr/>
+          <a:lstStyle/>
+          <a:p>
+            <a:endParaRPr lang="en-US"/>
+          </a:p>
+        </p:txBody>
       </p:sp>
       <p:sp>
         <p:nvSpPr>
@@ -38365,6 +42447,13 @@
             </a:solidFill>
           </a:ln>
         </p:spPr>
+        <p:txBody>
+          <a:bodyPr/>
+          <a:lstStyle/>
+          <a:p>
+            <a:endParaRPr lang="en-US"/>
+          </a:p>
+        </p:txBody>
       </p:sp>
       <p:sp>
         <p:nvSpPr>
@@ -38547,6 +42636,13 @@
             </a:solidFill>
           </a:ln>
         </p:spPr>
+        <p:txBody>
+          <a:bodyPr/>
+          <a:lstStyle/>
+          <a:p>
+            <a:endParaRPr lang="en-US"/>
+          </a:p>
+        </p:txBody>
       </p:sp>
       <p:sp>
         <p:nvSpPr>
@@ -38681,6 +42777,13 @@
             </a:solidFill>
           </a:ln>
         </p:spPr>
+        <p:txBody>
+          <a:bodyPr/>
+          <a:lstStyle/>
+          <a:p>
+            <a:endParaRPr lang="en-US"/>
+          </a:p>
+        </p:txBody>
       </p:sp>
       <p:sp>
         <p:nvSpPr>
@@ -38764,6 +42867,13 @@
             </a:solidFill>
           </a:ln>
         </p:spPr>
+        <p:txBody>
+          <a:bodyPr/>
+          <a:lstStyle/>
+          <a:p>
+            <a:endParaRPr lang="en-US"/>
+          </a:p>
+        </p:txBody>
       </p:sp>
       <p:sp>
         <p:nvSpPr>
@@ -38847,6 +42957,13 @@
             </a:solidFill>
           </a:ln>
         </p:spPr>
+        <p:txBody>
+          <a:bodyPr/>
+          <a:lstStyle/>
+          <a:p>
+            <a:endParaRPr lang="en-US"/>
+          </a:p>
+        </p:txBody>
       </p:sp>
       <p:sp>
         <p:nvSpPr>
@@ -38930,6 +43047,13 @@
             </a:solidFill>
           </a:ln>
         </p:spPr>
+        <p:txBody>
+          <a:bodyPr/>
+          <a:lstStyle/>
+          <a:p>
+            <a:endParaRPr lang="en-US"/>
+          </a:p>
+        </p:txBody>
       </p:sp>
       <p:sp>
         <p:nvSpPr>
@@ -39267,6 +43391,13 @@
             </a:solidFill>
           </a:ln>
         </p:spPr>
+        <p:txBody>
+          <a:bodyPr/>
+          <a:lstStyle/>
+          <a:p>
+            <a:endParaRPr lang="en-US"/>
+          </a:p>
+        </p:txBody>
       </p:sp>
       <p:sp>
         <p:nvSpPr>
@@ -39448,6 +43579,13 @@
             </a:solidFill>
           </a:ln>
         </p:spPr>
+        <p:txBody>
+          <a:bodyPr/>
+          <a:lstStyle/>
+          <a:p>
+            <a:endParaRPr lang="en-US"/>
+          </a:p>
+        </p:txBody>
       </p:sp>
       <p:sp>
         <p:nvSpPr>
@@ -39531,6 +43669,13 @@
             </a:solidFill>
           </a:ln>
         </p:spPr>
+        <p:txBody>
+          <a:bodyPr/>
+          <a:lstStyle/>
+          <a:p>
+            <a:endParaRPr lang="en-US"/>
+          </a:p>
+        </p:txBody>
       </p:sp>
       <p:sp>
         <p:nvSpPr>
@@ -39614,6 +43759,13 @@
             </a:solidFill>
           </a:ln>
         </p:spPr>
+        <p:txBody>
+          <a:bodyPr/>
+          <a:lstStyle/>
+          <a:p>
+            <a:endParaRPr lang="en-US"/>
+          </a:p>
+        </p:txBody>
       </p:sp>
       <p:sp>
         <p:nvSpPr>
@@ -39697,6 +43849,13 @@
             </a:solidFill>
           </a:ln>
         </p:spPr>
+        <p:txBody>
+          <a:bodyPr/>
+          <a:lstStyle/>
+          <a:p>
+            <a:endParaRPr lang="en-US"/>
+          </a:p>
+        </p:txBody>
       </p:sp>
       <p:sp>
         <p:nvSpPr>
@@ -39780,6 +43939,13 @@
             </a:solidFill>
           </a:ln>
         </p:spPr>
+        <p:txBody>
+          <a:bodyPr/>
+          <a:lstStyle/>
+          <a:p>
+            <a:endParaRPr lang="en-US"/>
+          </a:p>
+        </p:txBody>
       </p:sp>
       <p:sp>
         <p:nvSpPr>
@@ -39863,6 +44029,13 @@
             </a:solidFill>
           </a:ln>
         </p:spPr>
+        <p:txBody>
+          <a:bodyPr/>
+          <a:lstStyle/>
+          <a:p>
+            <a:endParaRPr lang="en-US"/>
+          </a:p>
+        </p:txBody>
       </p:sp>
       <p:sp>
         <p:nvSpPr>
@@ -39946,6 +44119,13 @@
             </a:solidFill>
           </a:ln>
         </p:spPr>
+        <p:txBody>
+          <a:bodyPr/>
+          <a:lstStyle/>
+          <a:p>
+            <a:endParaRPr lang="en-US"/>
+          </a:p>
+        </p:txBody>
       </p:sp>
       <p:sp>
         <p:nvSpPr>
@@ -40029,6 +44209,13 @@
             </a:solidFill>
           </a:ln>
         </p:spPr>
+        <p:txBody>
+          <a:bodyPr/>
+          <a:lstStyle/>
+          <a:p>
+            <a:endParaRPr lang="en-US"/>
+          </a:p>
+        </p:txBody>
       </p:sp>
       <p:sp>
         <p:nvSpPr>
@@ -40112,6 +44299,13 @@
             </a:solidFill>
           </a:ln>
         </p:spPr>
+        <p:txBody>
+          <a:bodyPr/>
+          <a:lstStyle/>
+          <a:p>
+            <a:endParaRPr lang="en-US"/>
+          </a:p>
+        </p:txBody>
       </p:sp>
       <p:sp>
         <p:nvSpPr>
@@ -40195,6 +44389,13 @@
             </a:solidFill>
           </a:ln>
         </p:spPr>
+        <p:txBody>
+          <a:bodyPr/>
+          <a:lstStyle/>
+          <a:p>
+            <a:endParaRPr lang="en-US"/>
+          </a:p>
+        </p:txBody>
       </p:sp>
       <p:sp>
         <p:nvSpPr>
@@ -40278,6 +44479,13 @@
             </a:solidFill>
           </a:ln>
         </p:spPr>
+        <p:txBody>
+          <a:bodyPr/>
+          <a:lstStyle/>
+          <a:p>
+            <a:endParaRPr lang="en-US"/>
+          </a:p>
+        </p:txBody>
       </p:sp>
       <p:sp>
         <p:nvSpPr>
@@ -40361,6 +44569,13 @@
             </a:solidFill>
           </a:ln>
         </p:spPr>
+        <p:txBody>
+          <a:bodyPr/>
+          <a:lstStyle/>
+          <a:p>
+            <a:endParaRPr lang="en-US"/>
+          </a:p>
+        </p:txBody>
       </p:sp>
       <p:sp>
         <p:nvSpPr>
@@ -40444,6 +44659,13 @@
             </a:solidFill>
           </a:ln>
         </p:spPr>
+        <p:txBody>
+          <a:bodyPr/>
+          <a:lstStyle/>
+          <a:p>
+            <a:endParaRPr lang="en-US"/>
+          </a:p>
+        </p:txBody>
       </p:sp>
       <p:sp>
         <p:nvSpPr>
@@ -40527,6 +44749,13 @@
             </a:solidFill>
           </a:ln>
         </p:spPr>
+        <p:txBody>
+          <a:bodyPr/>
+          <a:lstStyle/>
+          <a:p>
+            <a:endParaRPr lang="en-US"/>
+          </a:p>
+        </p:txBody>
       </p:sp>
       <p:sp>
         <p:nvSpPr>
@@ -40610,6 +44839,13 @@
             </a:solidFill>
           </a:ln>
         </p:spPr>
+        <p:txBody>
+          <a:bodyPr/>
+          <a:lstStyle/>
+          <a:p>
+            <a:endParaRPr lang="en-US"/>
+          </a:p>
+        </p:txBody>
       </p:sp>
       <p:sp>
         <p:nvSpPr>
@@ -40693,6 +44929,13 @@
             </a:solidFill>
           </a:ln>
         </p:spPr>
+        <p:txBody>
+          <a:bodyPr/>
+          <a:lstStyle/>
+          <a:p>
+            <a:endParaRPr lang="en-US"/>
+          </a:p>
+        </p:txBody>
       </p:sp>
       <p:sp>
         <p:nvSpPr>
@@ -40824,6 +45067,13 @@
             </a:solidFill>
           </a:ln>
         </p:spPr>
+        <p:txBody>
+          <a:bodyPr/>
+          <a:lstStyle/>
+          <a:p>
+            <a:endParaRPr lang="en-US"/>
+          </a:p>
+        </p:txBody>
       </p:sp>
       <p:sp>
         <p:nvSpPr>
@@ -40960,6 +45210,13 @@
             </a:solidFill>
           </a:ln>
         </p:spPr>
+        <p:txBody>
+          <a:bodyPr/>
+          <a:lstStyle/>
+          <a:p>
+            <a:endParaRPr lang="en-US"/>
+          </a:p>
+        </p:txBody>
       </p:sp>
       <p:sp>
         <p:nvSpPr>
@@ -40994,6 +45251,13 @@
             </a:solidFill>
           </a:ln>
         </p:spPr>
+        <p:txBody>
+          <a:bodyPr/>
+          <a:lstStyle/>
+          <a:p>
+            <a:endParaRPr lang="en-US"/>
+          </a:p>
+        </p:txBody>
       </p:sp>
       <p:sp>
         <p:nvSpPr>
@@ -41028,6 +45292,13 @@
             </a:solidFill>
           </a:ln>
         </p:spPr>
+        <p:txBody>
+          <a:bodyPr/>
+          <a:lstStyle/>
+          <a:p>
+            <a:endParaRPr lang="en-US"/>
+          </a:p>
+        </p:txBody>
       </p:sp>
       <p:sp>
         <p:nvSpPr>
@@ -41062,6 +45333,13 @@
             </a:solidFill>
           </a:ln>
         </p:spPr>
+        <p:txBody>
+          <a:bodyPr/>
+          <a:lstStyle/>
+          <a:p>
+            <a:endParaRPr lang="en-US"/>
+          </a:p>
+        </p:txBody>
       </p:sp>
       <p:sp>
         <p:nvSpPr>
@@ -41096,6 +45374,13 @@
             </a:solidFill>
           </a:ln>
         </p:spPr>
+        <p:txBody>
+          <a:bodyPr/>
+          <a:lstStyle/>
+          <a:p>
+            <a:endParaRPr lang="en-US"/>
+          </a:p>
+        </p:txBody>
       </p:sp>
       <p:sp>
         <p:nvSpPr>
@@ -41130,6 +45415,13 @@
             </a:solidFill>
           </a:ln>
         </p:spPr>
+        <p:txBody>
+          <a:bodyPr/>
+          <a:lstStyle/>
+          <a:p>
+            <a:endParaRPr lang="en-US"/>
+          </a:p>
+        </p:txBody>
       </p:sp>
       <p:sp>
         <p:nvSpPr>
@@ -41164,6 +45456,13 @@
             </a:solidFill>
           </a:ln>
         </p:spPr>
+        <p:txBody>
+          <a:bodyPr/>
+          <a:lstStyle/>
+          <a:p>
+            <a:endParaRPr lang="en-US"/>
+          </a:p>
+        </p:txBody>
       </p:sp>
       <p:sp>
         <p:nvSpPr>
@@ -41198,6 +45497,13 @@
             </a:solidFill>
           </a:ln>
         </p:spPr>
+        <p:txBody>
+          <a:bodyPr/>
+          <a:lstStyle/>
+          <a:p>
+            <a:endParaRPr lang="en-US"/>
+          </a:p>
+        </p:txBody>
       </p:sp>
       <p:sp>
         <p:nvSpPr>
@@ -41366,6 +45672,13 @@
             </a:solidFill>
           </a:ln>
         </p:spPr>
+        <p:txBody>
+          <a:bodyPr/>
+          <a:lstStyle/>
+          <a:p>
+            <a:endParaRPr lang="en-US"/>
+          </a:p>
+        </p:txBody>
       </p:sp>
       <p:sp>
         <p:nvSpPr>
@@ -41400,6 +45713,13 @@
             </a:solidFill>
           </a:ln>
         </p:spPr>
+        <p:txBody>
+          <a:bodyPr/>
+          <a:lstStyle/>
+          <a:p>
+            <a:endParaRPr lang="en-US"/>
+          </a:p>
+        </p:txBody>
       </p:sp>
       <p:cxnSp>
         <p:nvCxnSpPr>
@@ -41475,6 +45795,13 @@
             </a:solidFill>
           </a:ln>
         </p:spPr>
+        <p:txBody>
+          <a:bodyPr/>
+          <a:lstStyle/>
+          <a:p>
+            <a:endParaRPr lang="en-US"/>
+          </a:p>
+        </p:txBody>
       </p:sp>
       <p:sp>
         <p:nvSpPr>
@@ -41985,6 +46312,13 @@
             </a:solidFill>
           </a:ln>
         </p:spPr>
+        <p:txBody>
+          <a:bodyPr/>
+          <a:lstStyle/>
+          <a:p>
+            <a:endParaRPr lang="en-US"/>
+          </a:p>
+        </p:txBody>
       </p:sp>
       <p:sp>
         <p:nvSpPr>
@@ -42070,6 +46404,13 @@
             </a:solidFill>
           </a:ln>
         </p:spPr>
+        <p:txBody>
+          <a:bodyPr/>
+          <a:lstStyle/>
+          <a:p>
+            <a:endParaRPr lang="en-US"/>
+          </a:p>
+        </p:txBody>
       </p:sp>
       <p:sp>
         <p:nvSpPr>
@@ -42150,6 +46491,13 @@
             </a:solidFill>
           </a:ln>
         </p:spPr>
+        <p:txBody>
+          <a:bodyPr/>
+          <a:lstStyle/>
+          <a:p>
+            <a:endParaRPr lang="en-US"/>
+          </a:p>
+        </p:txBody>
       </p:sp>
       <p:sp>
         <p:nvSpPr>
@@ -42184,6 +46532,13 @@
             </a:solidFill>
           </a:ln>
         </p:spPr>
+        <p:txBody>
+          <a:bodyPr/>
+          <a:lstStyle/>
+          <a:p>
+            <a:endParaRPr lang="en-US"/>
+          </a:p>
+        </p:txBody>
       </p:sp>
       <p:sp>
         <p:nvSpPr>
@@ -42264,6 +46619,13 @@
             </a:solidFill>
           </a:ln>
         </p:spPr>
+        <p:txBody>
+          <a:bodyPr/>
+          <a:lstStyle/>
+          <a:p>
+            <a:endParaRPr lang="en-US"/>
+          </a:p>
+        </p:txBody>
       </p:sp>
       <p:sp>
         <p:nvSpPr>
@@ -42298,6 +46660,13 @@
             </a:solidFill>
           </a:ln>
         </p:spPr>
+        <p:txBody>
+          <a:bodyPr/>
+          <a:lstStyle/>
+          <a:p>
+            <a:endParaRPr lang="en-US"/>
+          </a:p>
+        </p:txBody>
       </p:sp>
       <p:sp>
         <p:nvSpPr>
@@ -42381,6 +46750,13 @@
             </a:solidFill>
           </a:ln>
         </p:spPr>
+        <p:txBody>
+          <a:bodyPr/>
+          <a:lstStyle/>
+          <a:p>
+            <a:endParaRPr lang="en-US"/>
+          </a:p>
+        </p:txBody>
       </p:sp>
       <p:sp>
         <p:nvSpPr>
@@ -42568,6 +46944,13 @@
             </a:solidFill>
           </a:ln>
         </p:spPr>
+        <p:txBody>
+          <a:bodyPr/>
+          <a:lstStyle/>
+          <a:p>
+            <a:endParaRPr lang="en-US"/>
+          </a:p>
+        </p:txBody>
       </p:sp>
       <p:sp>
         <p:nvSpPr>
@@ -42771,6 +47154,13 @@
             </a:solidFill>
           </a:ln>
         </p:spPr>
+        <p:txBody>
+          <a:bodyPr/>
+          <a:lstStyle/>
+          <a:p>
+            <a:endParaRPr lang="en-US"/>
+          </a:p>
+        </p:txBody>
       </p:sp>
       <p:sp>
         <p:nvSpPr>
@@ -43132,6 +47522,13 @@
             </a:solidFill>
           </a:ln>
         </p:spPr>
+        <p:txBody>
+          <a:bodyPr/>
+          <a:lstStyle/>
+          <a:p>
+            <a:endParaRPr lang="en-US"/>
+          </a:p>
+        </p:txBody>
       </p:sp>
       <p:sp>
         <p:nvSpPr>
@@ -43661,6 +48058,13 @@
             </a:solidFill>
           </a:ln>
         </p:spPr>
+        <p:txBody>
+          <a:bodyPr/>
+          <a:lstStyle/>
+          <a:p>
+            <a:endParaRPr lang="en-US"/>
+          </a:p>
+        </p:txBody>
       </p:sp>
       <p:sp>
         <p:nvSpPr>
@@ -43746,6 +48150,13 @@
             </a:solidFill>
           </a:ln>
         </p:spPr>
+        <p:txBody>
+          <a:bodyPr/>
+          <a:lstStyle/>
+          <a:p>
+            <a:endParaRPr lang="en-US"/>
+          </a:p>
+        </p:txBody>
       </p:sp>
       <p:sp>
         <p:nvSpPr>
@@ -43826,6 +48237,13 @@
             </a:solidFill>
           </a:ln>
         </p:spPr>
+        <p:txBody>
+          <a:bodyPr/>
+          <a:lstStyle/>
+          <a:p>
+            <a:endParaRPr lang="en-US"/>
+          </a:p>
+        </p:txBody>
       </p:sp>
       <p:sp>
         <p:nvSpPr>
@@ -43860,6 +48278,13 @@
             </a:solidFill>
           </a:ln>
         </p:spPr>
+        <p:txBody>
+          <a:bodyPr/>
+          <a:lstStyle/>
+          <a:p>
+            <a:endParaRPr lang="en-US"/>
+          </a:p>
+        </p:txBody>
       </p:sp>
       <p:sp>
         <p:nvSpPr>
@@ -43940,6 +48365,13 @@
             </a:solidFill>
           </a:ln>
         </p:spPr>
+        <p:txBody>
+          <a:bodyPr/>
+          <a:lstStyle/>
+          <a:p>
+            <a:endParaRPr lang="en-US"/>
+          </a:p>
+        </p:txBody>
       </p:sp>
       <p:sp>
         <p:nvSpPr>
@@ -43974,6 +48406,13 @@
             </a:solidFill>
           </a:ln>
         </p:spPr>
+        <p:txBody>
+          <a:bodyPr/>
+          <a:lstStyle/>
+          <a:p>
+            <a:endParaRPr lang="en-US"/>
+          </a:p>
+        </p:txBody>
       </p:sp>
       <p:sp>
         <p:nvSpPr>
@@ -44054,6 +48493,13 @@
             </a:solidFill>
           </a:ln>
         </p:spPr>
+        <p:txBody>
+          <a:bodyPr/>
+          <a:lstStyle/>
+          <a:p>
+            <a:endParaRPr lang="en-US"/>
+          </a:p>
+        </p:txBody>
       </p:sp>
       <p:sp>
         <p:nvSpPr>
@@ -44189,6 +48635,13 @@
             <a:prstDash val="solid"/>
           </a:ln>
         </p:spPr>
+        <p:txBody>
+          <a:bodyPr/>
+          <a:lstStyle/>
+          <a:p>
+            <a:endParaRPr lang="en-US"/>
+          </a:p>
+        </p:txBody>
       </p:sp>
       <p:sp>
         <p:nvSpPr>
@@ -44612,6 +49065,13 @@
             <a:prstDash val="solid"/>
           </a:ln>
         </p:spPr>
+        <p:txBody>
+          <a:bodyPr/>
+          <a:lstStyle/>
+          <a:p>
+            <a:endParaRPr lang="en-US"/>
+          </a:p>
+        </p:txBody>
       </p:sp>
       <p:pic>
         <p:nvPicPr>
@@ -44733,6 +49193,13 @@
             <a:prstDash val="solid"/>
           </a:ln>
         </p:spPr>
+        <p:txBody>
+          <a:bodyPr/>
+          <a:lstStyle/>
+          <a:p>
+            <a:endParaRPr lang="en-US"/>
+          </a:p>
+        </p:txBody>
       </p:sp>
       <p:pic>
         <p:nvPicPr>
@@ -44854,6 +49321,13 @@
             <a:prstDash val="solid"/>
           </a:ln>
         </p:spPr>
+        <p:txBody>
+          <a:bodyPr/>
+          <a:lstStyle/>
+          <a:p>
+            <a:endParaRPr lang="en-US"/>
+          </a:p>
+        </p:txBody>
       </p:sp>
       <p:pic>
         <p:nvPicPr>
@@ -45406,6 +49880,13 @@
             </a:solidFill>
           </a:ln>
         </p:spPr>
+        <p:txBody>
+          <a:bodyPr/>
+          <a:lstStyle/>
+          <a:p>
+            <a:endParaRPr lang="en-US"/>
+          </a:p>
+        </p:txBody>
       </p:sp>
       <p:sp>
         <p:nvSpPr>
@@ -45448,13 +49929,26 @@
               </a:defRPr>
             </a:pPr>
             <a:r>
-              <a:rPr sz="1050" b="1">
+              <a:rPr sz="1050" b="1" dirty="0">
                 <a:solidFill>
                   <a:srgbClr val="64748B"/>
                 </a:solidFill>
               </a:rPr>
-              <a:t>07</a:t>
-            </a:r>
+              <a:t>0</a:t>
+            </a:r>
+            <a:r>
+              <a:rPr lang="en-US" sz="1050" b="1" dirty="0">
+                <a:solidFill>
+                  <a:srgbClr val="64748B"/>
+                </a:solidFill>
+              </a:rPr>
+              <a:t>8</a:t>
+            </a:r>
+            <a:endParaRPr sz="1050" b="1" dirty="0">
+              <a:solidFill>
+                <a:srgbClr val="64748B"/>
+              </a:solidFill>
+            </a:endParaRPr>
           </a:p>
         </p:txBody>
       </p:sp>
@@ -45542,6 +50036,13 @@
             </a:solidFill>
           </a:ln>
         </p:spPr>
+        <p:txBody>
+          <a:bodyPr/>
+          <a:lstStyle/>
+          <a:p>
+            <a:endParaRPr lang="en-US"/>
+          </a:p>
+        </p:txBody>
       </p:sp>
       <p:sp>
         <p:nvSpPr>
@@ -45627,6 +50128,13 @@
             </a:solidFill>
           </a:ln>
         </p:spPr>
+        <p:txBody>
+          <a:bodyPr/>
+          <a:lstStyle/>
+          <a:p>
+            <a:endParaRPr lang="en-US"/>
+          </a:p>
+        </p:txBody>
       </p:sp>
       <p:sp>
         <p:nvSpPr>
@@ -45720,13 +50228,90 @@
               </a:defRPr>
             </a:pPr>
             <a:r>
-              <a:rPr sz="1050" b="0">
+              <a:rPr sz="1050" b="0" dirty="0">
                 <a:solidFill>
                   <a:srgbClr val="64748B"/>
                 </a:solidFill>
               </a:rPr>
-              <a:t>Nhận yêu cầu · trả kết quả</a:t>
-            </a:r>
+              <a:t>Nhận </a:t>
+            </a:r>
+            <a:r>
+              <a:rPr sz="1050" b="0" dirty="0" err="1">
+                <a:solidFill>
+                  <a:srgbClr val="64748B"/>
+                </a:solidFill>
+              </a:rPr>
+              <a:t>yêu</a:t>
+            </a:r>
+            <a:r>
+              <a:rPr sz="1050" b="0" dirty="0">
+                <a:solidFill>
+                  <a:srgbClr val="64748B"/>
+                </a:solidFill>
+              </a:rPr>
+              <a:t> </a:t>
+            </a:r>
+            <a:r>
+              <a:rPr sz="1050" b="0" dirty="0" err="1">
+                <a:solidFill>
+                  <a:srgbClr val="64748B"/>
+                </a:solidFill>
+              </a:rPr>
+              <a:t>cầu</a:t>
+            </a:r>
+            <a:r>
+              <a:rPr sz="1050" b="0" dirty="0">
+                <a:solidFill>
+                  <a:srgbClr val="64748B"/>
+                </a:solidFill>
+              </a:rPr>
+              <a:t> · </a:t>
+            </a:r>
+            <a:r>
+              <a:rPr sz="1050" b="0" dirty="0" err="1">
+                <a:solidFill>
+                  <a:srgbClr val="64748B"/>
+                </a:solidFill>
+              </a:rPr>
+              <a:t>trả</a:t>
+            </a:r>
+            <a:r>
+              <a:rPr sz="1050" b="0" dirty="0">
+                <a:solidFill>
+                  <a:srgbClr val="64748B"/>
+                </a:solidFill>
+              </a:rPr>
+              <a:t> </a:t>
+            </a:r>
+            <a:r>
+              <a:rPr sz="1050" b="0" dirty="0" err="1">
+                <a:solidFill>
+                  <a:srgbClr val="64748B"/>
+                </a:solidFill>
+              </a:rPr>
+              <a:t>kết</a:t>
+            </a:r>
+            <a:r>
+              <a:rPr sz="1050" b="0" dirty="0">
+                <a:solidFill>
+                  <a:srgbClr val="64748B"/>
+                </a:solidFill>
+              </a:rPr>
+              <a:t> </a:t>
+            </a:r>
+            <a:r>
+              <a:rPr sz="1050" b="0" dirty="0" err="1">
+                <a:solidFill>
+                  <a:srgbClr val="64748B"/>
+                </a:solidFill>
+              </a:rPr>
+              <a:t>quả</a:t>
+            </a:r>
+            <a:endParaRPr sz="1050" b="0" dirty="0">
+              <a:solidFill>
+                <a:srgbClr val="64748B"/>
+              </a:solidFill>
+            </a:endParaRPr>
           </a:p>
         </p:txBody>
       </p:sp>
@@ -45763,6 +50348,13 @@
             </a:solidFill>
           </a:ln>
         </p:spPr>
+        <p:txBody>
+          <a:bodyPr/>
+          <a:lstStyle/>
+          <a:p>
+            <a:endParaRPr lang="en-US"/>
+          </a:p>
+        </p:txBody>
       </p:sp>
       <p:sp>
         <p:nvSpPr>
@@ -45899,6 +50491,13 @@
             </a:solidFill>
           </a:ln>
         </p:spPr>
+        <p:txBody>
+          <a:bodyPr/>
+          <a:lstStyle/>
+          <a:p>
+            <a:endParaRPr lang="en-US"/>
+          </a:p>
+        </p:txBody>
       </p:sp>
       <p:sp>
         <p:nvSpPr>
@@ -46035,6 +50634,13 @@
             </a:solidFill>
           </a:ln>
         </p:spPr>
+        <p:txBody>
+          <a:bodyPr/>
+          <a:lstStyle/>
+          <a:p>
+            <a:endParaRPr lang="en-US"/>
+          </a:p>
+        </p:txBody>
       </p:sp>
       <p:sp>
         <p:nvSpPr>
@@ -46171,6 +50777,13 @@
             </a:solidFill>
           </a:ln>
         </p:spPr>
+        <p:txBody>
+          <a:bodyPr/>
+          <a:lstStyle/>
+          <a:p>
+            <a:endParaRPr lang="en-US"/>
+          </a:p>
+        </p:txBody>
       </p:sp>
       <p:sp>
         <p:nvSpPr>
@@ -46307,6 +50920,13 @@
             </a:solidFill>
           </a:ln>
         </p:spPr>
+        <p:txBody>
+          <a:bodyPr/>
+          <a:lstStyle/>
+          <a:p>
+            <a:endParaRPr lang="en-US"/>
+          </a:p>
+        </p:txBody>
       </p:sp>
       <p:sp>
         <p:nvSpPr>
@@ -46443,6 +51063,13 @@
             </a:solidFill>
           </a:ln>
         </p:spPr>
+        <p:txBody>
+          <a:bodyPr/>
+          <a:lstStyle/>
+          <a:p>
+            <a:endParaRPr lang="en-US"/>
+          </a:p>
+        </p:txBody>
       </p:sp>
       <p:sp>
         <p:nvSpPr>
@@ -46683,6 +51310,13 @@
             </a:solidFill>
           </a:ln>
         </p:spPr>
+        <p:txBody>
+          <a:bodyPr/>
+          <a:lstStyle/>
+          <a:p>
+            <a:endParaRPr lang="en-US"/>
+          </a:p>
+        </p:txBody>
       </p:sp>
       <p:sp>
         <p:nvSpPr>
@@ -46776,13 +51410,34 @@
               </a:defRPr>
             </a:pPr>
             <a:r>
-              <a:rPr sz="900" b="0">
+              <a:rPr lang="en-US" sz="900" b="0" dirty="0">
                 <a:solidFill>
                   <a:srgbClr val="64748B"/>
                 </a:solidFill>
               </a:rPr>
-              <a:t>7 / 20</a:t>
-            </a:r>
+              <a:t>8</a:t>
+            </a:r>
+            <a:r>
+              <a:rPr sz="900" b="0" dirty="0">
+                <a:solidFill>
+                  <a:srgbClr val="64748B"/>
+                </a:solidFill>
+              </a:rPr>
+              <a:t> / 2</a:t>
+            </a:r>
+            <a:r>
+              <a:rPr lang="en-US" sz="900" b="0" dirty="0">
+                <a:solidFill>
+                  <a:srgbClr val="64748B"/>
+                </a:solidFill>
+              </a:rPr>
+              <a:t>1</a:t>
+            </a:r>
+            <a:endParaRPr sz="900" b="0" dirty="0">
+              <a:solidFill>
+                <a:srgbClr val="64748B"/>
+              </a:solidFill>
+            </a:endParaRPr>
           </a:p>
         </p:txBody>
       </p:sp>
@@ -47066,6 +51721,13 @@
             </a:solidFill>
           </a:ln>
         </p:spPr>
+        <p:txBody>
+          <a:bodyPr/>
+          <a:lstStyle/>
+          <a:p>
+            <a:endParaRPr lang="en-US"/>
+          </a:p>
+        </p:txBody>
       </p:sp>
       <p:sp>
         <p:nvSpPr>
@@ -47108,13 +51770,26 @@
               </a:defRPr>
             </a:pPr>
             <a:r>
-              <a:rPr sz="1050" b="1">
+              <a:rPr sz="1050" b="1" dirty="0">
                 <a:solidFill>
                   <a:srgbClr val="64748B"/>
                 </a:solidFill>
               </a:rPr>
-              <a:t>08</a:t>
-            </a:r>
+              <a:t>0</a:t>
+            </a:r>
+            <a:r>
+              <a:rPr lang="en-US" sz="1050" b="1" dirty="0">
+                <a:solidFill>
+                  <a:srgbClr val="64748B"/>
+                </a:solidFill>
+              </a:rPr>
+              <a:t>9</a:t>
+            </a:r>
+            <a:endParaRPr sz="1050" b="1" dirty="0">
+              <a:solidFill>
+                <a:srgbClr val="64748B"/>
+              </a:solidFill>
+            </a:endParaRPr>
           </a:p>
         </p:txBody>
       </p:sp>
@@ -47413,6 +52088,13 @@
             </a:solidFill>
           </a:ln>
         </p:spPr>
+        <p:txBody>
+          <a:bodyPr/>
+          <a:lstStyle/>
+          <a:p>
+            <a:endParaRPr lang="en-US"/>
+          </a:p>
+        </p:txBody>
       </p:sp>
       <p:sp>
         <p:nvSpPr>
@@ -47496,6 +52178,13 @@
             </a:solidFill>
           </a:ln>
         </p:spPr>
+        <p:txBody>
+          <a:bodyPr/>
+          <a:lstStyle/>
+          <a:p>
+            <a:endParaRPr lang="en-US"/>
+          </a:p>
+        </p:txBody>
       </p:sp>
       <p:sp>
         <p:nvSpPr>
@@ -47579,6 +52268,13 @@
             </a:solidFill>
           </a:ln>
         </p:spPr>
+        <p:txBody>
+          <a:bodyPr/>
+          <a:lstStyle/>
+          <a:p>
+            <a:endParaRPr lang="en-US"/>
+          </a:p>
+        </p:txBody>
       </p:sp>
       <p:sp>
         <p:nvSpPr>
@@ -47662,6 +52358,13 @@
             </a:solidFill>
           </a:ln>
         </p:spPr>
+        <p:txBody>
+          <a:bodyPr/>
+          <a:lstStyle/>
+          <a:p>
+            <a:endParaRPr lang="en-US"/>
+          </a:p>
+        </p:txBody>
       </p:sp>
       <p:sp>
         <p:nvSpPr>
@@ -47745,6 +52448,13 @@
             </a:solidFill>
           </a:ln>
         </p:spPr>
+        <p:txBody>
+          <a:bodyPr/>
+          <a:lstStyle/>
+          <a:p>
+            <a:endParaRPr lang="en-US"/>
+          </a:p>
+        </p:txBody>
       </p:sp>
       <p:sp>
         <p:nvSpPr>
@@ -47828,6 +52538,13 @@
             </a:solidFill>
           </a:ln>
         </p:spPr>
+        <p:txBody>
+          <a:bodyPr/>
+          <a:lstStyle/>
+          <a:p>
+            <a:endParaRPr lang="en-US"/>
+          </a:p>
+        </p:txBody>
       </p:sp>
       <p:sp>
         <p:nvSpPr>
@@ -47911,6 +52628,13 @@
             </a:solidFill>
           </a:ln>
         </p:spPr>
+        <p:txBody>
+          <a:bodyPr/>
+          <a:lstStyle/>
+          <a:p>
+            <a:endParaRPr lang="en-US"/>
+          </a:p>
+        </p:txBody>
       </p:sp>
       <p:sp>
         <p:nvSpPr>
@@ -47991,6 +52715,13 @@
             </a:solidFill>
           </a:ln>
         </p:spPr>
+        <p:txBody>
+          <a:bodyPr/>
+          <a:lstStyle/>
+          <a:p>
+            <a:endParaRPr lang="en-US"/>
+          </a:p>
+        </p:txBody>
       </p:sp>
       <p:sp>
         <p:nvSpPr>
@@ -48592,6 +53323,13 @@
             </a:solidFill>
           </a:ln>
         </p:spPr>
+        <p:txBody>
+          <a:bodyPr/>
+          <a:lstStyle/>
+          <a:p>
+            <a:endParaRPr lang="en-US"/>
+          </a:p>
+        </p:txBody>
       </p:sp>
       <p:sp>
         <p:nvSpPr>
@@ -48723,6 +53461,13 @@
             </a:solidFill>
           </a:ln>
         </p:spPr>
+        <p:txBody>
+          <a:bodyPr/>
+          <a:lstStyle/>
+          <a:p>
+            <a:endParaRPr lang="en-US"/>
+          </a:p>
+        </p:txBody>
       </p:sp>
       <p:sp>
         <p:nvSpPr>
@@ -48816,13 +53561,34 @@
               </a:defRPr>
             </a:pPr>
             <a:r>
-              <a:rPr sz="900" b="0">
+              <a:rPr lang="en-US" sz="900" dirty="0">
                 <a:solidFill>
                   <a:srgbClr val="64748B"/>
                 </a:solidFill>
               </a:rPr>
-              <a:t>8 / 20</a:t>
-            </a:r>
+              <a:t>9</a:t>
+            </a:r>
+            <a:r>
+              <a:rPr sz="900" b="0" dirty="0">
+                <a:solidFill>
+                  <a:srgbClr val="64748B"/>
+                </a:solidFill>
+              </a:rPr>
+              <a:t> / 2</a:t>
+            </a:r>
+            <a:r>
+              <a:rPr lang="en-US" sz="900" b="0" dirty="0">
+                <a:solidFill>
+                  <a:srgbClr val="64748B"/>
+                </a:solidFill>
+              </a:rPr>
+              <a:t>1</a:t>
+            </a:r>
+            <a:endParaRPr sz="900" b="0" dirty="0">
+              <a:solidFill>
+                <a:srgbClr val="64748B"/>
+              </a:solidFill>
+            </a:endParaRPr>
           </a:p>
         </p:txBody>
       </p:sp>
